--- a/public/materials/foundation/html-first-page.pptx
+++ b/public/materials/foundation/html-first-page.pptx
@@ -2,20 +2,27 @@
 <file path=ppt/presentation.xml><?xml version="1.0" encoding="utf-8"?>
 <p:presentation xmlns:p="http://schemas.openxmlformats.org/presentationml/2006/main">
   <p:sldMasterIdLst>
-    <p:sldMasterId xmlns:r="http://schemas.openxmlformats.org/officeDocument/2006/relationships" id="2147483648" r:id="Rd7952103adeb4e11"/>
+    <p:sldMasterId xmlns:r="http://schemas.openxmlformats.org/officeDocument/2006/relationships" id="2147483648" r:id="R5684567d0086481c"/>
   </p:sldMasterIdLst>
   <p:notesMasterIdLst>
-    <p:notesMasterId xmlns:r="http://schemas.openxmlformats.org/officeDocument/2006/relationships" r:id="R9e8df69b55ac4b90"/>
+    <p:notesMasterId xmlns:r="http://schemas.openxmlformats.org/officeDocument/2006/relationships" r:id="Rdd457c736f9a41cb"/>
   </p:notesMasterIdLst>
   <p:sldIdLst>
-    <p:sldId xmlns:r="http://schemas.openxmlformats.org/officeDocument/2006/relationships" id="256" r:id="R7d93b2c001c844b5"/>
-    <p:sldId xmlns:r="http://schemas.openxmlformats.org/officeDocument/2006/relationships" id="257" r:id="R854a411aba8d4363"/>
-    <p:sldId xmlns:r="http://schemas.openxmlformats.org/officeDocument/2006/relationships" id="258" r:id="R1c8270679fec4142"/>
-    <p:sldId xmlns:r="http://schemas.openxmlformats.org/officeDocument/2006/relationships" id="259" r:id="Rfe3a1a1313bb4e35"/>
-    <p:sldId xmlns:r="http://schemas.openxmlformats.org/officeDocument/2006/relationships" id="260" r:id="Rb73f54a64a0145e8"/>
-    <p:sldId xmlns:r="http://schemas.openxmlformats.org/officeDocument/2006/relationships" id="261" r:id="R02e4ff3405c04bfb"/>
-    <p:sldId xmlns:r="http://schemas.openxmlformats.org/officeDocument/2006/relationships" id="262" r:id="R836911c821444d0d"/>
-    <p:sldId xmlns:r="http://schemas.openxmlformats.org/officeDocument/2006/relationships" id="263" r:id="R2d2c7e602f23472b"/>
+    <p:sldId xmlns:r="http://schemas.openxmlformats.org/officeDocument/2006/relationships" id="256" r:id="Rc0ad0064c3d645a0"/>
+    <p:sldId xmlns:r="http://schemas.openxmlformats.org/officeDocument/2006/relationships" id="257" r:id="R612d1d8f9d134000"/>
+    <p:sldId xmlns:r="http://schemas.openxmlformats.org/officeDocument/2006/relationships" id="258" r:id="R92e832545f52498e"/>
+    <p:sldId xmlns:r="http://schemas.openxmlformats.org/officeDocument/2006/relationships" id="259" r:id="Rb73299e8ad3d44a6"/>
+    <p:sldId xmlns:r="http://schemas.openxmlformats.org/officeDocument/2006/relationships" id="260" r:id="R12bc08efdf9d4c03"/>
+    <p:sldId xmlns:r="http://schemas.openxmlformats.org/officeDocument/2006/relationships" id="261" r:id="R8a7d9ea9d2f24d7c"/>
+    <p:sldId xmlns:r="http://schemas.openxmlformats.org/officeDocument/2006/relationships" id="262" r:id="R723234f400904a68"/>
+    <p:sldId xmlns:r="http://schemas.openxmlformats.org/officeDocument/2006/relationships" id="263" r:id="R6cec69044fa74e8a"/>
+    <p:sldId xmlns:r="http://schemas.openxmlformats.org/officeDocument/2006/relationships" id="264" r:id="R975dcfc3afbe490a"/>
+    <p:sldId xmlns:r="http://schemas.openxmlformats.org/officeDocument/2006/relationships" id="265" r:id="R42f78c6dd3984c5b"/>
+    <p:sldId xmlns:r="http://schemas.openxmlformats.org/officeDocument/2006/relationships" id="266" r:id="R9b487af593ac41a8"/>
+    <p:sldId xmlns:r="http://schemas.openxmlformats.org/officeDocument/2006/relationships" id="267" r:id="Rccbb887584814f3e"/>
+    <p:sldId xmlns:r="http://schemas.openxmlformats.org/officeDocument/2006/relationships" id="268" r:id="Rb7deff2817364d74"/>
+    <p:sldId xmlns:r="http://schemas.openxmlformats.org/officeDocument/2006/relationships" id="269" r:id="R9b5c1026dbe14a2d"/>
+    <p:sldId xmlns:r="http://schemas.openxmlformats.org/officeDocument/2006/relationships" id="270" r:id="R2e62fed45686467f"/>
   </p:sldIdLst>
   <p:sldSz cx="12192000" cy="6858000"/>
   <p:notesSz cx="6858000" cy="9144000"/>
@@ -475,6 +482,402 @@
 </p:notes>
 </file>
 
+<file path=ppt/notesSlides/notesSlide10.xml><?xml version="1.0" encoding="utf-8"?>
+<p:notes xmlns:p="http://schemas.openxmlformats.org/presentationml/2006/main">
+  <p:cSld>
+    <p:spTree>
+      <p:nvGrpSpPr>
+        <p:cNvPr id="1" name=""/>
+        <p:cNvGrpSpPr/>
+        <p:nvPr/>
+      </p:nvGrpSpPr>
+      <p:grpSpPr>
+        <a:xfrm xmlns:a="http://schemas.openxmlformats.org/drawingml/2006/main"/>
+      </p:grpSpPr>
+      <p:sp>
+        <p:nvSpPr>
+          <p:cNvPr id="2" name="Slide Image Placeholder 1"/>
+          <p:cNvSpPr>
+            <a:spLocks xmlns:a="http://schemas.openxmlformats.org/drawingml/2006/main" noGrp="1"/>
+          </p:cNvSpPr>
+          <p:nvPr>
+            <p:ph type="sldImg" idx="0"/>
+          </p:nvPr>
+        </p:nvSpPr>
+        <p:spPr/>
+      </p:sp>
+      <p:sp>
+        <p:nvSpPr>
+          <p:cNvPr id="3" name="Notes Placeholder 2"/>
+          <p:cNvSpPr>
+            <a:spLocks xmlns:a="http://schemas.openxmlformats.org/drawingml/2006/main" noGrp="1"/>
+          </p:cNvSpPr>
+          <p:nvPr>
+            <p:ph type="body" idx="1"/>
+          </p:nvPr>
+        </p:nvSpPr>
+        <p:spPr/>
+        <p:txBody>
+          <a:bodyPr xmlns:a="http://schemas.openxmlformats.org/drawingml/2006/main"/>
+          <a:lstStyle xmlns:a="http://schemas.openxmlformats.org/drawingml/2006/main"/>
+          <a:p xmlns:a="http://schemas.openxmlformats.org/drawingml/2006/main"/>
+        </p:txBody>
+      </p:sp>
+      <p:sp>
+        <p:nvSpPr>
+          <p:cNvPr id="4" name="Slide Number Placeholder 3"/>
+          <p:cNvSpPr>
+            <a:spLocks xmlns:a="http://schemas.openxmlformats.org/drawingml/2006/main" noGrp="1"/>
+          </p:cNvSpPr>
+          <p:nvPr>
+            <p:ph type="sldNum" idx="5"/>
+          </p:nvPr>
+        </p:nvSpPr>
+        <p:spPr/>
+        <p:txBody>
+          <a:bodyPr xmlns:a="http://schemas.openxmlformats.org/drawingml/2006/main"/>
+          <a:lstStyle xmlns:a="http://schemas.openxmlformats.org/drawingml/2006/main"/>
+          <a:p xmlns:a="http://schemas.openxmlformats.org/drawingml/2006/main"/>
+        </p:txBody>
+      </p:sp>
+    </p:spTree>
+  </p:cSld>
+  <p:clrMapOvr>
+    <a:masterClrMapping xmlns:a="http://schemas.openxmlformats.org/drawingml/2006/main"/>
+  </p:clrMapOvr>
+</p:notes>
+</file>
+
+<file path=ppt/notesSlides/notesSlide11.xml><?xml version="1.0" encoding="utf-8"?>
+<p:notes xmlns:p="http://schemas.openxmlformats.org/presentationml/2006/main">
+  <p:cSld>
+    <p:spTree>
+      <p:nvGrpSpPr>
+        <p:cNvPr id="1" name=""/>
+        <p:cNvGrpSpPr/>
+        <p:nvPr/>
+      </p:nvGrpSpPr>
+      <p:grpSpPr>
+        <a:xfrm xmlns:a="http://schemas.openxmlformats.org/drawingml/2006/main"/>
+      </p:grpSpPr>
+      <p:sp>
+        <p:nvSpPr>
+          <p:cNvPr id="2" name="Slide Image Placeholder 1"/>
+          <p:cNvSpPr>
+            <a:spLocks xmlns:a="http://schemas.openxmlformats.org/drawingml/2006/main" noGrp="1"/>
+          </p:cNvSpPr>
+          <p:nvPr>
+            <p:ph type="sldImg" idx="0"/>
+          </p:nvPr>
+        </p:nvSpPr>
+        <p:spPr/>
+      </p:sp>
+      <p:sp>
+        <p:nvSpPr>
+          <p:cNvPr id="3" name="Notes Placeholder 2"/>
+          <p:cNvSpPr>
+            <a:spLocks xmlns:a="http://schemas.openxmlformats.org/drawingml/2006/main" noGrp="1"/>
+          </p:cNvSpPr>
+          <p:nvPr>
+            <p:ph type="body" idx="1"/>
+          </p:nvPr>
+        </p:nvSpPr>
+        <p:spPr/>
+        <p:txBody>
+          <a:bodyPr xmlns:a="http://schemas.openxmlformats.org/drawingml/2006/main"/>
+          <a:lstStyle xmlns:a="http://schemas.openxmlformats.org/drawingml/2006/main"/>
+          <a:p xmlns:a="http://schemas.openxmlformats.org/drawingml/2006/main"/>
+        </p:txBody>
+      </p:sp>
+      <p:sp>
+        <p:nvSpPr>
+          <p:cNvPr id="4" name="Slide Number Placeholder 3"/>
+          <p:cNvSpPr>
+            <a:spLocks xmlns:a="http://schemas.openxmlformats.org/drawingml/2006/main" noGrp="1"/>
+          </p:cNvSpPr>
+          <p:nvPr>
+            <p:ph type="sldNum" idx="5"/>
+          </p:nvPr>
+        </p:nvSpPr>
+        <p:spPr/>
+        <p:txBody>
+          <a:bodyPr xmlns:a="http://schemas.openxmlformats.org/drawingml/2006/main"/>
+          <a:lstStyle xmlns:a="http://schemas.openxmlformats.org/drawingml/2006/main"/>
+          <a:p xmlns:a="http://schemas.openxmlformats.org/drawingml/2006/main"/>
+        </p:txBody>
+      </p:sp>
+    </p:spTree>
+  </p:cSld>
+  <p:clrMapOvr>
+    <a:masterClrMapping xmlns:a="http://schemas.openxmlformats.org/drawingml/2006/main"/>
+  </p:clrMapOvr>
+</p:notes>
+</file>
+
+<file path=ppt/notesSlides/notesSlide12.xml><?xml version="1.0" encoding="utf-8"?>
+<p:notes xmlns:p="http://schemas.openxmlformats.org/presentationml/2006/main">
+  <p:cSld>
+    <p:spTree>
+      <p:nvGrpSpPr>
+        <p:cNvPr id="1" name=""/>
+        <p:cNvGrpSpPr/>
+        <p:nvPr/>
+      </p:nvGrpSpPr>
+      <p:grpSpPr>
+        <a:xfrm xmlns:a="http://schemas.openxmlformats.org/drawingml/2006/main"/>
+      </p:grpSpPr>
+      <p:sp>
+        <p:nvSpPr>
+          <p:cNvPr id="2" name="Slide Image Placeholder 1"/>
+          <p:cNvSpPr>
+            <a:spLocks xmlns:a="http://schemas.openxmlformats.org/drawingml/2006/main" noGrp="1"/>
+          </p:cNvSpPr>
+          <p:nvPr>
+            <p:ph type="sldImg" idx="0"/>
+          </p:nvPr>
+        </p:nvSpPr>
+        <p:spPr/>
+      </p:sp>
+      <p:sp>
+        <p:nvSpPr>
+          <p:cNvPr id="3" name="Notes Placeholder 2"/>
+          <p:cNvSpPr>
+            <a:spLocks xmlns:a="http://schemas.openxmlformats.org/drawingml/2006/main" noGrp="1"/>
+          </p:cNvSpPr>
+          <p:nvPr>
+            <p:ph type="body" idx="1"/>
+          </p:nvPr>
+        </p:nvSpPr>
+        <p:spPr/>
+        <p:txBody>
+          <a:bodyPr xmlns:a="http://schemas.openxmlformats.org/drawingml/2006/main"/>
+          <a:lstStyle xmlns:a="http://schemas.openxmlformats.org/drawingml/2006/main"/>
+          <a:p xmlns:a="http://schemas.openxmlformats.org/drawingml/2006/main"/>
+        </p:txBody>
+      </p:sp>
+      <p:sp>
+        <p:nvSpPr>
+          <p:cNvPr id="4" name="Slide Number Placeholder 3"/>
+          <p:cNvSpPr>
+            <a:spLocks xmlns:a="http://schemas.openxmlformats.org/drawingml/2006/main" noGrp="1"/>
+          </p:cNvSpPr>
+          <p:nvPr>
+            <p:ph type="sldNum" idx="5"/>
+          </p:nvPr>
+        </p:nvSpPr>
+        <p:spPr/>
+        <p:txBody>
+          <a:bodyPr xmlns:a="http://schemas.openxmlformats.org/drawingml/2006/main"/>
+          <a:lstStyle xmlns:a="http://schemas.openxmlformats.org/drawingml/2006/main"/>
+          <a:p xmlns:a="http://schemas.openxmlformats.org/drawingml/2006/main"/>
+        </p:txBody>
+      </p:sp>
+    </p:spTree>
+  </p:cSld>
+  <p:clrMapOvr>
+    <a:masterClrMapping xmlns:a="http://schemas.openxmlformats.org/drawingml/2006/main"/>
+  </p:clrMapOvr>
+</p:notes>
+</file>
+
+<file path=ppt/notesSlides/notesSlide13.xml><?xml version="1.0" encoding="utf-8"?>
+<p:notes xmlns:p="http://schemas.openxmlformats.org/presentationml/2006/main">
+  <p:cSld>
+    <p:spTree>
+      <p:nvGrpSpPr>
+        <p:cNvPr id="1" name=""/>
+        <p:cNvGrpSpPr/>
+        <p:nvPr/>
+      </p:nvGrpSpPr>
+      <p:grpSpPr>
+        <a:xfrm xmlns:a="http://schemas.openxmlformats.org/drawingml/2006/main"/>
+      </p:grpSpPr>
+      <p:sp>
+        <p:nvSpPr>
+          <p:cNvPr id="2" name="Slide Image Placeholder 1"/>
+          <p:cNvSpPr>
+            <a:spLocks xmlns:a="http://schemas.openxmlformats.org/drawingml/2006/main" noGrp="1"/>
+          </p:cNvSpPr>
+          <p:nvPr>
+            <p:ph type="sldImg" idx="0"/>
+          </p:nvPr>
+        </p:nvSpPr>
+        <p:spPr/>
+      </p:sp>
+      <p:sp>
+        <p:nvSpPr>
+          <p:cNvPr id="3" name="Notes Placeholder 2"/>
+          <p:cNvSpPr>
+            <a:spLocks xmlns:a="http://schemas.openxmlformats.org/drawingml/2006/main" noGrp="1"/>
+          </p:cNvSpPr>
+          <p:nvPr>
+            <p:ph type="body" idx="1"/>
+          </p:nvPr>
+        </p:nvSpPr>
+        <p:spPr/>
+        <p:txBody>
+          <a:bodyPr xmlns:a="http://schemas.openxmlformats.org/drawingml/2006/main"/>
+          <a:lstStyle xmlns:a="http://schemas.openxmlformats.org/drawingml/2006/main"/>
+          <a:p xmlns:a="http://schemas.openxmlformats.org/drawingml/2006/main"/>
+        </p:txBody>
+      </p:sp>
+      <p:sp>
+        <p:nvSpPr>
+          <p:cNvPr id="4" name="Slide Number Placeholder 3"/>
+          <p:cNvSpPr>
+            <a:spLocks xmlns:a="http://schemas.openxmlformats.org/drawingml/2006/main" noGrp="1"/>
+          </p:cNvSpPr>
+          <p:nvPr>
+            <p:ph type="sldNum" idx="5"/>
+          </p:nvPr>
+        </p:nvSpPr>
+        <p:spPr/>
+        <p:txBody>
+          <a:bodyPr xmlns:a="http://schemas.openxmlformats.org/drawingml/2006/main"/>
+          <a:lstStyle xmlns:a="http://schemas.openxmlformats.org/drawingml/2006/main"/>
+          <a:p xmlns:a="http://schemas.openxmlformats.org/drawingml/2006/main"/>
+        </p:txBody>
+      </p:sp>
+    </p:spTree>
+  </p:cSld>
+  <p:clrMapOvr>
+    <a:masterClrMapping xmlns:a="http://schemas.openxmlformats.org/drawingml/2006/main"/>
+  </p:clrMapOvr>
+</p:notes>
+</file>
+
+<file path=ppt/notesSlides/notesSlide14.xml><?xml version="1.0" encoding="utf-8"?>
+<p:notes xmlns:p="http://schemas.openxmlformats.org/presentationml/2006/main">
+  <p:cSld>
+    <p:spTree>
+      <p:nvGrpSpPr>
+        <p:cNvPr id="1" name=""/>
+        <p:cNvGrpSpPr/>
+        <p:nvPr/>
+      </p:nvGrpSpPr>
+      <p:grpSpPr>
+        <a:xfrm xmlns:a="http://schemas.openxmlformats.org/drawingml/2006/main"/>
+      </p:grpSpPr>
+      <p:sp>
+        <p:nvSpPr>
+          <p:cNvPr id="2" name="Slide Image Placeholder 1"/>
+          <p:cNvSpPr>
+            <a:spLocks xmlns:a="http://schemas.openxmlformats.org/drawingml/2006/main" noGrp="1"/>
+          </p:cNvSpPr>
+          <p:nvPr>
+            <p:ph type="sldImg" idx="0"/>
+          </p:nvPr>
+        </p:nvSpPr>
+        <p:spPr/>
+      </p:sp>
+      <p:sp>
+        <p:nvSpPr>
+          <p:cNvPr id="3" name="Notes Placeholder 2"/>
+          <p:cNvSpPr>
+            <a:spLocks xmlns:a="http://schemas.openxmlformats.org/drawingml/2006/main" noGrp="1"/>
+          </p:cNvSpPr>
+          <p:nvPr>
+            <p:ph type="body" idx="1"/>
+          </p:nvPr>
+        </p:nvSpPr>
+        <p:spPr/>
+        <p:txBody>
+          <a:bodyPr xmlns:a="http://schemas.openxmlformats.org/drawingml/2006/main"/>
+          <a:lstStyle xmlns:a="http://schemas.openxmlformats.org/drawingml/2006/main"/>
+          <a:p xmlns:a="http://schemas.openxmlformats.org/drawingml/2006/main"/>
+        </p:txBody>
+      </p:sp>
+      <p:sp>
+        <p:nvSpPr>
+          <p:cNvPr id="4" name="Slide Number Placeholder 3"/>
+          <p:cNvSpPr>
+            <a:spLocks xmlns:a="http://schemas.openxmlformats.org/drawingml/2006/main" noGrp="1"/>
+          </p:cNvSpPr>
+          <p:nvPr>
+            <p:ph type="sldNum" idx="5"/>
+          </p:nvPr>
+        </p:nvSpPr>
+        <p:spPr/>
+        <p:txBody>
+          <a:bodyPr xmlns:a="http://schemas.openxmlformats.org/drawingml/2006/main"/>
+          <a:lstStyle xmlns:a="http://schemas.openxmlformats.org/drawingml/2006/main"/>
+          <a:p xmlns:a="http://schemas.openxmlformats.org/drawingml/2006/main"/>
+        </p:txBody>
+      </p:sp>
+    </p:spTree>
+  </p:cSld>
+  <p:clrMapOvr>
+    <a:masterClrMapping xmlns:a="http://schemas.openxmlformats.org/drawingml/2006/main"/>
+  </p:clrMapOvr>
+</p:notes>
+</file>
+
+<file path=ppt/notesSlides/notesSlide15.xml><?xml version="1.0" encoding="utf-8"?>
+<p:notes xmlns:p="http://schemas.openxmlformats.org/presentationml/2006/main">
+  <p:cSld>
+    <p:spTree>
+      <p:nvGrpSpPr>
+        <p:cNvPr id="1" name=""/>
+        <p:cNvGrpSpPr/>
+        <p:nvPr/>
+      </p:nvGrpSpPr>
+      <p:grpSpPr>
+        <a:xfrm xmlns:a="http://schemas.openxmlformats.org/drawingml/2006/main"/>
+      </p:grpSpPr>
+      <p:sp>
+        <p:nvSpPr>
+          <p:cNvPr id="2" name="Slide Image Placeholder 1"/>
+          <p:cNvSpPr>
+            <a:spLocks xmlns:a="http://schemas.openxmlformats.org/drawingml/2006/main" noGrp="1"/>
+          </p:cNvSpPr>
+          <p:nvPr>
+            <p:ph type="sldImg" idx="0"/>
+          </p:nvPr>
+        </p:nvSpPr>
+        <p:spPr/>
+      </p:sp>
+      <p:sp>
+        <p:nvSpPr>
+          <p:cNvPr id="3" name="Notes Placeholder 2"/>
+          <p:cNvSpPr>
+            <a:spLocks xmlns:a="http://schemas.openxmlformats.org/drawingml/2006/main" noGrp="1"/>
+          </p:cNvSpPr>
+          <p:nvPr>
+            <p:ph type="body" idx="1"/>
+          </p:nvPr>
+        </p:nvSpPr>
+        <p:spPr/>
+        <p:txBody>
+          <a:bodyPr xmlns:a="http://schemas.openxmlformats.org/drawingml/2006/main"/>
+          <a:lstStyle xmlns:a="http://schemas.openxmlformats.org/drawingml/2006/main"/>
+          <a:p xmlns:a="http://schemas.openxmlformats.org/drawingml/2006/main"/>
+        </p:txBody>
+      </p:sp>
+      <p:sp>
+        <p:nvSpPr>
+          <p:cNvPr id="4" name="Slide Number Placeholder 3"/>
+          <p:cNvSpPr>
+            <a:spLocks xmlns:a="http://schemas.openxmlformats.org/drawingml/2006/main" noGrp="1"/>
+          </p:cNvSpPr>
+          <p:nvPr>
+            <p:ph type="sldNum" idx="5"/>
+          </p:nvPr>
+        </p:nvSpPr>
+        <p:spPr/>
+        <p:txBody>
+          <a:bodyPr xmlns:a="http://schemas.openxmlformats.org/drawingml/2006/main"/>
+          <a:lstStyle xmlns:a="http://schemas.openxmlformats.org/drawingml/2006/main"/>
+          <a:p xmlns:a="http://schemas.openxmlformats.org/drawingml/2006/main"/>
+        </p:txBody>
+      </p:sp>
+    </p:spTree>
+  </p:cSld>
+  <p:clrMapOvr>
+    <a:masterClrMapping xmlns:a="http://schemas.openxmlformats.org/drawingml/2006/main"/>
+  </p:clrMapOvr>
+</p:notes>
+</file>
+
 <file path=ppt/notesSlides/notesSlide2.xml><?xml version="1.0" encoding="utf-8"?>
 <p:notes xmlns:p="http://schemas.openxmlformats.org/presentationml/2006/main">
   <p:cSld>
@@ -872,6 +1275,72 @@
 </file>
 
 <file path=ppt/notesSlides/notesSlide8.xml><?xml version="1.0" encoding="utf-8"?>
+<p:notes xmlns:p="http://schemas.openxmlformats.org/presentationml/2006/main">
+  <p:cSld>
+    <p:spTree>
+      <p:nvGrpSpPr>
+        <p:cNvPr id="1" name=""/>
+        <p:cNvGrpSpPr/>
+        <p:nvPr/>
+      </p:nvGrpSpPr>
+      <p:grpSpPr>
+        <a:xfrm xmlns:a="http://schemas.openxmlformats.org/drawingml/2006/main"/>
+      </p:grpSpPr>
+      <p:sp>
+        <p:nvSpPr>
+          <p:cNvPr id="2" name="Slide Image Placeholder 1"/>
+          <p:cNvSpPr>
+            <a:spLocks xmlns:a="http://schemas.openxmlformats.org/drawingml/2006/main" noGrp="1"/>
+          </p:cNvSpPr>
+          <p:nvPr>
+            <p:ph type="sldImg" idx="0"/>
+          </p:nvPr>
+        </p:nvSpPr>
+        <p:spPr/>
+      </p:sp>
+      <p:sp>
+        <p:nvSpPr>
+          <p:cNvPr id="3" name="Notes Placeholder 2"/>
+          <p:cNvSpPr>
+            <a:spLocks xmlns:a="http://schemas.openxmlformats.org/drawingml/2006/main" noGrp="1"/>
+          </p:cNvSpPr>
+          <p:nvPr>
+            <p:ph type="body" idx="1"/>
+          </p:nvPr>
+        </p:nvSpPr>
+        <p:spPr/>
+        <p:txBody>
+          <a:bodyPr xmlns:a="http://schemas.openxmlformats.org/drawingml/2006/main"/>
+          <a:lstStyle xmlns:a="http://schemas.openxmlformats.org/drawingml/2006/main"/>
+          <a:p xmlns:a="http://schemas.openxmlformats.org/drawingml/2006/main"/>
+        </p:txBody>
+      </p:sp>
+      <p:sp>
+        <p:nvSpPr>
+          <p:cNvPr id="4" name="Slide Number Placeholder 3"/>
+          <p:cNvSpPr>
+            <a:spLocks xmlns:a="http://schemas.openxmlformats.org/drawingml/2006/main" noGrp="1"/>
+          </p:cNvSpPr>
+          <p:nvPr>
+            <p:ph type="sldNum" idx="5"/>
+          </p:nvPr>
+        </p:nvSpPr>
+        <p:spPr/>
+        <p:txBody>
+          <a:bodyPr xmlns:a="http://schemas.openxmlformats.org/drawingml/2006/main"/>
+          <a:lstStyle xmlns:a="http://schemas.openxmlformats.org/drawingml/2006/main"/>
+          <a:p xmlns:a="http://schemas.openxmlformats.org/drawingml/2006/main"/>
+        </p:txBody>
+      </p:sp>
+    </p:spTree>
+  </p:cSld>
+  <p:clrMapOvr>
+    <a:masterClrMapping xmlns:a="http://schemas.openxmlformats.org/drawingml/2006/main"/>
+  </p:clrMapOvr>
+</p:notes>
+</file>
+
+<file path=ppt/notesSlides/notesSlide9.xml><?xml version="1.0" encoding="utf-8"?>
 <p:notes xmlns:p="http://schemas.openxmlformats.org/presentationml/2006/main">
   <p:cSld>
     <p:spTree>
@@ -975,7 +1444,7 @@
   </p:cSld>
   <p:clrMap bg1="lt1" tx1="dk1" bg2="lt2" tx2="dk2" accent1="accent1" accent2="accent2" accent3="accent3" accent4="accent4" accent5="accent5" accent6="accent6" hlink="hlink" folHlink="folHlink"/>
   <p:sldLayoutIdLst>
-    <p:sldLayoutId xmlns:r="http://schemas.openxmlformats.org/officeDocument/2006/relationships" id="2147483649" r:id="R68b96a2c1c744806"/>
+    <p:sldLayoutId xmlns:r="http://schemas.openxmlformats.org/officeDocument/2006/relationships" id="2147483649" r:id="R37f8d071447340d8"/>
   </p:sldLayoutIdLst>
   <p:txStyles>
     <p:titleStyle>
@@ -1526,7 +1995,7 @@
           <p:cNvPr id="9" name="">
             <a:extLst xmlns:a="http://schemas.openxmlformats.org/drawingml/2006/main">
               <a:ext uri="{FF2B5EF4-FFF2-40B4-BE49-F238E27FC236}">
-                <a16:creationId xmlns:a16="http://schemas.microsoft.com/office/drawing/2014/main" id="{45E69EF5-DBCB-4EB8-BDD3-25AD47106DCD}"/>
+                <a16:creationId xmlns:a16="http://schemas.microsoft.com/office/drawing/2014/main" id="{914F06AF-926C-4173-BE7F-709381A13D0C}"/>
               </a:ext>
             </a:extLst>
           </p:cNvPr>
@@ -1557,7 +2026,7 @@
           <p:cNvPr id="2" name="">
             <a:extLst xmlns:a="http://schemas.openxmlformats.org/drawingml/2006/main">
               <a:ext uri="{FF2B5EF4-FFF2-40B4-BE49-F238E27FC236}">
-                <a16:creationId xmlns:a16="http://schemas.microsoft.com/office/drawing/2014/main" id="{A70802B0-02B8-434E-9DE8-07BA98C86BE9}"/>
+                <a16:creationId xmlns:a16="http://schemas.microsoft.com/office/drawing/2014/main" id="{BF420EB8-F536-4632-8133-BACE94B007F6}"/>
               </a:ext>
             </a:extLst>
           </p:cNvPr>
@@ -1607,7 +2076,7 @@
           <p:cNvPr id="3" name="">
             <a:extLst xmlns:a="http://schemas.openxmlformats.org/drawingml/2006/main">
               <a:ext uri="{FF2B5EF4-FFF2-40B4-BE49-F238E27FC236}">
-                <a16:creationId xmlns:a16="http://schemas.microsoft.com/office/drawing/2014/main" id="{D31AF09A-1749-43D8-A298-43AAD311E6D7}"/>
+                <a16:creationId xmlns:a16="http://schemas.microsoft.com/office/drawing/2014/main" id="{CAD5684F-CF30-4E55-B5D6-8FF8F5E0D175}"/>
               </a:ext>
             </a:extLst>
           </p:cNvPr>
@@ -1657,7 +2126,7 @@
           <p:cNvPr id="4" name="">
             <a:extLst xmlns:a="http://schemas.openxmlformats.org/drawingml/2006/main">
               <a:ext uri="{FF2B5EF4-FFF2-40B4-BE49-F238E27FC236}">
-                <a16:creationId xmlns:a16="http://schemas.microsoft.com/office/drawing/2014/main" id="{D6C2C7FD-EDC0-4CAF-ACB8-CCAF69E46027}"/>
+                <a16:creationId xmlns:a16="http://schemas.microsoft.com/office/drawing/2014/main" id="{8E425B0A-9A5A-46C2-9EB5-DBA65B62D42F}"/>
               </a:ext>
             </a:extLst>
           </p:cNvPr>
@@ -1707,7 +2176,7 @@
           <p:cNvPr id="5" name="">
             <a:extLst xmlns:a="http://schemas.openxmlformats.org/drawingml/2006/main">
               <a:ext uri="{FF2B5EF4-FFF2-40B4-BE49-F238E27FC236}">
-                <a16:creationId xmlns:a16="http://schemas.microsoft.com/office/drawing/2014/main" id="{0B80A06A-8A49-412C-8892-528CC764FA7D}"/>
+                <a16:creationId xmlns:a16="http://schemas.microsoft.com/office/drawing/2014/main" id="{F00223EF-CA3B-478B-9156-8717A284DF58}"/>
               </a:ext>
             </a:extLst>
           </p:cNvPr>
@@ -1740,7 +2209,7 @@
           <p:cNvPr id="6" name="">
             <a:extLst xmlns:a="http://schemas.openxmlformats.org/drawingml/2006/main">
               <a:ext uri="{FF2B5EF4-FFF2-40B4-BE49-F238E27FC236}">
-                <a16:creationId xmlns:a16="http://schemas.microsoft.com/office/drawing/2014/main" id="{36EDA894-4DE6-43AB-9246-3B944397F5E4}"/>
+                <a16:creationId xmlns:a16="http://schemas.microsoft.com/office/drawing/2014/main" id="{5DA1D4A3-E027-476A-83D7-9423CFF59F55}"/>
               </a:ext>
             </a:extLst>
           </p:cNvPr>
@@ -1794,7 +2263,7 @@
           <p:nvPr/>
         </p:nvPicPr>
         <p:blipFill>
-          <a:blip xmlns:r="http://schemas.openxmlformats.org/officeDocument/2006/relationships" xmlns:a="http://schemas.openxmlformats.org/drawingml/2006/main" r:embed="R2f0c61f50bb44207"/>
+          <a:blip xmlns:r="http://schemas.openxmlformats.org/officeDocument/2006/relationships" xmlns:a="http://schemas.openxmlformats.org/drawingml/2006/main" r:embed="Raaa7723e6a884728"/>
           <a:srcRect xmlns:a="http://schemas.openxmlformats.org/drawingml/2006/main" l="17949" t="0" r="17949" b="0"/>
           <a:stretch xmlns:a="http://schemas.openxmlformats.org/drawingml/2006/main">
             <a:fillRect l="0" t="0" r="0" b="0"/>
@@ -1817,7 +2286,7 @@
           <p:cNvPr id="8" name="">
             <a:extLst xmlns:a="http://schemas.openxmlformats.org/drawingml/2006/main">
               <a:ext uri="{FF2B5EF4-FFF2-40B4-BE49-F238E27FC236}">
-                <a16:creationId xmlns:a16="http://schemas.microsoft.com/office/drawing/2014/main" id="{26C5C5F2-38DF-4E19-9E40-214DC8C849EC}"/>
+                <a16:creationId xmlns:a16="http://schemas.microsoft.com/office/drawing/2014/main" id="{3250A63B-0248-4769-9D5D-ABDC50B06CCD}"/>
               </a:ext>
             </a:extLst>
           </p:cNvPr>
@@ -1865,7 +2334,2897 @@
     </p:spTree>
     <p:extLst>
       <p:ext uri="{BB962C8B-B14F-4D97-AF65-F5344CB8AC3E}">
-        <p14:creationId xmlns:p14="http://schemas.microsoft.com/office/powerpoint/2010/main" val="1968864991"/>
+        <p14:creationId xmlns:p14="http://schemas.microsoft.com/office/powerpoint/2010/main" val="593448904"/>
+      </p:ext>
+    </p:extLst>
+  </p:cSld>
+</p:sld>
+</file>
+
+<file path=ppt/slides/slide10.xml><?xml version="1.0" encoding="utf-8"?>
+<p:sld xmlns:p="http://schemas.openxmlformats.org/presentationml/2006/main">
+  <p:cSld>
+    <p:bg>
+      <p:bgPr>
+        <a:solidFill xmlns:a="http://schemas.openxmlformats.org/drawingml/2006/main">
+          <a:srgbClr val="FFFCF8"/>
+        </a:solidFill>
+      </p:bgPr>
+    </p:bg>
+    <p:spTree>
+      <p:nvGrpSpPr>
+        <p:cNvPr id="1" name=""/>
+        <p:cNvGrpSpPr/>
+        <p:nvPr/>
+      </p:nvGrpSpPr>
+      <p:grpSpPr>
+        <a:xfrm xmlns:a="http://schemas.openxmlformats.org/drawingml/2006/main"/>
+      </p:grpSpPr>
+      <p:sp>
+        <p:nvSpPr>
+          <p:cNvPr id="13" name="">
+            <a:extLst xmlns:a="http://schemas.openxmlformats.org/drawingml/2006/main">
+              <a:ext uri="{FF2B5EF4-FFF2-40B4-BE49-F238E27FC236}">
+                <a16:creationId xmlns:a16="http://schemas.microsoft.com/office/drawing/2014/main" id="{FFE42141-3DA2-4CEA-8291-105D75BACE6D}"/>
+              </a:ext>
+            </a:extLst>
+          </p:cNvPr>
+          <p:cNvSpPr>
+            <a:spLocks xmlns:a="http://schemas.openxmlformats.org/drawingml/2006/main" noGrp="1"/>
+          </p:cNvSpPr>
+          <p:nvPr/>
+        </p:nvSpPr>
+        <p:spPr>
+          <a:xfrm xmlns:a="http://schemas.openxmlformats.org/drawingml/2006/main">
+            <a:off x="0" y="0"/>
+            <a:ext cx="171450" cy="6858000"/>
+          </a:xfrm>
+          <a:prstGeom xmlns:a="http://schemas.openxmlformats.org/drawingml/2006/main" prst="rect">
+            <a:avLst/>
+          </a:prstGeom>
+          <a:solidFill xmlns:a="http://schemas.openxmlformats.org/drawingml/2006/main">
+            <a:srgbClr val="6657E8"/>
+          </a:solidFill>
+          <a:ln xmlns:a="http://schemas.openxmlformats.org/drawingml/2006/main" w="0">
+            <a:noFill/>
+            <a:prstDash val="solid"/>
+          </a:ln>
+        </p:spPr>
+      </p:sp>
+      <p:sp>
+        <p:nvSpPr>
+          <p:cNvPr id="2" name="">
+            <a:extLst xmlns:a="http://schemas.openxmlformats.org/drawingml/2006/main">
+              <a:ext uri="{FF2B5EF4-FFF2-40B4-BE49-F238E27FC236}">
+                <a16:creationId xmlns:a16="http://schemas.microsoft.com/office/drawing/2014/main" id="{3D63219E-E291-4182-9E7F-8447D4DC0B52}"/>
+              </a:ext>
+            </a:extLst>
+          </p:cNvPr>
+          <p:cNvSpPr>
+            <a:spLocks xmlns:a="http://schemas.openxmlformats.org/drawingml/2006/main" noGrp="1"/>
+          </p:cNvSpPr>
+          <p:nvPr/>
+        </p:nvSpPr>
+        <p:spPr>
+          <a:xfrm xmlns:a="http://schemas.openxmlformats.org/drawingml/2006/main">
+            <a:off x="647700" y="457200"/>
+            <a:ext cx="10096500" cy="552450"/>
+          </a:xfrm>
+          <a:prstGeom xmlns:a="http://schemas.openxmlformats.org/drawingml/2006/main" prst="rect">
+            <a:avLst/>
+          </a:prstGeom>
+          <a:noFill xmlns:a="http://schemas.openxmlformats.org/drawingml/2006/main"/>
+          <a:ln xmlns:a="http://schemas.openxmlformats.org/drawingml/2006/main" w="0">
+            <a:noFill/>
+            <a:prstDash val="solid"/>
+          </a:ln>
+        </p:spPr>
+        <p:txBody>
+          <a:bodyPr xmlns:a="http://schemas.openxmlformats.org/drawingml/2006/main"/>
+          <a:lstStyle xmlns:a="http://schemas.openxmlformats.org/drawingml/2006/main"/>
+          <a:p xmlns:a="http://schemas.openxmlformats.org/drawingml/2006/main">
+            <a:pPr>
+              <a:defRPr sz="2700" b="1">
+                <a:solidFill>
+                  <a:srgbClr val="182235"/>
+                </a:solidFill>
+              </a:defRPr>
+            </a:pPr>
+            <a:r>
+              <a:rPr sz="2700" b="1">
+                <a:solidFill>
+                  <a:srgbClr val="182235"/>
+                </a:solidFill>
+              </a:rPr>
+              <a:t>준비가 끝나면 실습이 훨씬 편해집니다</a:t>
+            </a:r>
+          </a:p>
+        </p:txBody>
+      </p:sp>
+      <p:sp>
+        <p:nvSpPr>
+          <p:cNvPr id="3" name="">
+            <a:extLst xmlns:a="http://schemas.openxmlformats.org/drawingml/2006/main">
+              <a:ext uri="{FF2B5EF4-FFF2-40B4-BE49-F238E27FC236}">
+                <a16:creationId xmlns:a16="http://schemas.microsoft.com/office/drawing/2014/main" id="{2D1C1E9E-262D-4B34-839F-ED05E3706603}"/>
+              </a:ext>
+            </a:extLst>
+          </p:cNvPr>
+          <p:cNvSpPr>
+            <a:spLocks xmlns:a="http://schemas.openxmlformats.org/drawingml/2006/main" noGrp="1"/>
+          </p:cNvSpPr>
+          <p:nvPr/>
+        </p:nvSpPr>
+        <p:spPr>
+          <a:xfrm xmlns:a="http://schemas.openxmlformats.org/drawingml/2006/main">
+            <a:off x="666750" y="6419850"/>
+            <a:ext cx="10096500" cy="209550"/>
+          </a:xfrm>
+          <a:prstGeom xmlns:a="http://schemas.openxmlformats.org/drawingml/2006/main" prst="rect">
+            <a:avLst/>
+          </a:prstGeom>
+          <a:noFill xmlns:a="http://schemas.openxmlformats.org/drawingml/2006/main"/>
+          <a:ln xmlns:a="http://schemas.openxmlformats.org/drawingml/2006/main" w="0">
+            <a:noFill/>
+            <a:prstDash val="solid"/>
+          </a:ln>
+        </p:spPr>
+        <p:txBody>
+          <a:bodyPr xmlns:a="http://schemas.openxmlformats.org/drawingml/2006/main"/>
+          <a:lstStyle xmlns:a="http://schemas.openxmlformats.org/drawingml/2006/main"/>
+          <a:p xmlns:a="http://schemas.openxmlformats.org/drawingml/2006/main">
+            <a:pPr>
+              <a:defRPr sz="975">
+                <a:solidFill>
+                  <a:srgbClr val="657083"/>
+                </a:solidFill>
+              </a:defRPr>
+            </a:pPr>
+            <a:r>
+              <a:rPr sz="975">
+                <a:solidFill>
+                  <a:srgbClr val="657083"/>
+                </a:solidFill>
+              </a:rPr>
+              <a:t>EDU 웹개발 교육 플랫폼  ·  10</a:t>
+            </a:r>
+          </a:p>
+        </p:txBody>
+      </p:sp>
+      <p:sp>
+        <p:nvSpPr>
+          <p:cNvPr id="4" name="">
+            <a:extLst xmlns:a="http://schemas.openxmlformats.org/drawingml/2006/main">
+              <a:ext uri="{FF2B5EF4-FFF2-40B4-BE49-F238E27FC236}">
+                <a16:creationId xmlns:a16="http://schemas.microsoft.com/office/drawing/2014/main" id="{43AE6703-8B10-4359-89A1-172BC8B60AB1}"/>
+              </a:ext>
+            </a:extLst>
+          </p:cNvPr>
+          <p:cNvSpPr>
+            <a:spLocks xmlns:a="http://schemas.openxmlformats.org/drawingml/2006/main" noGrp="1"/>
+          </p:cNvSpPr>
+          <p:nvPr/>
+        </p:nvSpPr>
+        <p:spPr>
+          <a:xfrm xmlns:a="http://schemas.openxmlformats.org/drawingml/2006/main">
+            <a:off x="742950" y="1428750"/>
+            <a:ext cx="514350" cy="514350"/>
+          </a:xfrm>
+          <a:prstGeom xmlns:a="http://schemas.openxmlformats.org/drawingml/2006/main" prst="roundRect">
+            <a:avLst>
+              <a:gd name="adj" fmla="val 22222"/>
+            </a:avLst>
+          </a:prstGeom>
+          <a:solidFill xmlns:a="http://schemas.openxmlformats.org/drawingml/2006/main">
+            <a:srgbClr val="EEEAFE"/>
+          </a:solidFill>
+          <a:ln xmlns:a="http://schemas.openxmlformats.org/drawingml/2006/main" w="0">
+            <a:noFill/>
+            <a:prstDash val="solid"/>
+          </a:ln>
+        </p:spPr>
+      </p:sp>
+      <p:sp>
+        <p:nvSpPr>
+          <p:cNvPr id="5" name="">
+            <a:extLst xmlns:a="http://schemas.openxmlformats.org/drawingml/2006/main">
+              <a:ext uri="{FF2B5EF4-FFF2-40B4-BE49-F238E27FC236}">
+                <a16:creationId xmlns:a16="http://schemas.microsoft.com/office/drawing/2014/main" id="{9F0707DB-1423-45F8-A85A-E589818606DA}"/>
+              </a:ext>
+            </a:extLst>
+          </p:cNvPr>
+          <p:cNvSpPr>
+            <a:spLocks xmlns:a="http://schemas.openxmlformats.org/drawingml/2006/main" noGrp="1"/>
+          </p:cNvSpPr>
+          <p:nvPr/>
+        </p:nvSpPr>
+        <p:spPr>
+          <a:xfrm xmlns:a="http://schemas.openxmlformats.org/drawingml/2006/main">
+            <a:off x="742950" y="1524000"/>
+            <a:ext cx="514350" cy="304800"/>
+          </a:xfrm>
+          <a:prstGeom xmlns:a="http://schemas.openxmlformats.org/drawingml/2006/main" prst="rect">
+            <a:avLst/>
+          </a:prstGeom>
+          <a:noFill xmlns:a="http://schemas.openxmlformats.org/drawingml/2006/main"/>
+          <a:ln xmlns:a="http://schemas.openxmlformats.org/drawingml/2006/main" w="0">
+            <a:noFill/>
+            <a:prstDash val="solid"/>
+          </a:ln>
+        </p:spPr>
+        <p:txBody>
+          <a:bodyPr xmlns:a="http://schemas.openxmlformats.org/drawingml/2006/main"/>
+          <a:lstStyle xmlns:a="http://schemas.openxmlformats.org/drawingml/2006/main"/>
+          <a:p xmlns:a="http://schemas.openxmlformats.org/drawingml/2006/main">
+            <a:pPr algn="ctr">
+              <a:defRPr sz="1500" b="1">
+                <a:solidFill>
+                  <a:srgbClr val="57C7A5"/>
+                </a:solidFill>
+              </a:defRPr>
+            </a:pPr>
+            <a:r>
+              <a:rPr sz="1500" b="1">
+                <a:solidFill>
+                  <a:srgbClr val="57C7A5"/>
+                </a:solidFill>
+              </a:rPr>
+              <a:t>1</a:t>
+            </a:r>
+          </a:p>
+        </p:txBody>
+      </p:sp>
+      <p:sp>
+        <p:nvSpPr>
+          <p:cNvPr id="6" name="">
+            <a:extLst xmlns:a="http://schemas.openxmlformats.org/drawingml/2006/main">
+              <a:ext uri="{FF2B5EF4-FFF2-40B4-BE49-F238E27FC236}">
+                <a16:creationId xmlns:a16="http://schemas.microsoft.com/office/drawing/2014/main" id="{D1109B19-3CC3-403A-B09D-B4871CEA9B9E}"/>
+              </a:ext>
+            </a:extLst>
+          </p:cNvPr>
+          <p:cNvSpPr>
+            <a:spLocks xmlns:a="http://schemas.openxmlformats.org/drawingml/2006/main" noGrp="1"/>
+          </p:cNvSpPr>
+          <p:nvPr/>
+        </p:nvSpPr>
+        <p:spPr>
+          <a:xfrm xmlns:a="http://schemas.openxmlformats.org/drawingml/2006/main">
+            <a:off x="1485900" y="1466850"/>
+            <a:ext cx="9239250" cy="619125"/>
+          </a:xfrm>
+          <a:prstGeom xmlns:a="http://schemas.openxmlformats.org/drawingml/2006/main" prst="rect">
+            <a:avLst/>
+          </a:prstGeom>
+          <a:noFill xmlns:a="http://schemas.openxmlformats.org/drawingml/2006/main"/>
+          <a:ln xmlns:a="http://schemas.openxmlformats.org/drawingml/2006/main" w="0">
+            <a:noFill/>
+            <a:prstDash val="solid"/>
+          </a:ln>
+        </p:spPr>
+        <p:txBody>
+          <a:bodyPr xmlns:a="http://schemas.openxmlformats.org/drawingml/2006/main"/>
+          <a:lstStyle xmlns:a="http://schemas.openxmlformats.org/drawingml/2006/main"/>
+          <a:p xmlns:a="http://schemas.openxmlformats.org/drawingml/2006/main">
+            <a:pPr>
+              <a:defRPr sz="1800">
+                <a:solidFill>
+                  <a:srgbClr val="182235"/>
+                </a:solidFill>
+              </a:defRPr>
+            </a:pPr>
+            <a:r>
+              <a:rPr sz="1800">
+                <a:solidFill>
+                  <a:srgbClr val="182235"/>
+                </a:solidFill>
+              </a:rPr>
+              <a:t>VS Code 또는 Codex 편집 화면</a:t>
+            </a:r>
+          </a:p>
+        </p:txBody>
+      </p:sp>
+      <p:sp>
+        <p:nvSpPr>
+          <p:cNvPr id="7" name="">
+            <a:extLst xmlns:a="http://schemas.openxmlformats.org/drawingml/2006/main">
+              <a:ext uri="{FF2B5EF4-FFF2-40B4-BE49-F238E27FC236}">
+                <a16:creationId xmlns:a16="http://schemas.microsoft.com/office/drawing/2014/main" id="{0731881B-374F-47D1-B2E4-0A8236E3FF3A}"/>
+              </a:ext>
+            </a:extLst>
+          </p:cNvPr>
+          <p:cNvSpPr>
+            <a:spLocks xmlns:a="http://schemas.openxmlformats.org/drawingml/2006/main" noGrp="1"/>
+          </p:cNvSpPr>
+          <p:nvPr/>
+        </p:nvSpPr>
+        <p:spPr>
+          <a:xfrm xmlns:a="http://schemas.openxmlformats.org/drawingml/2006/main">
+            <a:off x="742950" y="2400300"/>
+            <a:ext cx="514350" cy="514350"/>
+          </a:xfrm>
+          <a:prstGeom xmlns:a="http://schemas.openxmlformats.org/drawingml/2006/main" prst="roundRect">
+            <a:avLst>
+              <a:gd name="adj" fmla="val 22222"/>
+            </a:avLst>
+          </a:prstGeom>
+          <a:solidFill xmlns:a="http://schemas.openxmlformats.org/drawingml/2006/main">
+            <a:srgbClr val="EAF8F3"/>
+          </a:solidFill>
+          <a:ln xmlns:a="http://schemas.openxmlformats.org/drawingml/2006/main" w="0">
+            <a:noFill/>
+            <a:prstDash val="solid"/>
+          </a:ln>
+        </p:spPr>
+      </p:sp>
+      <p:sp>
+        <p:nvSpPr>
+          <p:cNvPr id="8" name="">
+            <a:extLst xmlns:a="http://schemas.openxmlformats.org/drawingml/2006/main">
+              <a:ext uri="{FF2B5EF4-FFF2-40B4-BE49-F238E27FC236}">
+                <a16:creationId xmlns:a16="http://schemas.microsoft.com/office/drawing/2014/main" id="{729CC175-6F28-46CC-BDAF-6FD8AE0F40FF}"/>
+              </a:ext>
+            </a:extLst>
+          </p:cNvPr>
+          <p:cNvSpPr>
+            <a:spLocks xmlns:a="http://schemas.openxmlformats.org/drawingml/2006/main" noGrp="1"/>
+          </p:cNvSpPr>
+          <p:nvPr/>
+        </p:nvSpPr>
+        <p:spPr>
+          <a:xfrm xmlns:a="http://schemas.openxmlformats.org/drawingml/2006/main">
+            <a:off x="742950" y="2495550"/>
+            <a:ext cx="514350" cy="304800"/>
+          </a:xfrm>
+          <a:prstGeom xmlns:a="http://schemas.openxmlformats.org/drawingml/2006/main" prst="rect">
+            <a:avLst/>
+          </a:prstGeom>
+          <a:noFill xmlns:a="http://schemas.openxmlformats.org/drawingml/2006/main"/>
+          <a:ln xmlns:a="http://schemas.openxmlformats.org/drawingml/2006/main" w="0">
+            <a:noFill/>
+            <a:prstDash val="solid"/>
+          </a:ln>
+        </p:spPr>
+        <p:txBody>
+          <a:bodyPr xmlns:a="http://schemas.openxmlformats.org/drawingml/2006/main"/>
+          <a:lstStyle xmlns:a="http://schemas.openxmlformats.org/drawingml/2006/main"/>
+          <a:p xmlns:a="http://schemas.openxmlformats.org/drawingml/2006/main">
+            <a:pPr algn="ctr">
+              <a:defRPr sz="1500" b="1">
+                <a:solidFill>
+                  <a:srgbClr val="57C7A5"/>
+                </a:solidFill>
+              </a:defRPr>
+            </a:pPr>
+            <a:r>
+              <a:rPr sz="1500" b="1">
+                <a:solidFill>
+                  <a:srgbClr val="57C7A5"/>
+                </a:solidFill>
+              </a:rPr>
+              <a:t>2</a:t>
+            </a:r>
+          </a:p>
+        </p:txBody>
+      </p:sp>
+      <p:sp>
+        <p:nvSpPr>
+          <p:cNvPr id="9" name="">
+            <a:extLst xmlns:a="http://schemas.openxmlformats.org/drawingml/2006/main">
+              <a:ext uri="{FF2B5EF4-FFF2-40B4-BE49-F238E27FC236}">
+                <a16:creationId xmlns:a16="http://schemas.microsoft.com/office/drawing/2014/main" id="{05C70E34-381E-4384-8FD4-11874E154618}"/>
+              </a:ext>
+            </a:extLst>
+          </p:cNvPr>
+          <p:cNvSpPr>
+            <a:spLocks xmlns:a="http://schemas.openxmlformats.org/drawingml/2006/main" noGrp="1"/>
+          </p:cNvSpPr>
+          <p:nvPr/>
+        </p:nvSpPr>
+        <p:spPr>
+          <a:xfrm xmlns:a="http://schemas.openxmlformats.org/drawingml/2006/main">
+            <a:off x="1485900" y="2438400"/>
+            <a:ext cx="9239250" cy="619125"/>
+          </a:xfrm>
+          <a:prstGeom xmlns:a="http://schemas.openxmlformats.org/drawingml/2006/main" prst="rect">
+            <a:avLst/>
+          </a:prstGeom>
+          <a:noFill xmlns:a="http://schemas.openxmlformats.org/drawingml/2006/main"/>
+          <a:ln xmlns:a="http://schemas.openxmlformats.org/drawingml/2006/main" w="0">
+            <a:noFill/>
+            <a:prstDash val="solid"/>
+          </a:ln>
+        </p:spPr>
+        <p:txBody>
+          <a:bodyPr xmlns:a="http://schemas.openxmlformats.org/drawingml/2006/main"/>
+          <a:lstStyle xmlns:a="http://schemas.openxmlformats.org/drawingml/2006/main"/>
+          <a:p xmlns:a="http://schemas.openxmlformats.org/drawingml/2006/main">
+            <a:pPr>
+              <a:defRPr sz="1800">
+                <a:solidFill>
+                  <a:srgbClr val="182235"/>
+                </a:solidFill>
+              </a:defRPr>
+            </a:pPr>
+            <a:r>
+              <a:rPr sz="1800">
+                <a:solidFill>
+                  <a:srgbClr val="182235"/>
+                </a:solidFill>
+              </a:rPr>
+              <a:t>Chrome 브라우저</a:t>
+            </a:r>
+          </a:p>
+        </p:txBody>
+      </p:sp>
+      <p:sp>
+        <p:nvSpPr>
+          <p:cNvPr id="10" name="">
+            <a:extLst xmlns:a="http://schemas.openxmlformats.org/drawingml/2006/main">
+              <a:ext uri="{FF2B5EF4-FFF2-40B4-BE49-F238E27FC236}">
+                <a16:creationId xmlns:a16="http://schemas.microsoft.com/office/drawing/2014/main" id="{5089BC59-A417-4E01-B4A7-156A7A8C8AFC}"/>
+              </a:ext>
+            </a:extLst>
+          </p:cNvPr>
+          <p:cNvSpPr>
+            <a:spLocks xmlns:a="http://schemas.openxmlformats.org/drawingml/2006/main" noGrp="1"/>
+          </p:cNvSpPr>
+          <p:nvPr/>
+        </p:nvSpPr>
+        <p:spPr>
+          <a:xfrm xmlns:a="http://schemas.openxmlformats.org/drawingml/2006/main">
+            <a:off x="742950" y="3371850"/>
+            <a:ext cx="514350" cy="514350"/>
+          </a:xfrm>
+          <a:prstGeom xmlns:a="http://schemas.openxmlformats.org/drawingml/2006/main" prst="roundRect">
+            <a:avLst>
+              <a:gd name="adj" fmla="val 22222"/>
+            </a:avLst>
+          </a:prstGeom>
+          <a:solidFill xmlns:a="http://schemas.openxmlformats.org/drawingml/2006/main">
+            <a:srgbClr val="EEEAFE"/>
+          </a:solidFill>
+          <a:ln xmlns:a="http://schemas.openxmlformats.org/drawingml/2006/main" w="0">
+            <a:noFill/>
+            <a:prstDash val="solid"/>
+          </a:ln>
+        </p:spPr>
+      </p:sp>
+      <p:sp>
+        <p:nvSpPr>
+          <p:cNvPr id="11" name="">
+            <a:extLst xmlns:a="http://schemas.openxmlformats.org/drawingml/2006/main">
+              <a:ext uri="{FF2B5EF4-FFF2-40B4-BE49-F238E27FC236}">
+                <a16:creationId xmlns:a16="http://schemas.microsoft.com/office/drawing/2014/main" id="{F6674609-47E9-4204-8A37-AA58C7707316}"/>
+              </a:ext>
+            </a:extLst>
+          </p:cNvPr>
+          <p:cNvSpPr>
+            <a:spLocks xmlns:a="http://schemas.openxmlformats.org/drawingml/2006/main" noGrp="1"/>
+          </p:cNvSpPr>
+          <p:nvPr/>
+        </p:nvSpPr>
+        <p:spPr>
+          <a:xfrm xmlns:a="http://schemas.openxmlformats.org/drawingml/2006/main">
+            <a:off x="742950" y="3467100"/>
+            <a:ext cx="514350" cy="304800"/>
+          </a:xfrm>
+          <a:prstGeom xmlns:a="http://schemas.openxmlformats.org/drawingml/2006/main" prst="rect">
+            <a:avLst/>
+          </a:prstGeom>
+          <a:noFill xmlns:a="http://schemas.openxmlformats.org/drawingml/2006/main"/>
+          <a:ln xmlns:a="http://schemas.openxmlformats.org/drawingml/2006/main" w="0">
+            <a:noFill/>
+            <a:prstDash val="solid"/>
+          </a:ln>
+        </p:spPr>
+        <p:txBody>
+          <a:bodyPr xmlns:a="http://schemas.openxmlformats.org/drawingml/2006/main"/>
+          <a:lstStyle xmlns:a="http://schemas.openxmlformats.org/drawingml/2006/main"/>
+          <a:p xmlns:a="http://schemas.openxmlformats.org/drawingml/2006/main">
+            <a:pPr algn="ctr">
+              <a:defRPr sz="1500" b="1">
+                <a:solidFill>
+                  <a:srgbClr val="57C7A5"/>
+                </a:solidFill>
+              </a:defRPr>
+            </a:pPr>
+            <a:r>
+              <a:rPr sz="1500" b="1">
+                <a:solidFill>
+                  <a:srgbClr val="57C7A5"/>
+                </a:solidFill>
+              </a:rPr>
+              <a:t>3</a:t>
+            </a:r>
+          </a:p>
+        </p:txBody>
+      </p:sp>
+      <p:sp>
+        <p:nvSpPr>
+          <p:cNvPr id="12" name="">
+            <a:extLst xmlns:a="http://schemas.openxmlformats.org/drawingml/2006/main">
+              <a:ext uri="{FF2B5EF4-FFF2-40B4-BE49-F238E27FC236}">
+                <a16:creationId xmlns:a16="http://schemas.microsoft.com/office/drawing/2014/main" id="{C281BF99-0E41-48A9-9F64-909FF86A5F93}"/>
+              </a:ext>
+            </a:extLst>
+          </p:cNvPr>
+          <p:cNvSpPr>
+            <a:spLocks xmlns:a="http://schemas.openxmlformats.org/drawingml/2006/main" noGrp="1"/>
+          </p:cNvSpPr>
+          <p:nvPr/>
+        </p:nvSpPr>
+        <p:spPr>
+          <a:xfrm xmlns:a="http://schemas.openxmlformats.org/drawingml/2006/main">
+            <a:off x="1485900" y="3409950"/>
+            <a:ext cx="9239250" cy="619125"/>
+          </a:xfrm>
+          <a:prstGeom xmlns:a="http://schemas.openxmlformats.org/drawingml/2006/main" prst="rect">
+            <a:avLst/>
+          </a:prstGeom>
+          <a:noFill xmlns:a="http://schemas.openxmlformats.org/drawingml/2006/main"/>
+          <a:ln xmlns:a="http://schemas.openxmlformats.org/drawingml/2006/main" w="0">
+            <a:noFill/>
+            <a:prstDash val="solid"/>
+          </a:ln>
+        </p:spPr>
+        <p:txBody>
+          <a:bodyPr xmlns:a="http://schemas.openxmlformats.org/drawingml/2006/main"/>
+          <a:lstStyle xmlns:a="http://schemas.openxmlformats.org/drawingml/2006/main"/>
+          <a:p xmlns:a="http://schemas.openxmlformats.org/drawingml/2006/main">
+            <a:pPr>
+              <a:defRPr sz="1800">
+                <a:solidFill>
+                  <a:srgbClr val="182235"/>
+                </a:solidFill>
+              </a:defRPr>
+            </a:pPr>
+            <a:r>
+              <a:rPr sz="1800">
+                <a:solidFill>
+                  <a:srgbClr val="182235"/>
+                </a:solidFill>
+              </a:rPr>
+              <a:t>index.html 파일</a:t>
+            </a:r>
+          </a:p>
+        </p:txBody>
+      </p:sp>
+    </p:spTree>
+    <p:extLst>
+      <p:ext uri="{BB962C8B-B14F-4D97-AF65-F5344CB8AC3E}">
+        <p14:creationId xmlns:p14="http://schemas.microsoft.com/office/powerpoint/2010/main" val="1690619621"/>
+      </p:ext>
+    </p:extLst>
+  </p:cSld>
+</p:sld>
+</file>
+
+<file path=ppt/slides/slide11.xml><?xml version="1.0" encoding="utf-8"?>
+<p:sld xmlns:p="http://schemas.openxmlformats.org/presentationml/2006/main">
+  <p:cSld>
+    <p:bg>
+      <p:bgPr>
+        <a:solidFill xmlns:a="http://schemas.openxmlformats.org/drawingml/2006/main">
+          <a:srgbClr val="FFFCF8"/>
+        </a:solidFill>
+      </p:bgPr>
+    </p:bg>
+    <p:spTree>
+      <p:nvGrpSpPr>
+        <p:cNvPr id="1" name=""/>
+        <p:cNvGrpSpPr/>
+        <p:nvPr/>
+      </p:nvGrpSpPr>
+      <p:grpSpPr>
+        <a:xfrm xmlns:a="http://schemas.openxmlformats.org/drawingml/2006/main"/>
+      </p:grpSpPr>
+      <p:sp>
+        <p:nvSpPr>
+          <p:cNvPr id="10" name="">
+            <a:extLst xmlns:a="http://schemas.openxmlformats.org/drawingml/2006/main">
+              <a:ext uri="{FF2B5EF4-FFF2-40B4-BE49-F238E27FC236}">
+                <a16:creationId xmlns:a16="http://schemas.microsoft.com/office/drawing/2014/main" id="{5E5453CA-7621-4C60-B165-9DCF20FF531D}"/>
+              </a:ext>
+            </a:extLst>
+          </p:cNvPr>
+          <p:cNvSpPr>
+            <a:spLocks xmlns:a="http://schemas.openxmlformats.org/drawingml/2006/main" noGrp="1"/>
+          </p:cNvSpPr>
+          <p:nvPr/>
+        </p:nvSpPr>
+        <p:spPr>
+          <a:xfrm xmlns:a="http://schemas.openxmlformats.org/drawingml/2006/main">
+            <a:off x="0" y="0"/>
+            <a:ext cx="171450" cy="6858000"/>
+          </a:xfrm>
+          <a:prstGeom xmlns:a="http://schemas.openxmlformats.org/drawingml/2006/main" prst="rect">
+            <a:avLst/>
+          </a:prstGeom>
+          <a:solidFill xmlns:a="http://schemas.openxmlformats.org/drawingml/2006/main">
+            <a:srgbClr val="6657E8"/>
+          </a:solidFill>
+          <a:ln xmlns:a="http://schemas.openxmlformats.org/drawingml/2006/main" w="0">
+            <a:noFill/>
+            <a:prstDash val="solid"/>
+          </a:ln>
+        </p:spPr>
+      </p:sp>
+      <p:sp>
+        <p:nvSpPr>
+          <p:cNvPr id="2" name="">
+            <a:extLst xmlns:a="http://schemas.openxmlformats.org/drawingml/2006/main">
+              <a:ext uri="{FF2B5EF4-FFF2-40B4-BE49-F238E27FC236}">
+                <a16:creationId xmlns:a16="http://schemas.microsoft.com/office/drawing/2014/main" id="{867363EB-E95A-4DF8-A146-A3E725D94C3F}"/>
+              </a:ext>
+            </a:extLst>
+          </p:cNvPr>
+          <p:cNvSpPr>
+            <a:spLocks xmlns:a="http://schemas.openxmlformats.org/drawingml/2006/main" noGrp="1"/>
+          </p:cNvSpPr>
+          <p:nvPr/>
+        </p:nvSpPr>
+        <p:spPr>
+          <a:xfrm xmlns:a="http://schemas.openxmlformats.org/drawingml/2006/main">
+            <a:off x="647700" y="457200"/>
+            <a:ext cx="10096500" cy="552450"/>
+          </a:xfrm>
+          <a:prstGeom xmlns:a="http://schemas.openxmlformats.org/drawingml/2006/main" prst="rect">
+            <a:avLst/>
+          </a:prstGeom>
+          <a:noFill xmlns:a="http://schemas.openxmlformats.org/drawingml/2006/main"/>
+          <a:ln xmlns:a="http://schemas.openxmlformats.org/drawingml/2006/main" w="0">
+            <a:noFill/>
+            <a:prstDash val="solid"/>
+          </a:ln>
+        </p:spPr>
+        <p:txBody>
+          <a:bodyPr xmlns:a="http://schemas.openxmlformats.org/drawingml/2006/main"/>
+          <a:lstStyle xmlns:a="http://schemas.openxmlformats.org/drawingml/2006/main"/>
+          <a:p xmlns:a="http://schemas.openxmlformats.org/drawingml/2006/main">
+            <a:pPr>
+              <a:defRPr sz="2700" b="1">
+                <a:solidFill>
+                  <a:srgbClr val="182235"/>
+                </a:solidFill>
+              </a:defRPr>
+            </a:pPr>
+            <a:r>
+              <a:rPr sz="2700" b="1">
+                <a:solidFill>
+                  <a:srgbClr val="182235"/>
+                </a:solidFill>
+              </a:rPr>
+              <a:t>코드의 역할을 하나씩 연결해 보세요</a:t>
+            </a:r>
+          </a:p>
+        </p:txBody>
+      </p:sp>
+      <p:sp>
+        <p:nvSpPr>
+          <p:cNvPr id="3" name="">
+            <a:extLst xmlns:a="http://schemas.openxmlformats.org/drawingml/2006/main">
+              <a:ext uri="{FF2B5EF4-FFF2-40B4-BE49-F238E27FC236}">
+                <a16:creationId xmlns:a16="http://schemas.microsoft.com/office/drawing/2014/main" id="{A7796DD0-4EC0-4E90-83E7-29361651A539}"/>
+              </a:ext>
+            </a:extLst>
+          </p:cNvPr>
+          <p:cNvSpPr>
+            <a:spLocks xmlns:a="http://schemas.openxmlformats.org/drawingml/2006/main" noGrp="1"/>
+          </p:cNvSpPr>
+          <p:nvPr/>
+        </p:nvSpPr>
+        <p:spPr>
+          <a:xfrm xmlns:a="http://schemas.openxmlformats.org/drawingml/2006/main">
+            <a:off x="666750" y="6419850"/>
+            <a:ext cx="10096500" cy="209550"/>
+          </a:xfrm>
+          <a:prstGeom xmlns:a="http://schemas.openxmlformats.org/drawingml/2006/main" prst="rect">
+            <a:avLst/>
+          </a:prstGeom>
+          <a:noFill xmlns:a="http://schemas.openxmlformats.org/drawingml/2006/main"/>
+          <a:ln xmlns:a="http://schemas.openxmlformats.org/drawingml/2006/main" w="0">
+            <a:noFill/>
+            <a:prstDash val="solid"/>
+          </a:ln>
+        </p:spPr>
+        <p:txBody>
+          <a:bodyPr xmlns:a="http://schemas.openxmlformats.org/drawingml/2006/main"/>
+          <a:lstStyle xmlns:a="http://schemas.openxmlformats.org/drawingml/2006/main"/>
+          <a:p xmlns:a="http://schemas.openxmlformats.org/drawingml/2006/main">
+            <a:pPr>
+              <a:defRPr sz="975">
+                <a:solidFill>
+                  <a:srgbClr val="657083"/>
+                </a:solidFill>
+              </a:defRPr>
+            </a:pPr>
+            <a:r>
+              <a:rPr sz="975">
+                <a:solidFill>
+                  <a:srgbClr val="657083"/>
+                </a:solidFill>
+              </a:rPr>
+              <a:t>EDU 웹개발 교육 플랫폼  ·  11</a:t>
+            </a:r>
+          </a:p>
+        </p:txBody>
+      </p:sp>
+      <p:sp>
+        <p:nvSpPr>
+          <p:cNvPr id="4" name="">
+            <a:extLst xmlns:a="http://schemas.openxmlformats.org/drawingml/2006/main">
+              <a:ext uri="{FF2B5EF4-FFF2-40B4-BE49-F238E27FC236}">
+                <a16:creationId xmlns:a16="http://schemas.microsoft.com/office/drawing/2014/main" id="{6EA9420B-6237-4889-9F82-145B534667BF}"/>
+              </a:ext>
+            </a:extLst>
+          </p:cNvPr>
+          <p:cNvSpPr>
+            <a:spLocks xmlns:a="http://schemas.openxmlformats.org/drawingml/2006/main" noGrp="1"/>
+          </p:cNvSpPr>
+          <p:nvPr/>
+        </p:nvSpPr>
+        <p:spPr>
+          <a:xfrm xmlns:a="http://schemas.openxmlformats.org/drawingml/2006/main">
+            <a:off x="857250" y="1428750"/>
+            <a:ext cx="2381250" cy="400050"/>
+          </a:xfrm>
+          <a:prstGeom xmlns:a="http://schemas.openxmlformats.org/drawingml/2006/main" prst="rect">
+            <a:avLst/>
+          </a:prstGeom>
+          <a:noFill xmlns:a="http://schemas.openxmlformats.org/drawingml/2006/main"/>
+          <a:ln xmlns:a="http://schemas.openxmlformats.org/drawingml/2006/main" w="0">
+            <a:noFill/>
+            <a:prstDash val="solid"/>
+          </a:ln>
+        </p:spPr>
+        <p:txBody>
+          <a:bodyPr xmlns:a="http://schemas.openxmlformats.org/drawingml/2006/main"/>
+          <a:lstStyle xmlns:a="http://schemas.openxmlformats.org/drawingml/2006/main"/>
+          <a:p xmlns:a="http://schemas.openxmlformats.org/drawingml/2006/main">
+            <a:pPr>
+              <a:defRPr sz="1725" b="1">
+                <a:solidFill>
+                  <a:srgbClr val="6657E8"/>
+                </a:solidFill>
+              </a:defRPr>
+            </a:pPr>
+            <a:r>
+              <a:rPr sz="1725" b="1">
+                <a:solidFill>
+                  <a:srgbClr val="6657E8"/>
+                </a:solidFill>
+              </a:rPr>
+              <a:t>&lt;h1&gt;</a:t>
+            </a:r>
+          </a:p>
+        </p:txBody>
+      </p:sp>
+      <p:sp>
+        <p:nvSpPr>
+          <p:cNvPr id="5" name="">
+            <a:extLst xmlns:a="http://schemas.openxmlformats.org/drawingml/2006/main">
+              <a:ext uri="{FF2B5EF4-FFF2-40B4-BE49-F238E27FC236}">
+                <a16:creationId xmlns:a16="http://schemas.microsoft.com/office/drawing/2014/main" id="{28ED37DB-7F00-4AE1-9D46-AA593EDF3876}"/>
+              </a:ext>
+            </a:extLst>
+          </p:cNvPr>
+          <p:cNvSpPr>
+            <a:spLocks xmlns:a="http://schemas.openxmlformats.org/drawingml/2006/main" noGrp="1"/>
+          </p:cNvSpPr>
+          <p:nvPr/>
+        </p:nvSpPr>
+        <p:spPr>
+          <a:xfrm xmlns:a="http://schemas.openxmlformats.org/drawingml/2006/main">
+            <a:off x="3429000" y="1428750"/>
+            <a:ext cx="7429500" cy="666750"/>
+          </a:xfrm>
+          <a:prstGeom xmlns:a="http://schemas.openxmlformats.org/drawingml/2006/main" prst="rect">
+            <a:avLst/>
+          </a:prstGeom>
+          <a:noFill xmlns:a="http://schemas.openxmlformats.org/drawingml/2006/main"/>
+          <a:ln xmlns:a="http://schemas.openxmlformats.org/drawingml/2006/main" w="0">
+            <a:noFill/>
+            <a:prstDash val="solid"/>
+          </a:ln>
+        </p:spPr>
+        <p:txBody>
+          <a:bodyPr xmlns:a="http://schemas.openxmlformats.org/drawingml/2006/main"/>
+          <a:lstStyle xmlns:a="http://schemas.openxmlformats.org/drawingml/2006/main"/>
+          <a:p xmlns:a="http://schemas.openxmlformats.org/drawingml/2006/main">
+            <a:pPr>
+              <a:defRPr sz="1650">
+                <a:solidFill>
+                  <a:srgbClr val="182235"/>
+                </a:solidFill>
+              </a:defRPr>
+            </a:pPr>
+            <a:r>
+              <a:rPr sz="1650">
+                <a:solidFill>
+                  <a:srgbClr val="182235"/>
+                </a:solidFill>
+              </a:rPr>
+              <a:t>페이지에서 가장 중요한 제목입니다. 보통 한 화면에 한 번 사용합니다.</a:t>
+            </a:r>
+          </a:p>
+        </p:txBody>
+      </p:sp>
+      <p:sp>
+        <p:nvSpPr>
+          <p:cNvPr id="6" name="">
+            <a:extLst xmlns:a="http://schemas.openxmlformats.org/drawingml/2006/main">
+              <a:ext uri="{FF2B5EF4-FFF2-40B4-BE49-F238E27FC236}">
+                <a16:creationId xmlns:a16="http://schemas.microsoft.com/office/drawing/2014/main" id="{13E29054-9CD5-4578-8367-FE566C6A8424}"/>
+              </a:ext>
+            </a:extLst>
+          </p:cNvPr>
+          <p:cNvSpPr>
+            <a:spLocks xmlns:a="http://schemas.openxmlformats.org/drawingml/2006/main" noGrp="1"/>
+          </p:cNvSpPr>
+          <p:nvPr/>
+        </p:nvSpPr>
+        <p:spPr>
+          <a:xfrm xmlns:a="http://schemas.openxmlformats.org/drawingml/2006/main">
+            <a:off x="857250" y="2524125"/>
+            <a:ext cx="2381250" cy="400050"/>
+          </a:xfrm>
+          <a:prstGeom xmlns:a="http://schemas.openxmlformats.org/drawingml/2006/main" prst="rect">
+            <a:avLst/>
+          </a:prstGeom>
+          <a:noFill xmlns:a="http://schemas.openxmlformats.org/drawingml/2006/main"/>
+          <a:ln xmlns:a="http://schemas.openxmlformats.org/drawingml/2006/main" w="0">
+            <a:noFill/>
+            <a:prstDash val="solid"/>
+          </a:ln>
+        </p:spPr>
+        <p:txBody>
+          <a:bodyPr xmlns:a="http://schemas.openxmlformats.org/drawingml/2006/main"/>
+          <a:lstStyle xmlns:a="http://schemas.openxmlformats.org/drawingml/2006/main"/>
+          <a:p xmlns:a="http://schemas.openxmlformats.org/drawingml/2006/main">
+            <a:pPr>
+              <a:defRPr sz="1725" b="1">
+                <a:solidFill>
+                  <a:srgbClr val="6657E8"/>
+                </a:solidFill>
+              </a:defRPr>
+            </a:pPr>
+            <a:r>
+              <a:rPr sz="1725" b="1">
+                <a:solidFill>
+                  <a:srgbClr val="6657E8"/>
+                </a:solidFill>
+              </a:rPr>
+              <a:t>&lt;p&gt;</a:t>
+            </a:r>
+          </a:p>
+        </p:txBody>
+      </p:sp>
+      <p:sp>
+        <p:nvSpPr>
+          <p:cNvPr id="7" name="">
+            <a:extLst xmlns:a="http://schemas.openxmlformats.org/drawingml/2006/main">
+              <a:ext uri="{FF2B5EF4-FFF2-40B4-BE49-F238E27FC236}">
+                <a16:creationId xmlns:a16="http://schemas.microsoft.com/office/drawing/2014/main" id="{C4657E4D-F89E-4880-AACF-7AFB58FC4E7D}"/>
+              </a:ext>
+            </a:extLst>
+          </p:cNvPr>
+          <p:cNvSpPr>
+            <a:spLocks xmlns:a="http://schemas.openxmlformats.org/drawingml/2006/main" noGrp="1"/>
+          </p:cNvSpPr>
+          <p:nvPr/>
+        </p:nvSpPr>
+        <p:spPr>
+          <a:xfrm xmlns:a="http://schemas.openxmlformats.org/drawingml/2006/main">
+            <a:off x="3429000" y="2524125"/>
+            <a:ext cx="7429500" cy="666750"/>
+          </a:xfrm>
+          <a:prstGeom xmlns:a="http://schemas.openxmlformats.org/drawingml/2006/main" prst="rect">
+            <a:avLst/>
+          </a:prstGeom>
+          <a:noFill xmlns:a="http://schemas.openxmlformats.org/drawingml/2006/main"/>
+          <a:ln xmlns:a="http://schemas.openxmlformats.org/drawingml/2006/main" w="0">
+            <a:noFill/>
+            <a:prstDash val="solid"/>
+          </a:ln>
+        </p:spPr>
+        <p:txBody>
+          <a:bodyPr xmlns:a="http://schemas.openxmlformats.org/drawingml/2006/main"/>
+          <a:lstStyle xmlns:a="http://schemas.openxmlformats.org/drawingml/2006/main"/>
+          <a:p xmlns:a="http://schemas.openxmlformats.org/drawingml/2006/main">
+            <a:pPr>
+              <a:defRPr sz="1650">
+                <a:solidFill>
+                  <a:srgbClr val="182235"/>
+                </a:solidFill>
+              </a:defRPr>
+            </a:pPr>
+            <a:r>
+              <a:rPr sz="1650">
+                <a:solidFill>
+                  <a:srgbClr val="182235"/>
+                </a:solidFill>
+              </a:rPr>
+              <a:t>방문자에게 내용을 설명하는 문단입니다.</a:t>
+            </a:r>
+          </a:p>
+        </p:txBody>
+      </p:sp>
+      <p:sp>
+        <p:nvSpPr>
+          <p:cNvPr id="8" name="">
+            <a:extLst xmlns:a="http://schemas.openxmlformats.org/drawingml/2006/main">
+              <a:ext uri="{FF2B5EF4-FFF2-40B4-BE49-F238E27FC236}">
+                <a16:creationId xmlns:a16="http://schemas.microsoft.com/office/drawing/2014/main" id="{52020740-DA29-4241-BB65-D1E5B514E656}"/>
+              </a:ext>
+            </a:extLst>
+          </p:cNvPr>
+          <p:cNvSpPr>
+            <a:spLocks xmlns:a="http://schemas.openxmlformats.org/drawingml/2006/main" noGrp="1"/>
+          </p:cNvSpPr>
+          <p:nvPr/>
+        </p:nvSpPr>
+        <p:spPr>
+          <a:xfrm xmlns:a="http://schemas.openxmlformats.org/drawingml/2006/main">
+            <a:off x="857250" y="3619500"/>
+            <a:ext cx="2381250" cy="400050"/>
+          </a:xfrm>
+          <a:prstGeom xmlns:a="http://schemas.openxmlformats.org/drawingml/2006/main" prst="rect">
+            <a:avLst/>
+          </a:prstGeom>
+          <a:noFill xmlns:a="http://schemas.openxmlformats.org/drawingml/2006/main"/>
+          <a:ln xmlns:a="http://schemas.openxmlformats.org/drawingml/2006/main" w="0">
+            <a:noFill/>
+            <a:prstDash val="solid"/>
+          </a:ln>
+        </p:spPr>
+        <p:txBody>
+          <a:bodyPr xmlns:a="http://schemas.openxmlformats.org/drawingml/2006/main"/>
+          <a:lstStyle xmlns:a="http://schemas.openxmlformats.org/drawingml/2006/main"/>
+          <a:p xmlns:a="http://schemas.openxmlformats.org/drawingml/2006/main">
+            <a:pPr>
+              <a:defRPr sz="1725" b="1">
+                <a:solidFill>
+                  <a:srgbClr val="6657E8"/>
+                </a:solidFill>
+              </a:defRPr>
+            </a:pPr>
+            <a:r>
+              <a:rPr sz="1725" b="1">
+                <a:solidFill>
+                  <a:srgbClr val="6657E8"/>
+                </a:solidFill>
+              </a:rPr>
+              <a:t>&lt;button&gt;</a:t>
+            </a:r>
+          </a:p>
+        </p:txBody>
+      </p:sp>
+      <p:sp>
+        <p:nvSpPr>
+          <p:cNvPr id="9" name="">
+            <a:extLst xmlns:a="http://schemas.openxmlformats.org/drawingml/2006/main">
+              <a:ext uri="{FF2B5EF4-FFF2-40B4-BE49-F238E27FC236}">
+                <a16:creationId xmlns:a16="http://schemas.microsoft.com/office/drawing/2014/main" id="{6A6059F7-2279-4142-9766-FBA99CD6DA87}"/>
+              </a:ext>
+            </a:extLst>
+          </p:cNvPr>
+          <p:cNvSpPr>
+            <a:spLocks xmlns:a="http://schemas.openxmlformats.org/drawingml/2006/main" noGrp="1"/>
+          </p:cNvSpPr>
+          <p:nvPr/>
+        </p:nvSpPr>
+        <p:spPr>
+          <a:xfrm xmlns:a="http://schemas.openxmlformats.org/drawingml/2006/main">
+            <a:off x="3429000" y="3619500"/>
+            <a:ext cx="7429500" cy="666750"/>
+          </a:xfrm>
+          <a:prstGeom xmlns:a="http://schemas.openxmlformats.org/drawingml/2006/main" prst="rect">
+            <a:avLst/>
+          </a:prstGeom>
+          <a:noFill xmlns:a="http://schemas.openxmlformats.org/drawingml/2006/main"/>
+          <a:ln xmlns:a="http://schemas.openxmlformats.org/drawingml/2006/main" w="0">
+            <a:noFill/>
+            <a:prstDash val="solid"/>
+          </a:ln>
+        </p:spPr>
+        <p:txBody>
+          <a:bodyPr xmlns:a="http://schemas.openxmlformats.org/drawingml/2006/main"/>
+          <a:lstStyle xmlns:a="http://schemas.openxmlformats.org/drawingml/2006/main"/>
+          <a:p xmlns:a="http://schemas.openxmlformats.org/drawingml/2006/main">
+            <a:pPr>
+              <a:defRPr sz="1650">
+                <a:solidFill>
+                  <a:srgbClr val="182235"/>
+                </a:solidFill>
+              </a:defRPr>
+            </a:pPr>
+            <a:r>
+              <a:rPr sz="1650">
+                <a:solidFill>
+                  <a:srgbClr val="182235"/>
+                </a:solidFill>
+              </a:rPr>
+              <a:t>사용자가 누를 수 있는 행동 요소입니다.</a:t>
+            </a:r>
+          </a:p>
+        </p:txBody>
+      </p:sp>
+    </p:spTree>
+    <p:extLst>
+      <p:ext uri="{BB962C8B-B14F-4D97-AF65-F5344CB8AC3E}">
+        <p14:creationId xmlns:p14="http://schemas.microsoft.com/office/powerpoint/2010/main" val="1113962264"/>
+      </p:ext>
+    </p:extLst>
+  </p:cSld>
+</p:sld>
+</file>
+
+<file path=ppt/slides/slide12.xml><?xml version="1.0" encoding="utf-8"?>
+<p:sld xmlns:p="http://schemas.openxmlformats.org/presentationml/2006/main">
+  <p:cSld>
+    <p:bg>
+      <p:bgPr>
+        <a:solidFill xmlns:a="http://schemas.openxmlformats.org/drawingml/2006/main">
+          <a:srgbClr val="FFFCF8"/>
+        </a:solidFill>
+      </p:bgPr>
+    </p:bg>
+    <p:spTree>
+      <p:nvGrpSpPr>
+        <p:cNvPr id="1" name=""/>
+        <p:cNvGrpSpPr/>
+        <p:nvPr/>
+      </p:nvGrpSpPr>
+      <p:grpSpPr>
+        <a:xfrm xmlns:a="http://schemas.openxmlformats.org/drawingml/2006/main"/>
+      </p:grpSpPr>
+      <p:sp>
+        <p:nvSpPr>
+          <p:cNvPr id="13" name="">
+            <a:extLst xmlns:a="http://schemas.openxmlformats.org/drawingml/2006/main">
+              <a:ext uri="{FF2B5EF4-FFF2-40B4-BE49-F238E27FC236}">
+                <a16:creationId xmlns:a16="http://schemas.microsoft.com/office/drawing/2014/main" id="{DA9B0EC0-4E36-4AF7-9023-0F46E8FD3CCB}"/>
+              </a:ext>
+            </a:extLst>
+          </p:cNvPr>
+          <p:cNvSpPr>
+            <a:spLocks xmlns:a="http://schemas.openxmlformats.org/drawingml/2006/main" noGrp="1"/>
+          </p:cNvSpPr>
+          <p:nvPr/>
+        </p:nvSpPr>
+        <p:spPr>
+          <a:xfrm xmlns:a="http://schemas.openxmlformats.org/drawingml/2006/main">
+            <a:off x="0" y="0"/>
+            <a:ext cx="171450" cy="6858000"/>
+          </a:xfrm>
+          <a:prstGeom xmlns:a="http://schemas.openxmlformats.org/drawingml/2006/main" prst="rect">
+            <a:avLst/>
+          </a:prstGeom>
+          <a:solidFill xmlns:a="http://schemas.openxmlformats.org/drawingml/2006/main">
+            <a:srgbClr val="6657E8"/>
+          </a:solidFill>
+          <a:ln xmlns:a="http://schemas.openxmlformats.org/drawingml/2006/main" w="0">
+            <a:noFill/>
+            <a:prstDash val="solid"/>
+          </a:ln>
+        </p:spPr>
+      </p:sp>
+      <p:sp>
+        <p:nvSpPr>
+          <p:cNvPr id="2" name="">
+            <a:extLst xmlns:a="http://schemas.openxmlformats.org/drawingml/2006/main">
+              <a:ext uri="{FF2B5EF4-FFF2-40B4-BE49-F238E27FC236}">
+                <a16:creationId xmlns:a16="http://schemas.microsoft.com/office/drawing/2014/main" id="{8F4B308F-BE12-4751-8A5C-42FED757DDC6}"/>
+              </a:ext>
+            </a:extLst>
+          </p:cNvPr>
+          <p:cNvSpPr>
+            <a:spLocks xmlns:a="http://schemas.openxmlformats.org/drawingml/2006/main" noGrp="1"/>
+          </p:cNvSpPr>
+          <p:nvPr/>
+        </p:nvSpPr>
+        <p:spPr>
+          <a:xfrm xmlns:a="http://schemas.openxmlformats.org/drawingml/2006/main">
+            <a:off x="647700" y="457200"/>
+            <a:ext cx="10096500" cy="552450"/>
+          </a:xfrm>
+          <a:prstGeom xmlns:a="http://schemas.openxmlformats.org/drawingml/2006/main" prst="rect">
+            <a:avLst/>
+          </a:prstGeom>
+          <a:noFill xmlns:a="http://schemas.openxmlformats.org/drawingml/2006/main"/>
+          <a:ln xmlns:a="http://schemas.openxmlformats.org/drawingml/2006/main" w="0">
+            <a:noFill/>
+            <a:prstDash val="solid"/>
+          </a:ln>
+        </p:spPr>
+        <p:txBody>
+          <a:bodyPr xmlns:a="http://schemas.openxmlformats.org/drawingml/2006/main"/>
+          <a:lstStyle xmlns:a="http://schemas.openxmlformats.org/drawingml/2006/main"/>
+          <a:p xmlns:a="http://schemas.openxmlformats.org/drawingml/2006/main">
+            <a:pPr>
+              <a:defRPr sz="2700" b="1">
+                <a:solidFill>
+                  <a:srgbClr val="182235"/>
+                </a:solidFill>
+              </a:defRPr>
+            </a:pPr>
+            <a:r>
+              <a:rPr sz="2700" b="1">
+                <a:solidFill>
+                  <a:srgbClr val="182235"/>
+                </a:solidFill>
+              </a:rPr>
+              <a:t>오류는 첫 문장부터 차례로 해결합니다</a:t>
+            </a:r>
+          </a:p>
+        </p:txBody>
+      </p:sp>
+      <p:sp>
+        <p:nvSpPr>
+          <p:cNvPr id="3" name="">
+            <a:extLst xmlns:a="http://schemas.openxmlformats.org/drawingml/2006/main">
+              <a:ext uri="{FF2B5EF4-FFF2-40B4-BE49-F238E27FC236}">
+                <a16:creationId xmlns:a16="http://schemas.microsoft.com/office/drawing/2014/main" id="{EB3602DF-32D1-4304-AC6E-1F7E06FA9DDF}"/>
+              </a:ext>
+            </a:extLst>
+          </p:cNvPr>
+          <p:cNvSpPr>
+            <a:spLocks xmlns:a="http://schemas.openxmlformats.org/drawingml/2006/main" noGrp="1"/>
+          </p:cNvSpPr>
+          <p:nvPr/>
+        </p:nvSpPr>
+        <p:spPr>
+          <a:xfrm xmlns:a="http://schemas.openxmlformats.org/drawingml/2006/main">
+            <a:off x="666750" y="6419850"/>
+            <a:ext cx="10096500" cy="209550"/>
+          </a:xfrm>
+          <a:prstGeom xmlns:a="http://schemas.openxmlformats.org/drawingml/2006/main" prst="rect">
+            <a:avLst/>
+          </a:prstGeom>
+          <a:noFill xmlns:a="http://schemas.openxmlformats.org/drawingml/2006/main"/>
+          <a:ln xmlns:a="http://schemas.openxmlformats.org/drawingml/2006/main" w="0">
+            <a:noFill/>
+            <a:prstDash val="solid"/>
+          </a:ln>
+        </p:spPr>
+        <p:txBody>
+          <a:bodyPr xmlns:a="http://schemas.openxmlformats.org/drawingml/2006/main"/>
+          <a:lstStyle xmlns:a="http://schemas.openxmlformats.org/drawingml/2006/main"/>
+          <a:p xmlns:a="http://schemas.openxmlformats.org/drawingml/2006/main">
+            <a:pPr>
+              <a:defRPr sz="975">
+                <a:solidFill>
+                  <a:srgbClr val="657083"/>
+                </a:solidFill>
+              </a:defRPr>
+            </a:pPr>
+            <a:r>
+              <a:rPr sz="975">
+                <a:solidFill>
+                  <a:srgbClr val="657083"/>
+                </a:solidFill>
+              </a:rPr>
+              <a:t>EDU 웹개발 교육 플랫폼  ·  12</a:t>
+            </a:r>
+          </a:p>
+        </p:txBody>
+      </p:sp>
+      <p:sp>
+        <p:nvSpPr>
+          <p:cNvPr id="4" name="">
+            <a:extLst xmlns:a="http://schemas.openxmlformats.org/drawingml/2006/main">
+              <a:ext uri="{FF2B5EF4-FFF2-40B4-BE49-F238E27FC236}">
+                <a16:creationId xmlns:a16="http://schemas.microsoft.com/office/drawing/2014/main" id="{0E8A812D-BBD7-4071-95D9-925A4C7D5B58}"/>
+              </a:ext>
+            </a:extLst>
+          </p:cNvPr>
+          <p:cNvSpPr>
+            <a:spLocks xmlns:a="http://schemas.openxmlformats.org/drawingml/2006/main" noGrp="1"/>
+          </p:cNvSpPr>
+          <p:nvPr/>
+        </p:nvSpPr>
+        <p:spPr>
+          <a:xfrm xmlns:a="http://schemas.openxmlformats.org/drawingml/2006/main">
+            <a:off x="723900" y="1333500"/>
+            <a:ext cx="10744200" cy="1123950"/>
+          </a:xfrm>
+          <a:prstGeom xmlns:a="http://schemas.openxmlformats.org/drawingml/2006/main" prst="roundRect">
+            <a:avLst>
+              <a:gd name="adj" fmla="val 10169"/>
+            </a:avLst>
+          </a:prstGeom>
+          <a:solidFill xmlns:a="http://schemas.openxmlformats.org/drawingml/2006/main">
+            <a:srgbClr val="FFF0ED"/>
+          </a:solidFill>
+          <a:ln xmlns:a="http://schemas.openxmlformats.org/drawingml/2006/main" w="0">
+            <a:noFill/>
+            <a:prstDash val="solid"/>
+          </a:ln>
+        </p:spPr>
+      </p:sp>
+      <p:sp>
+        <p:nvSpPr>
+          <p:cNvPr id="5" name="">
+            <a:extLst xmlns:a="http://schemas.openxmlformats.org/drawingml/2006/main">
+              <a:ext uri="{FF2B5EF4-FFF2-40B4-BE49-F238E27FC236}">
+                <a16:creationId xmlns:a16="http://schemas.microsoft.com/office/drawing/2014/main" id="{864745C3-D81A-45FB-9771-B469D9CD515B}"/>
+              </a:ext>
+            </a:extLst>
+          </p:cNvPr>
+          <p:cNvSpPr>
+            <a:spLocks xmlns:a="http://schemas.openxmlformats.org/drawingml/2006/main" noGrp="1"/>
+          </p:cNvSpPr>
+          <p:nvPr/>
+        </p:nvSpPr>
+        <p:spPr>
+          <a:xfrm xmlns:a="http://schemas.openxmlformats.org/drawingml/2006/main">
+            <a:off x="1000125" y="1562100"/>
+            <a:ext cx="2857500" cy="361950"/>
+          </a:xfrm>
+          <a:prstGeom xmlns:a="http://schemas.openxmlformats.org/drawingml/2006/main" prst="rect">
+            <a:avLst/>
+          </a:prstGeom>
+          <a:noFill xmlns:a="http://schemas.openxmlformats.org/drawingml/2006/main"/>
+          <a:ln xmlns:a="http://schemas.openxmlformats.org/drawingml/2006/main" w="0">
+            <a:noFill/>
+            <a:prstDash val="solid"/>
+          </a:ln>
+        </p:spPr>
+        <p:txBody>
+          <a:bodyPr xmlns:a="http://schemas.openxmlformats.org/drawingml/2006/main"/>
+          <a:lstStyle xmlns:a="http://schemas.openxmlformats.org/drawingml/2006/main"/>
+          <a:p xmlns:a="http://schemas.openxmlformats.org/drawingml/2006/main">
+            <a:pPr>
+              <a:defRPr sz="1650" b="1">
+                <a:solidFill>
+                  <a:srgbClr val="A8493B"/>
+                </a:solidFill>
+              </a:defRPr>
+            </a:pPr>
+            <a:r>
+              <a:rPr sz="1650" b="1">
+                <a:solidFill>
+                  <a:srgbClr val="A8493B"/>
+                </a:solidFill>
+              </a:rPr>
+              <a:t>글자가 깨져요</a:t>
+            </a:r>
+          </a:p>
+        </p:txBody>
+      </p:sp>
+      <p:sp>
+        <p:nvSpPr>
+          <p:cNvPr id="6" name="">
+            <a:extLst xmlns:a="http://schemas.openxmlformats.org/drawingml/2006/main">
+              <a:ext uri="{FF2B5EF4-FFF2-40B4-BE49-F238E27FC236}">
+                <a16:creationId xmlns:a16="http://schemas.microsoft.com/office/drawing/2014/main" id="{95725C71-241E-4BC5-8FEA-D7B046DB385E}"/>
+              </a:ext>
+            </a:extLst>
+          </p:cNvPr>
+          <p:cNvSpPr>
+            <a:spLocks xmlns:a="http://schemas.openxmlformats.org/drawingml/2006/main" noGrp="1"/>
+          </p:cNvSpPr>
+          <p:nvPr/>
+        </p:nvSpPr>
+        <p:spPr>
+          <a:xfrm xmlns:a="http://schemas.openxmlformats.org/drawingml/2006/main">
+            <a:off x="4000500" y="1495425"/>
+            <a:ext cx="6953250" cy="619125"/>
+          </a:xfrm>
+          <a:prstGeom xmlns:a="http://schemas.openxmlformats.org/drawingml/2006/main" prst="rect">
+            <a:avLst/>
+          </a:prstGeom>
+          <a:noFill xmlns:a="http://schemas.openxmlformats.org/drawingml/2006/main"/>
+          <a:ln xmlns:a="http://schemas.openxmlformats.org/drawingml/2006/main" w="0">
+            <a:noFill/>
+            <a:prstDash val="solid"/>
+          </a:ln>
+        </p:spPr>
+        <p:txBody>
+          <a:bodyPr xmlns:a="http://schemas.openxmlformats.org/drawingml/2006/main"/>
+          <a:lstStyle xmlns:a="http://schemas.openxmlformats.org/drawingml/2006/main"/>
+          <a:p xmlns:a="http://schemas.openxmlformats.org/drawingml/2006/main">
+            <a:pPr>
+              <a:defRPr sz="1575">
+                <a:solidFill>
+                  <a:srgbClr val="182235"/>
+                </a:solidFill>
+              </a:defRPr>
+            </a:pPr>
+            <a:r>
+              <a:rPr sz="1575">
+                <a:solidFill>
+                  <a:srgbClr val="182235"/>
+                </a:solidFill>
+              </a:rPr>
+              <a:t>&lt;meta charset="UTF-8"&gt;가 head 안에 있는지 확인합니다.</a:t>
+            </a:r>
+          </a:p>
+        </p:txBody>
+      </p:sp>
+      <p:sp>
+        <p:nvSpPr>
+          <p:cNvPr id="7" name="">
+            <a:extLst xmlns:a="http://schemas.openxmlformats.org/drawingml/2006/main">
+              <a:ext uri="{FF2B5EF4-FFF2-40B4-BE49-F238E27FC236}">
+                <a16:creationId xmlns:a16="http://schemas.microsoft.com/office/drawing/2014/main" id="{DCF0AC06-5C51-4C62-AB45-4B24352AC4A1}"/>
+              </a:ext>
+            </a:extLst>
+          </p:cNvPr>
+          <p:cNvSpPr>
+            <a:spLocks xmlns:a="http://schemas.openxmlformats.org/drawingml/2006/main" noGrp="1"/>
+          </p:cNvSpPr>
+          <p:nvPr/>
+        </p:nvSpPr>
+        <p:spPr>
+          <a:xfrm xmlns:a="http://schemas.openxmlformats.org/drawingml/2006/main">
+            <a:off x="723900" y="2762250"/>
+            <a:ext cx="10744200" cy="1123950"/>
+          </a:xfrm>
+          <a:prstGeom xmlns:a="http://schemas.openxmlformats.org/drawingml/2006/main" prst="roundRect">
+            <a:avLst>
+              <a:gd name="adj" fmla="val 10169"/>
+            </a:avLst>
+          </a:prstGeom>
+          <a:solidFill xmlns:a="http://schemas.openxmlformats.org/drawingml/2006/main">
+            <a:srgbClr val="EAF8F3"/>
+          </a:solidFill>
+          <a:ln xmlns:a="http://schemas.openxmlformats.org/drawingml/2006/main" w="0">
+            <a:noFill/>
+            <a:prstDash val="solid"/>
+          </a:ln>
+        </p:spPr>
+      </p:sp>
+      <p:sp>
+        <p:nvSpPr>
+          <p:cNvPr id="8" name="">
+            <a:extLst xmlns:a="http://schemas.openxmlformats.org/drawingml/2006/main">
+              <a:ext uri="{FF2B5EF4-FFF2-40B4-BE49-F238E27FC236}">
+                <a16:creationId xmlns:a16="http://schemas.microsoft.com/office/drawing/2014/main" id="{42AEB76E-7A7F-4D19-88E3-DF32F474F674}"/>
+              </a:ext>
+            </a:extLst>
+          </p:cNvPr>
+          <p:cNvSpPr>
+            <a:spLocks xmlns:a="http://schemas.openxmlformats.org/drawingml/2006/main" noGrp="1"/>
+          </p:cNvSpPr>
+          <p:nvPr/>
+        </p:nvSpPr>
+        <p:spPr>
+          <a:xfrm xmlns:a="http://schemas.openxmlformats.org/drawingml/2006/main">
+            <a:off x="1000125" y="2990850"/>
+            <a:ext cx="2857500" cy="361950"/>
+          </a:xfrm>
+          <a:prstGeom xmlns:a="http://schemas.openxmlformats.org/drawingml/2006/main" prst="rect">
+            <a:avLst/>
+          </a:prstGeom>
+          <a:noFill xmlns:a="http://schemas.openxmlformats.org/drawingml/2006/main"/>
+          <a:ln xmlns:a="http://schemas.openxmlformats.org/drawingml/2006/main" w="0">
+            <a:noFill/>
+            <a:prstDash val="solid"/>
+          </a:ln>
+        </p:spPr>
+        <p:txBody>
+          <a:bodyPr xmlns:a="http://schemas.openxmlformats.org/drawingml/2006/main"/>
+          <a:lstStyle xmlns:a="http://schemas.openxmlformats.org/drawingml/2006/main"/>
+          <a:p xmlns:a="http://schemas.openxmlformats.org/drawingml/2006/main">
+            <a:pPr>
+              <a:defRPr sz="1650" b="1">
+                <a:solidFill>
+                  <a:srgbClr val="26755F"/>
+                </a:solidFill>
+              </a:defRPr>
+            </a:pPr>
+            <a:r>
+              <a:rPr sz="1650" b="1">
+                <a:solidFill>
+                  <a:srgbClr val="26755F"/>
+                </a:solidFill>
+              </a:rPr>
+              <a:t>화면이 바뀌지 않아요</a:t>
+            </a:r>
+          </a:p>
+        </p:txBody>
+      </p:sp>
+      <p:sp>
+        <p:nvSpPr>
+          <p:cNvPr id="9" name="">
+            <a:extLst xmlns:a="http://schemas.openxmlformats.org/drawingml/2006/main">
+              <a:ext uri="{FF2B5EF4-FFF2-40B4-BE49-F238E27FC236}">
+                <a16:creationId xmlns:a16="http://schemas.microsoft.com/office/drawing/2014/main" id="{708E3D5C-E189-49E3-ABB9-42602A60B827}"/>
+              </a:ext>
+            </a:extLst>
+          </p:cNvPr>
+          <p:cNvSpPr>
+            <a:spLocks xmlns:a="http://schemas.openxmlformats.org/drawingml/2006/main" noGrp="1"/>
+          </p:cNvSpPr>
+          <p:nvPr/>
+        </p:nvSpPr>
+        <p:spPr>
+          <a:xfrm xmlns:a="http://schemas.openxmlformats.org/drawingml/2006/main">
+            <a:off x="4000500" y="2924175"/>
+            <a:ext cx="6953250" cy="619125"/>
+          </a:xfrm>
+          <a:prstGeom xmlns:a="http://schemas.openxmlformats.org/drawingml/2006/main" prst="rect">
+            <a:avLst/>
+          </a:prstGeom>
+          <a:noFill xmlns:a="http://schemas.openxmlformats.org/drawingml/2006/main"/>
+          <a:ln xmlns:a="http://schemas.openxmlformats.org/drawingml/2006/main" w="0">
+            <a:noFill/>
+            <a:prstDash val="solid"/>
+          </a:ln>
+        </p:spPr>
+        <p:txBody>
+          <a:bodyPr xmlns:a="http://schemas.openxmlformats.org/drawingml/2006/main"/>
+          <a:lstStyle xmlns:a="http://schemas.openxmlformats.org/drawingml/2006/main"/>
+          <a:p xmlns:a="http://schemas.openxmlformats.org/drawingml/2006/main">
+            <a:pPr>
+              <a:defRPr sz="1575">
+                <a:solidFill>
+                  <a:srgbClr val="182235"/>
+                </a:solidFill>
+              </a:defRPr>
+            </a:pPr>
+            <a:r>
+              <a:rPr sz="1575">
+                <a:solidFill>
+                  <a:srgbClr val="182235"/>
+                </a:solidFill>
+              </a:rPr>
+              <a:t>파일을 저장한 뒤 브라우저를 새로고침합니다.</a:t>
+            </a:r>
+          </a:p>
+        </p:txBody>
+      </p:sp>
+      <p:sp>
+        <p:nvSpPr>
+          <p:cNvPr id="10" name="">
+            <a:extLst xmlns:a="http://schemas.openxmlformats.org/drawingml/2006/main">
+              <a:ext uri="{FF2B5EF4-FFF2-40B4-BE49-F238E27FC236}">
+                <a16:creationId xmlns:a16="http://schemas.microsoft.com/office/drawing/2014/main" id="{88BCF712-4AFF-4173-B1D7-9C7D700DE1DB}"/>
+              </a:ext>
+            </a:extLst>
+          </p:cNvPr>
+          <p:cNvSpPr>
+            <a:spLocks xmlns:a="http://schemas.openxmlformats.org/drawingml/2006/main" noGrp="1"/>
+          </p:cNvSpPr>
+          <p:nvPr/>
+        </p:nvSpPr>
+        <p:spPr>
+          <a:xfrm xmlns:a="http://schemas.openxmlformats.org/drawingml/2006/main">
+            <a:off x="723900" y="4191000"/>
+            <a:ext cx="10744200" cy="1123950"/>
+          </a:xfrm>
+          <a:prstGeom xmlns:a="http://schemas.openxmlformats.org/drawingml/2006/main" prst="roundRect">
+            <a:avLst>
+              <a:gd name="adj" fmla="val 10169"/>
+            </a:avLst>
+          </a:prstGeom>
+          <a:solidFill xmlns:a="http://schemas.openxmlformats.org/drawingml/2006/main">
+            <a:srgbClr val="FFF0ED"/>
+          </a:solidFill>
+          <a:ln xmlns:a="http://schemas.openxmlformats.org/drawingml/2006/main" w="0">
+            <a:noFill/>
+            <a:prstDash val="solid"/>
+          </a:ln>
+        </p:spPr>
+      </p:sp>
+      <p:sp>
+        <p:nvSpPr>
+          <p:cNvPr id="11" name="">
+            <a:extLst xmlns:a="http://schemas.openxmlformats.org/drawingml/2006/main">
+              <a:ext uri="{FF2B5EF4-FFF2-40B4-BE49-F238E27FC236}">
+                <a16:creationId xmlns:a16="http://schemas.microsoft.com/office/drawing/2014/main" id="{CB89F411-04FC-4082-8020-AF460287BF04}"/>
+              </a:ext>
+            </a:extLst>
+          </p:cNvPr>
+          <p:cNvSpPr>
+            <a:spLocks xmlns:a="http://schemas.openxmlformats.org/drawingml/2006/main" noGrp="1"/>
+          </p:cNvSpPr>
+          <p:nvPr/>
+        </p:nvSpPr>
+        <p:spPr>
+          <a:xfrm xmlns:a="http://schemas.openxmlformats.org/drawingml/2006/main">
+            <a:off x="1000125" y="4419600"/>
+            <a:ext cx="2857500" cy="361950"/>
+          </a:xfrm>
+          <a:prstGeom xmlns:a="http://schemas.openxmlformats.org/drawingml/2006/main" prst="rect">
+            <a:avLst/>
+          </a:prstGeom>
+          <a:noFill xmlns:a="http://schemas.openxmlformats.org/drawingml/2006/main"/>
+          <a:ln xmlns:a="http://schemas.openxmlformats.org/drawingml/2006/main" w="0">
+            <a:noFill/>
+            <a:prstDash val="solid"/>
+          </a:ln>
+        </p:spPr>
+        <p:txBody>
+          <a:bodyPr xmlns:a="http://schemas.openxmlformats.org/drawingml/2006/main"/>
+          <a:lstStyle xmlns:a="http://schemas.openxmlformats.org/drawingml/2006/main"/>
+          <a:p xmlns:a="http://schemas.openxmlformats.org/drawingml/2006/main">
+            <a:pPr>
+              <a:defRPr sz="1650" b="1">
+                <a:solidFill>
+                  <a:srgbClr val="A8493B"/>
+                </a:solidFill>
+              </a:defRPr>
+            </a:pPr>
+            <a:r>
+              <a:rPr sz="1650" b="1">
+                <a:solidFill>
+                  <a:srgbClr val="A8493B"/>
+                </a:solidFill>
+              </a:rPr>
+              <a:t>태그가 그대로 보여요</a:t>
+            </a:r>
+          </a:p>
+        </p:txBody>
+      </p:sp>
+      <p:sp>
+        <p:nvSpPr>
+          <p:cNvPr id="12" name="">
+            <a:extLst xmlns:a="http://schemas.openxmlformats.org/drawingml/2006/main">
+              <a:ext uri="{FF2B5EF4-FFF2-40B4-BE49-F238E27FC236}">
+                <a16:creationId xmlns:a16="http://schemas.microsoft.com/office/drawing/2014/main" id="{24E39F09-C5C5-4ECB-9F35-20D5ED9F2054}"/>
+              </a:ext>
+            </a:extLst>
+          </p:cNvPr>
+          <p:cNvSpPr>
+            <a:spLocks xmlns:a="http://schemas.openxmlformats.org/drawingml/2006/main" noGrp="1"/>
+          </p:cNvSpPr>
+          <p:nvPr/>
+        </p:nvSpPr>
+        <p:spPr>
+          <a:xfrm xmlns:a="http://schemas.openxmlformats.org/drawingml/2006/main">
+            <a:off x="4000500" y="4352925"/>
+            <a:ext cx="6953250" cy="619125"/>
+          </a:xfrm>
+          <a:prstGeom xmlns:a="http://schemas.openxmlformats.org/drawingml/2006/main" prst="rect">
+            <a:avLst/>
+          </a:prstGeom>
+          <a:noFill xmlns:a="http://schemas.openxmlformats.org/drawingml/2006/main"/>
+          <a:ln xmlns:a="http://schemas.openxmlformats.org/drawingml/2006/main" w="0">
+            <a:noFill/>
+            <a:prstDash val="solid"/>
+          </a:ln>
+        </p:spPr>
+        <p:txBody>
+          <a:bodyPr xmlns:a="http://schemas.openxmlformats.org/drawingml/2006/main"/>
+          <a:lstStyle xmlns:a="http://schemas.openxmlformats.org/drawingml/2006/main"/>
+          <a:p xmlns:a="http://schemas.openxmlformats.org/drawingml/2006/main">
+            <a:pPr>
+              <a:defRPr sz="1575">
+                <a:solidFill>
+                  <a:srgbClr val="182235"/>
+                </a:solidFill>
+              </a:defRPr>
+            </a:pPr>
+            <a:r>
+              <a:rPr sz="1575">
+                <a:solidFill>
+                  <a:srgbClr val="182235"/>
+                </a:solidFill>
+              </a:rPr>
+              <a:t>&lt;와 &gt;가 빠지지 않았는지 확인합니다.</a:t>
+            </a:r>
+          </a:p>
+        </p:txBody>
+      </p:sp>
+    </p:spTree>
+    <p:extLst>
+      <p:ext uri="{BB962C8B-B14F-4D97-AF65-F5344CB8AC3E}">
+        <p14:creationId xmlns:p14="http://schemas.microsoft.com/office/powerpoint/2010/main" val="20629327"/>
+      </p:ext>
+    </p:extLst>
+  </p:cSld>
+</p:sld>
+</file>
+
+<file path=ppt/slides/slide13.xml><?xml version="1.0" encoding="utf-8"?>
+<p:sld xmlns:p="http://schemas.openxmlformats.org/presentationml/2006/main">
+  <p:cSld>
+    <p:bg>
+      <p:bgPr>
+        <a:solidFill xmlns:a="http://schemas.openxmlformats.org/drawingml/2006/main">
+          <a:srgbClr val="FFFCF8"/>
+        </a:solidFill>
+      </p:bgPr>
+    </p:bg>
+    <p:spTree>
+      <p:nvGrpSpPr>
+        <p:cNvPr id="1" name=""/>
+        <p:cNvGrpSpPr/>
+        <p:nvPr/>
+      </p:nvGrpSpPr>
+      <p:grpSpPr>
+        <a:xfrm xmlns:a="http://schemas.openxmlformats.org/drawingml/2006/main"/>
+      </p:grpSpPr>
+      <p:sp>
+        <p:nvSpPr>
+          <p:cNvPr id="13" name="">
+            <a:extLst xmlns:a="http://schemas.openxmlformats.org/drawingml/2006/main">
+              <a:ext uri="{FF2B5EF4-FFF2-40B4-BE49-F238E27FC236}">
+                <a16:creationId xmlns:a16="http://schemas.microsoft.com/office/drawing/2014/main" id="{115AD85F-134F-4435-BC88-B1674C8A6BDD}"/>
+              </a:ext>
+            </a:extLst>
+          </p:cNvPr>
+          <p:cNvSpPr>
+            <a:spLocks xmlns:a="http://schemas.openxmlformats.org/drawingml/2006/main" noGrp="1"/>
+          </p:cNvSpPr>
+          <p:nvPr/>
+        </p:nvSpPr>
+        <p:spPr>
+          <a:xfrm xmlns:a="http://schemas.openxmlformats.org/drawingml/2006/main">
+            <a:off x="0" y="0"/>
+            <a:ext cx="171450" cy="6858000"/>
+          </a:xfrm>
+          <a:prstGeom xmlns:a="http://schemas.openxmlformats.org/drawingml/2006/main" prst="rect">
+            <a:avLst/>
+          </a:prstGeom>
+          <a:solidFill xmlns:a="http://schemas.openxmlformats.org/drawingml/2006/main">
+            <a:srgbClr val="6657E8"/>
+          </a:solidFill>
+          <a:ln xmlns:a="http://schemas.openxmlformats.org/drawingml/2006/main" w="0">
+            <a:noFill/>
+            <a:prstDash val="solid"/>
+          </a:ln>
+        </p:spPr>
+      </p:sp>
+      <p:sp>
+        <p:nvSpPr>
+          <p:cNvPr id="2" name="">
+            <a:extLst xmlns:a="http://schemas.openxmlformats.org/drawingml/2006/main">
+              <a:ext uri="{FF2B5EF4-FFF2-40B4-BE49-F238E27FC236}">
+                <a16:creationId xmlns:a16="http://schemas.microsoft.com/office/drawing/2014/main" id="{E864CD2E-2021-406E-A935-C2E1E9EA8482}"/>
+              </a:ext>
+            </a:extLst>
+          </p:cNvPr>
+          <p:cNvSpPr>
+            <a:spLocks xmlns:a="http://schemas.openxmlformats.org/drawingml/2006/main" noGrp="1"/>
+          </p:cNvSpPr>
+          <p:nvPr/>
+        </p:nvSpPr>
+        <p:spPr>
+          <a:xfrm xmlns:a="http://schemas.openxmlformats.org/drawingml/2006/main">
+            <a:off x="647700" y="457200"/>
+            <a:ext cx="10096500" cy="552450"/>
+          </a:xfrm>
+          <a:prstGeom xmlns:a="http://schemas.openxmlformats.org/drawingml/2006/main" prst="rect">
+            <a:avLst/>
+          </a:prstGeom>
+          <a:noFill xmlns:a="http://schemas.openxmlformats.org/drawingml/2006/main"/>
+          <a:ln xmlns:a="http://schemas.openxmlformats.org/drawingml/2006/main" w="0">
+            <a:noFill/>
+            <a:prstDash val="solid"/>
+          </a:ln>
+        </p:spPr>
+        <p:txBody>
+          <a:bodyPr xmlns:a="http://schemas.openxmlformats.org/drawingml/2006/main"/>
+          <a:lstStyle xmlns:a="http://schemas.openxmlformats.org/drawingml/2006/main"/>
+          <a:p xmlns:a="http://schemas.openxmlformats.org/drawingml/2006/main">
+            <a:pPr>
+              <a:defRPr sz="2700" b="1">
+                <a:solidFill>
+                  <a:srgbClr val="182235"/>
+                </a:solidFill>
+              </a:defRPr>
+            </a:pPr>
+            <a:r>
+              <a:rPr sz="2700" b="1">
+                <a:solidFill>
+                  <a:srgbClr val="182235"/>
+                </a:solidFill>
+              </a:rPr>
+              <a:t>상황에 맞는 Codex 요청문을 골라 쓰세요</a:t>
+            </a:r>
+          </a:p>
+        </p:txBody>
+      </p:sp>
+      <p:sp>
+        <p:nvSpPr>
+          <p:cNvPr id="3" name="">
+            <a:extLst xmlns:a="http://schemas.openxmlformats.org/drawingml/2006/main">
+              <a:ext uri="{FF2B5EF4-FFF2-40B4-BE49-F238E27FC236}">
+                <a16:creationId xmlns:a16="http://schemas.microsoft.com/office/drawing/2014/main" id="{7303BFCB-F232-4E86-AB22-3A32D80A7532}"/>
+              </a:ext>
+            </a:extLst>
+          </p:cNvPr>
+          <p:cNvSpPr>
+            <a:spLocks xmlns:a="http://schemas.openxmlformats.org/drawingml/2006/main" noGrp="1"/>
+          </p:cNvSpPr>
+          <p:nvPr/>
+        </p:nvSpPr>
+        <p:spPr>
+          <a:xfrm xmlns:a="http://schemas.openxmlformats.org/drawingml/2006/main">
+            <a:off x="666750" y="6419850"/>
+            <a:ext cx="10096500" cy="209550"/>
+          </a:xfrm>
+          <a:prstGeom xmlns:a="http://schemas.openxmlformats.org/drawingml/2006/main" prst="rect">
+            <a:avLst/>
+          </a:prstGeom>
+          <a:noFill xmlns:a="http://schemas.openxmlformats.org/drawingml/2006/main"/>
+          <a:ln xmlns:a="http://schemas.openxmlformats.org/drawingml/2006/main" w="0">
+            <a:noFill/>
+            <a:prstDash val="solid"/>
+          </a:ln>
+        </p:spPr>
+        <p:txBody>
+          <a:bodyPr xmlns:a="http://schemas.openxmlformats.org/drawingml/2006/main"/>
+          <a:lstStyle xmlns:a="http://schemas.openxmlformats.org/drawingml/2006/main"/>
+          <a:p xmlns:a="http://schemas.openxmlformats.org/drawingml/2006/main">
+            <a:pPr>
+              <a:defRPr sz="975">
+                <a:solidFill>
+                  <a:srgbClr val="657083"/>
+                </a:solidFill>
+              </a:defRPr>
+            </a:pPr>
+            <a:r>
+              <a:rPr sz="975">
+                <a:solidFill>
+                  <a:srgbClr val="657083"/>
+                </a:solidFill>
+              </a:rPr>
+              <a:t>EDU 웹개발 교육 플랫폼  ·  13</a:t>
+            </a:r>
+          </a:p>
+        </p:txBody>
+      </p:sp>
+      <p:sp>
+        <p:nvSpPr>
+          <p:cNvPr id="4" name="">
+            <a:extLst xmlns:a="http://schemas.openxmlformats.org/drawingml/2006/main">
+              <a:ext uri="{FF2B5EF4-FFF2-40B4-BE49-F238E27FC236}">
+                <a16:creationId xmlns:a16="http://schemas.microsoft.com/office/drawing/2014/main" id="{3EDCFDA4-E1EF-44D0-BFDF-E3AA62E9F6E1}"/>
+              </a:ext>
+            </a:extLst>
+          </p:cNvPr>
+          <p:cNvSpPr>
+            <a:spLocks xmlns:a="http://schemas.openxmlformats.org/drawingml/2006/main" noGrp="1"/>
+          </p:cNvSpPr>
+          <p:nvPr/>
+        </p:nvSpPr>
+        <p:spPr>
+          <a:xfrm xmlns:a="http://schemas.openxmlformats.org/drawingml/2006/main">
+            <a:off x="742950" y="1381125"/>
+            <a:ext cx="514350" cy="514350"/>
+          </a:xfrm>
+          <a:prstGeom xmlns:a="http://schemas.openxmlformats.org/drawingml/2006/main" prst="roundRect">
+            <a:avLst>
+              <a:gd name="adj" fmla="val 22222"/>
+            </a:avLst>
+          </a:prstGeom>
+          <a:solidFill xmlns:a="http://schemas.openxmlformats.org/drawingml/2006/main">
+            <a:srgbClr val="EEEAFE"/>
+          </a:solidFill>
+          <a:ln xmlns:a="http://schemas.openxmlformats.org/drawingml/2006/main" w="0">
+            <a:noFill/>
+            <a:prstDash val="solid"/>
+          </a:ln>
+        </p:spPr>
+      </p:sp>
+      <p:sp>
+        <p:nvSpPr>
+          <p:cNvPr id="5" name="">
+            <a:extLst xmlns:a="http://schemas.openxmlformats.org/drawingml/2006/main">
+              <a:ext uri="{FF2B5EF4-FFF2-40B4-BE49-F238E27FC236}">
+                <a16:creationId xmlns:a16="http://schemas.microsoft.com/office/drawing/2014/main" id="{94DC4799-02A6-4152-9744-E24362CB6E9A}"/>
+              </a:ext>
+            </a:extLst>
+          </p:cNvPr>
+          <p:cNvSpPr>
+            <a:spLocks xmlns:a="http://schemas.openxmlformats.org/drawingml/2006/main" noGrp="1"/>
+          </p:cNvSpPr>
+          <p:nvPr/>
+        </p:nvSpPr>
+        <p:spPr>
+          <a:xfrm xmlns:a="http://schemas.openxmlformats.org/drawingml/2006/main">
+            <a:off x="742950" y="1476375"/>
+            <a:ext cx="514350" cy="304800"/>
+          </a:xfrm>
+          <a:prstGeom xmlns:a="http://schemas.openxmlformats.org/drawingml/2006/main" prst="rect">
+            <a:avLst/>
+          </a:prstGeom>
+          <a:noFill xmlns:a="http://schemas.openxmlformats.org/drawingml/2006/main"/>
+          <a:ln xmlns:a="http://schemas.openxmlformats.org/drawingml/2006/main" w="0">
+            <a:noFill/>
+            <a:prstDash val="solid"/>
+          </a:ln>
+        </p:spPr>
+        <p:txBody>
+          <a:bodyPr xmlns:a="http://schemas.openxmlformats.org/drawingml/2006/main"/>
+          <a:lstStyle xmlns:a="http://schemas.openxmlformats.org/drawingml/2006/main"/>
+          <a:p xmlns:a="http://schemas.openxmlformats.org/drawingml/2006/main">
+            <a:pPr algn="ctr">
+              <a:defRPr sz="1500" b="1">
+                <a:solidFill>
+                  <a:srgbClr val="6657E8"/>
+                </a:solidFill>
+              </a:defRPr>
+            </a:pPr>
+            <a:r>
+              <a:rPr sz="1500" b="1">
+                <a:solidFill>
+                  <a:srgbClr val="6657E8"/>
+                </a:solidFill>
+              </a:rPr>
+              <a:t>1</a:t>
+            </a:r>
+          </a:p>
+        </p:txBody>
+      </p:sp>
+      <p:sp>
+        <p:nvSpPr>
+          <p:cNvPr id="6" name="">
+            <a:extLst xmlns:a="http://schemas.openxmlformats.org/drawingml/2006/main">
+              <a:ext uri="{FF2B5EF4-FFF2-40B4-BE49-F238E27FC236}">
+                <a16:creationId xmlns:a16="http://schemas.microsoft.com/office/drawing/2014/main" id="{1AEB15BB-984B-405F-BF63-F0AEB5394639}"/>
+              </a:ext>
+            </a:extLst>
+          </p:cNvPr>
+          <p:cNvSpPr>
+            <a:spLocks xmlns:a="http://schemas.openxmlformats.org/drawingml/2006/main" noGrp="1"/>
+          </p:cNvSpPr>
+          <p:nvPr/>
+        </p:nvSpPr>
+        <p:spPr>
+          <a:xfrm xmlns:a="http://schemas.openxmlformats.org/drawingml/2006/main">
+            <a:off x="1485900" y="1419225"/>
+            <a:ext cx="9239250" cy="619125"/>
+          </a:xfrm>
+          <a:prstGeom xmlns:a="http://schemas.openxmlformats.org/drawingml/2006/main" prst="rect">
+            <a:avLst/>
+          </a:prstGeom>
+          <a:noFill xmlns:a="http://schemas.openxmlformats.org/drawingml/2006/main"/>
+          <a:ln xmlns:a="http://schemas.openxmlformats.org/drawingml/2006/main" w="0">
+            <a:noFill/>
+            <a:prstDash val="solid"/>
+          </a:ln>
+        </p:spPr>
+        <p:txBody>
+          <a:bodyPr xmlns:a="http://schemas.openxmlformats.org/drawingml/2006/main"/>
+          <a:lstStyle xmlns:a="http://schemas.openxmlformats.org/drawingml/2006/main"/>
+          <a:p xmlns:a="http://schemas.openxmlformats.org/drawingml/2006/main">
+            <a:pPr>
+              <a:defRPr sz="1800">
+                <a:solidFill>
+                  <a:srgbClr val="182235"/>
+                </a:solidFill>
+              </a:defRPr>
+            </a:pPr>
+            <a:r>
+              <a:rPr sz="1800">
+                <a:solidFill>
+                  <a:srgbClr val="182235"/>
+                </a:solidFill>
+              </a:rPr>
+              <a:t>현재 index.html 구조를 초보자에게 설명해줘.</a:t>
+            </a:r>
+          </a:p>
+        </p:txBody>
+      </p:sp>
+      <p:sp>
+        <p:nvSpPr>
+          <p:cNvPr id="7" name="">
+            <a:extLst xmlns:a="http://schemas.openxmlformats.org/drawingml/2006/main">
+              <a:ext uri="{FF2B5EF4-FFF2-40B4-BE49-F238E27FC236}">
+                <a16:creationId xmlns:a16="http://schemas.microsoft.com/office/drawing/2014/main" id="{4AA81B6F-65C7-4CD3-9C6C-80A88A9A0FE9}"/>
+              </a:ext>
+            </a:extLst>
+          </p:cNvPr>
+          <p:cNvSpPr>
+            <a:spLocks xmlns:a="http://schemas.openxmlformats.org/drawingml/2006/main" noGrp="1"/>
+          </p:cNvSpPr>
+          <p:nvPr/>
+        </p:nvSpPr>
+        <p:spPr>
+          <a:xfrm xmlns:a="http://schemas.openxmlformats.org/drawingml/2006/main">
+            <a:off x="742950" y="2352675"/>
+            <a:ext cx="514350" cy="514350"/>
+          </a:xfrm>
+          <a:prstGeom xmlns:a="http://schemas.openxmlformats.org/drawingml/2006/main" prst="roundRect">
+            <a:avLst>
+              <a:gd name="adj" fmla="val 22222"/>
+            </a:avLst>
+          </a:prstGeom>
+          <a:solidFill xmlns:a="http://schemas.openxmlformats.org/drawingml/2006/main">
+            <a:srgbClr val="EAF8F3"/>
+          </a:solidFill>
+          <a:ln xmlns:a="http://schemas.openxmlformats.org/drawingml/2006/main" w="0">
+            <a:noFill/>
+            <a:prstDash val="solid"/>
+          </a:ln>
+        </p:spPr>
+      </p:sp>
+      <p:sp>
+        <p:nvSpPr>
+          <p:cNvPr id="8" name="">
+            <a:extLst xmlns:a="http://schemas.openxmlformats.org/drawingml/2006/main">
+              <a:ext uri="{FF2B5EF4-FFF2-40B4-BE49-F238E27FC236}">
+                <a16:creationId xmlns:a16="http://schemas.microsoft.com/office/drawing/2014/main" id="{BEF0D8B8-5B13-497D-B89C-3B716539FA5C}"/>
+              </a:ext>
+            </a:extLst>
+          </p:cNvPr>
+          <p:cNvSpPr>
+            <a:spLocks xmlns:a="http://schemas.openxmlformats.org/drawingml/2006/main" noGrp="1"/>
+          </p:cNvSpPr>
+          <p:nvPr/>
+        </p:nvSpPr>
+        <p:spPr>
+          <a:xfrm xmlns:a="http://schemas.openxmlformats.org/drawingml/2006/main">
+            <a:off x="742950" y="2447925"/>
+            <a:ext cx="514350" cy="304800"/>
+          </a:xfrm>
+          <a:prstGeom xmlns:a="http://schemas.openxmlformats.org/drawingml/2006/main" prst="rect">
+            <a:avLst/>
+          </a:prstGeom>
+          <a:noFill xmlns:a="http://schemas.openxmlformats.org/drawingml/2006/main"/>
+          <a:ln xmlns:a="http://schemas.openxmlformats.org/drawingml/2006/main" w="0">
+            <a:noFill/>
+            <a:prstDash val="solid"/>
+          </a:ln>
+        </p:spPr>
+        <p:txBody>
+          <a:bodyPr xmlns:a="http://schemas.openxmlformats.org/drawingml/2006/main"/>
+          <a:lstStyle xmlns:a="http://schemas.openxmlformats.org/drawingml/2006/main"/>
+          <a:p xmlns:a="http://schemas.openxmlformats.org/drawingml/2006/main">
+            <a:pPr algn="ctr">
+              <a:defRPr sz="1500" b="1">
+                <a:solidFill>
+                  <a:srgbClr val="6657E8"/>
+                </a:solidFill>
+              </a:defRPr>
+            </a:pPr>
+            <a:r>
+              <a:rPr sz="1500" b="1">
+                <a:solidFill>
+                  <a:srgbClr val="6657E8"/>
+                </a:solidFill>
+              </a:rPr>
+              <a:t>2</a:t>
+            </a:r>
+          </a:p>
+        </p:txBody>
+      </p:sp>
+      <p:sp>
+        <p:nvSpPr>
+          <p:cNvPr id="9" name="">
+            <a:extLst xmlns:a="http://schemas.openxmlformats.org/drawingml/2006/main">
+              <a:ext uri="{FF2B5EF4-FFF2-40B4-BE49-F238E27FC236}">
+                <a16:creationId xmlns:a16="http://schemas.microsoft.com/office/drawing/2014/main" id="{DD9F9FD2-70C9-470B-81C5-2998B05105E5}"/>
+              </a:ext>
+            </a:extLst>
+          </p:cNvPr>
+          <p:cNvSpPr>
+            <a:spLocks xmlns:a="http://schemas.openxmlformats.org/drawingml/2006/main" noGrp="1"/>
+          </p:cNvSpPr>
+          <p:nvPr/>
+        </p:nvSpPr>
+        <p:spPr>
+          <a:xfrm xmlns:a="http://schemas.openxmlformats.org/drawingml/2006/main">
+            <a:off x="1485900" y="2390775"/>
+            <a:ext cx="9239250" cy="619125"/>
+          </a:xfrm>
+          <a:prstGeom xmlns:a="http://schemas.openxmlformats.org/drawingml/2006/main" prst="rect">
+            <a:avLst/>
+          </a:prstGeom>
+          <a:noFill xmlns:a="http://schemas.openxmlformats.org/drawingml/2006/main"/>
+          <a:ln xmlns:a="http://schemas.openxmlformats.org/drawingml/2006/main" w="0">
+            <a:noFill/>
+            <a:prstDash val="solid"/>
+          </a:ln>
+        </p:spPr>
+        <p:txBody>
+          <a:bodyPr xmlns:a="http://schemas.openxmlformats.org/drawingml/2006/main"/>
+          <a:lstStyle xmlns:a="http://schemas.openxmlformats.org/drawingml/2006/main"/>
+          <a:p xmlns:a="http://schemas.openxmlformats.org/drawingml/2006/main">
+            <a:pPr>
+              <a:defRPr sz="1800">
+                <a:solidFill>
+                  <a:srgbClr val="182235"/>
+                </a:solidFill>
+              </a:defRPr>
+            </a:pPr>
+            <a:r>
+              <a:rPr sz="1800">
+                <a:solidFill>
+                  <a:srgbClr val="182235"/>
+                </a:solidFill>
+              </a:rPr>
+              <a:t>제목·설명·교육 보기 버튼이 있는 올바른 HTML 문서를 만들어줘.</a:t>
+            </a:r>
+          </a:p>
+        </p:txBody>
+      </p:sp>
+      <p:sp>
+        <p:nvSpPr>
+          <p:cNvPr id="10" name="">
+            <a:extLst xmlns:a="http://schemas.openxmlformats.org/drawingml/2006/main">
+              <a:ext uri="{FF2B5EF4-FFF2-40B4-BE49-F238E27FC236}">
+                <a16:creationId xmlns:a16="http://schemas.microsoft.com/office/drawing/2014/main" id="{D283F1A3-C6AE-4D39-A1BA-3F0157519408}"/>
+              </a:ext>
+            </a:extLst>
+          </p:cNvPr>
+          <p:cNvSpPr>
+            <a:spLocks xmlns:a="http://schemas.openxmlformats.org/drawingml/2006/main" noGrp="1"/>
+          </p:cNvSpPr>
+          <p:nvPr/>
+        </p:nvSpPr>
+        <p:spPr>
+          <a:xfrm xmlns:a="http://schemas.openxmlformats.org/drawingml/2006/main">
+            <a:off x="742950" y="3324225"/>
+            <a:ext cx="514350" cy="514350"/>
+          </a:xfrm>
+          <a:prstGeom xmlns:a="http://schemas.openxmlformats.org/drawingml/2006/main" prst="roundRect">
+            <a:avLst>
+              <a:gd name="adj" fmla="val 22222"/>
+            </a:avLst>
+          </a:prstGeom>
+          <a:solidFill xmlns:a="http://schemas.openxmlformats.org/drawingml/2006/main">
+            <a:srgbClr val="EEEAFE"/>
+          </a:solidFill>
+          <a:ln xmlns:a="http://schemas.openxmlformats.org/drawingml/2006/main" w="0">
+            <a:noFill/>
+            <a:prstDash val="solid"/>
+          </a:ln>
+        </p:spPr>
+      </p:sp>
+      <p:sp>
+        <p:nvSpPr>
+          <p:cNvPr id="11" name="">
+            <a:extLst xmlns:a="http://schemas.openxmlformats.org/drawingml/2006/main">
+              <a:ext uri="{FF2B5EF4-FFF2-40B4-BE49-F238E27FC236}">
+                <a16:creationId xmlns:a16="http://schemas.microsoft.com/office/drawing/2014/main" id="{14589C6E-7E8B-4968-BC84-0E24C68380EA}"/>
+              </a:ext>
+            </a:extLst>
+          </p:cNvPr>
+          <p:cNvSpPr>
+            <a:spLocks xmlns:a="http://schemas.openxmlformats.org/drawingml/2006/main" noGrp="1"/>
+          </p:cNvSpPr>
+          <p:nvPr/>
+        </p:nvSpPr>
+        <p:spPr>
+          <a:xfrm xmlns:a="http://schemas.openxmlformats.org/drawingml/2006/main">
+            <a:off x="742950" y="3419475"/>
+            <a:ext cx="514350" cy="304800"/>
+          </a:xfrm>
+          <a:prstGeom xmlns:a="http://schemas.openxmlformats.org/drawingml/2006/main" prst="rect">
+            <a:avLst/>
+          </a:prstGeom>
+          <a:noFill xmlns:a="http://schemas.openxmlformats.org/drawingml/2006/main"/>
+          <a:ln xmlns:a="http://schemas.openxmlformats.org/drawingml/2006/main" w="0">
+            <a:noFill/>
+            <a:prstDash val="solid"/>
+          </a:ln>
+        </p:spPr>
+        <p:txBody>
+          <a:bodyPr xmlns:a="http://schemas.openxmlformats.org/drawingml/2006/main"/>
+          <a:lstStyle xmlns:a="http://schemas.openxmlformats.org/drawingml/2006/main"/>
+          <a:p xmlns:a="http://schemas.openxmlformats.org/drawingml/2006/main">
+            <a:pPr algn="ctr">
+              <a:defRPr sz="1500" b="1">
+                <a:solidFill>
+                  <a:srgbClr val="6657E8"/>
+                </a:solidFill>
+              </a:defRPr>
+            </a:pPr>
+            <a:r>
+              <a:rPr sz="1500" b="1">
+                <a:solidFill>
+                  <a:srgbClr val="6657E8"/>
+                </a:solidFill>
+              </a:rPr>
+              <a:t>3</a:t>
+            </a:r>
+          </a:p>
+        </p:txBody>
+      </p:sp>
+      <p:sp>
+        <p:nvSpPr>
+          <p:cNvPr id="12" name="">
+            <a:extLst xmlns:a="http://schemas.openxmlformats.org/drawingml/2006/main">
+              <a:ext uri="{FF2B5EF4-FFF2-40B4-BE49-F238E27FC236}">
+                <a16:creationId xmlns:a16="http://schemas.microsoft.com/office/drawing/2014/main" id="{0C3CA2B7-CA20-4343-8CA3-66026565F809}"/>
+              </a:ext>
+            </a:extLst>
+          </p:cNvPr>
+          <p:cNvSpPr>
+            <a:spLocks xmlns:a="http://schemas.openxmlformats.org/drawingml/2006/main" noGrp="1"/>
+          </p:cNvSpPr>
+          <p:nvPr/>
+        </p:nvSpPr>
+        <p:spPr>
+          <a:xfrm xmlns:a="http://schemas.openxmlformats.org/drawingml/2006/main">
+            <a:off x="1485900" y="3362325"/>
+            <a:ext cx="9239250" cy="619125"/>
+          </a:xfrm>
+          <a:prstGeom xmlns:a="http://schemas.openxmlformats.org/drawingml/2006/main" prst="rect">
+            <a:avLst/>
+          </a:prstGeom>
+          <a:noFill xmlns:a="http://schemas.openxmlformats.org/drawingml/2006/main"/>
+          <a:ln xmlns:a="http://schemas.openxmlformats.org/drawingml/2006/main" w="0">
+            <a:noFill/>
+            <a:prstDash val="solid"/>
+          </a:ln>
+        </p:spPr>
+        <p:txBody>
+          <a:bodyPr xmlns:a="http://schemas.openxmlformats.org/drawingml/2006/main"/>
+          <a:lstStyle xmlns:a="http://schemas.openxmlformats.org/drawingml/2006/main"/>
+          <a:p xmlns:a="http://schemas.openxmlformats.org/drawingml/2006/main">
+            <a:pPr>
+              <a:defRPr sz="1800">
+                <a:solidFill>
+                  <a:srgbClr val="182235"/>
+                </a:solidFill>
+              </a:defRPr>
+            </a:pPr>
+            <a:r>
+              <a:rPr sz="1800">
+                <a:solidFill>
+                  <a:srgbClr val="182235"/>
+                </a:solidFill>
+              </a:rPr>
+              <a:t>기존 문구는 유지하고 시맨틱 태그가 잘 사용됐는지 검토해줘.</a:t>
+            </a:r>
+          </a:p>
+        </p:txBody>
+      </p:sp>
+    </p:spTree>
+    <p:extLst>
+      <p:ext uri="{BB962C8B-B14F-4D97-AF65-F5344CB8AC3E}">
+        <p14:creationId xmlns:p14="http://schemas.microsoft.com/office/powerpoint/2010/main" val="128535689"/>
+      </p:ext>
+    </p:extLst>
+  </p:cSld>
+</p:sld>
+</file>
+
+<file path=ppt/slides/slide14.xml><?xml version="1.0" encoding="utf-8"?>
+<p:sld xmlns:p="http://schemas.openxmlformats.org/presentationml/2006/main">
+  <p:cSld>
+    <p:bg>
+      <p:bgPr>
+        <a:solidFill xmlns:a="http://schemas.openxmlformats.org/drawingml/2006/main">
+          <a:srgbClr val="FFFCF8"/>
+        </a:solidFill>
+      </p:bgPr>
+    </p:bg>
+    <p:spTree>
+      <p:nvGrpSpPr>
+        <p:cNvPr id="1" name=""/>
+        <p:cNvGrpSpPr/>
+        <p:nvPr/>
+      </p:nvGrpSpPr>
+      <p:grpSpPr>
+        <a:xfrm xmlns:a="http://schemas.openxmlformats.org/drawingml/2006/main"/>
+      </p:grpSpPr>
+      <p:sp>
+        <p:nvSpPr>
+          <p:cNvPr id="7" name="">
+            <a:extLst xmlns:a="http://schemas.openxmlformats.org/drawingml/2006/main">
+              <a:ext uri="{FF2B5EF4-FFF2-40B4-BE49-F238E27FC236}">
+                <a16:creationId xmlns:a16="http://schemas.microsoft.com/office/drawing/2014/main" id="{3D904C50-3AE1-464D-B2F0-0088C7755EA0}"/>
+              </a:ext>
+            </a:extLst>
+          </p:cNvPr>
+          <p:cNvSpPr>
+            <a:spLocks xmlns:a="http://schemas.openxmlformats.org/drawingml/2006/main" noGrp="1"/>
+          </p:cNvSpPr>
+          <p:nvPr/>
+        </p:nvSpPr>
+        <p:spPr>
+          <a:xfrm xmlns:a="http://schemas.openxmlformats.org/drawingml/2006/main">
+            <a:off x="0" y="0"/>
+            <a:ext cx="171450" cy="6858000"/>
+          </a:xfrm>
+          <a:prstGeom xmlns:a="http://schemas.openxmlformats.org/drawingml/2006/main" prst="rect">
+            <a:avLst/>
+          </a:prstGeom>
+          <a:solidFill xmlns:a="http://schemas.openxmlformats.org/drawingml/2006/main">
+            <a:srgbClr val="6657E8"/>
+          </a:solidFill>
+          <a:ln xmlns:a="http://schemas.openxmlformats.org/drawingml/2006/main" w="0">
+            <a:noFill/>
+            <a:prstDash val="solid"/>
+          </a:ln>
+        </p:spPr>
+      </p:sp>
+      <p:sp>
+        <p:nvSpPr>
+          <p:cNvPr id="2" name="">
+            <a:extLst xmlns:a="http://schemas.openxmlformats.org/drawingml/2006/main">
+              <a:ext uri="{FF2B5EF4-FFF2-40B4-BE49-F238E27FC236}">
+                <a16:creationId xmlns:a16="http://schemas.microsoft.com/office/drawing/2014/main" id="{C5BCF6CD-5367-43C5-B26C-35F161B55D13}"/>
+              </a:ext>
+            </a:extLst>
+          </p:cNvPr>
+          <p:cNvSpPr>
+            <a:spLocks xmlns:a="http://schemas.openxmlformats.org/drawingml/2006/main" noGrp="1"/>
+          </p:cNvSpPr>
+          <p:nvPr/>
+        </p:nvSpPr>
+        <p:spPr>
+          <a:xfrm xmlns:a="http://schemas.openxmlformats.org/drawingml/2006/main">
+            <a:off x="647700" y="457200"/>
+            <a:ext cx="10096500" cy="552450"/>
+          </a:xfrm>
+          <a:prstGeom xmlns:a="http://schemas.openxmlformats.org/drawingml/2006/main" prst="rect">
+            <a:avLst/>
+          </a:prstGeom>
+          <a:noFill xmlns:a="http://schemas.openxmlformats.org/drawingml/2006/main"/>
+          <a:ln xmlns:a="http://schemas.openxmlformats.org/drawingml/2006/main" w="0">
+            <a:noFill/>
+            <a:prstDash val="solid"/>
+          </a:ln>
+        </p:spPr>
+        <p:txBody>
+          <a:bodyPr xmlns:a="http://schemas.openxmlformats.org/drawingml/2006/main"/>
+          <a:lstStyle xmlns:a="http://schemas.openxmlformats.org/drawingml/2006/main"/>
+          <a:p xmlns:a="http://schemas.openxmlformats.org/drawingml/2006/main">
+            <a:pPr>
+              <a:defRPr sz="2700" b="1">
+                <a:solidFill>
+                  <a:srgbClr val="182235"/>
+                </a:solidFill>
+              </a:defRPr>
+            </a:pPr>
+            <a:r>
+              <a:rPr sz="2700" b="1">
+                <a:solidFill>
+                  <a:srgbClr val="182235"/>
+                </a:solidFill>
+              </a:rPr>
+              <a:t>작은 응용이 내 실력으로 바뀌는 순간입니다</a:t>
+            </a:r>
+          </a:p>
+        </p:txBody>
+      </p:sp>
+      <p:sp>
+        <p:nvSpPr>
+          <p:cNvPr id="3" name="">
+            <a:extLst xmlns:a="http://schemas.openxmlformats.org/drawingml/2006/main">
+              <a:ext uri="{FF2B5EF4-FFF2-40B4-BE49-F238E27FC236}">
+                <a16:creationId xmlns:a16="http://schemas.microsoft.com/office/drawing/2014/main" id="{5F005D65-AC71-4D5F-9863-04E85405FD5B}"/>
+              </a:ext>
+            </a:extLst>
+          </p:cNvPr>
+          <p:cNvSpPr>
+            <a:spLocks xmlns:a="http://schemas.openxmlformats.org/drawingml/2006/main" noGrp="1"/>
+          </p:cNvSpPr>
+          <p:nvPr/>
+        </p:nvSpPr>
+        <p:spPr>
+          <a:xfrm xmlns:a="http://schemas.openxmlformats.org/drawingml/2006/main">
+            <a:off x="666750" y="6419850"/>
+            <a:ext cx="10096500" cy="209550"/>
+          </a:xfrm>
+          <a:prstGeom xmlns:a="http://schemas.openxmlformats.org/drawingml/2006/main" prst="rect">
+            <a:avLst/>
+          </a:prstGeom>
+          <a:noFill xmlns:a="http://schemas.openxmlformats.org/drawingml/2006/main"/>
+          <a:ln xmlns:a="http://schemas.openxmlformats.org/drawingml/2006/main" w="0">
+            <a:noFill/>
+            <a:prstDash val="solid"/>
+          </a:ln>
+        </p:spPr>
+        <p:txBody>
+          <a:bodyPr xmlns:a="http://schemas.openxmlformats.org/drawingml/2006/main"/>
+          <a:lstStyle xmlns:a="http://schemas.openxmlformats.org/drawingml/2006/main"/>
+          <a:p xmlns:a="http://schemas.openxmlformats.org/drawingml/2006/main">
+            <a:pPr>
+              <a:defRPr sz="975">
+                <a:solidFill>
+                  <a:srgbClr val="657083"/>
+                </a:solidFill>
+              </a:defRPr>
+            </a:pPr>
+            <a:r>
+              <a:rPr sz="975">
+                <a:solidFill>
+                  <a:srgbClr val="657083"/>
+                </a:solidFill>
+              </a:rPr>
+              <a:t>EDU 웹개발 교육 플랫폼  ·  14</a:t>
+            </a:r>
+          </a:p>
+        </p:txBody>
+      </p:sp>
+      <p:sp>
+        <p:nvSpPr>
+          <p:cNvPr id="4" name="">
+            <a:extLst xmlns:a="http://schemas.openxmlformats.org/drawingml/2006/main">
+              <a:ext uri="{FF2B5EF4-FFF2-40B4-BE49-F238E27FC236}">
+                <a16:creationId xmlns:a16="http://schemas.microsoft.com/office/drawing/2014/main" id="{1940F254-F291-4317-B29E-3C52FE388056}"/>
+              </a:ext>
+            </a:extLst>
+          </p:cNvPr>
+          <p:cNvSpPr>
+            <a:spLocks xmlns:a="http://schemas.openxmlformats.org/drawingml/2006/main" noGrp="1"/>
+          </p:cNvSpPr>
+          <p:nvPr/>
+        </p:nvSpPr>
+        <p:spPr>
+          <a:xfrm xmlns:a="http://schemas.openxmlformats.org/drawingml/2006/main">
+            <a:off x="685800" y="1524000"/>
+            <a:ext cx="10820400" cy="2381250"/>
+          </a:xfrm>
+          <a:prstGeom xmlns:a="http://schemas.openxmlformats.org/drawingml/2006/main" prst="roundRect">
+            <a:avLst>
+              <a:gd name="adj" fmla="val 4800"/>
+            </a:avLst>
+          </a:prstGeom>
+          <a:solidFill xmlns:a="http://schemas.openxmlformats.org/drawingml/2006/main">
+            <a:srgbClr val="EAF8F3"/>
+          </a:solidFill>
+          <a:ln xmlns:a="http://schemas.openxmlformats.org/drawingml/2006/main" w="0">
+            <a:noFill/>
+            <a:prstDash val="solid"/>
+          </a:ln>
+        </p:spPr>
+      </p:sp>
+      <p:sp>
+        <p:nvSpPr>
+          <p:cNvPr id="5" name="">
+            <a:extLst xmlns:a="http://schemas.openxmlformats.org/drawingml/2006/main">
+              <a:ext uri="{FF2B5EF4-FFF2-40B4-BE49-F238E27FC236}">
+                <a16:creationId xmlns:a16="http://schemas.microsoft.com/office/drawing/2014/main" id="{241B86E6-2A50-4A71-8FCC-7017FE85D478}"/>
+              </a:ext>
+            </a:extLst>
+          </p:cNvPr>
+          <p:cNvSpPr>
+            <a:spLocks xmlns:a="http://schemas.openxmlformats.org/drawingml/2006/main" noGrp="1"/>
+          </p:cNvSpPr>
+          <p:nvPr/>
+        </p:nvSpPr>
+        <p:spPr>
+          <a:xfrm xmlns:a="http://schemas.openxmlformats.org/drawingml/2006/main">
+            <a:off x="1123950" y="2076450"/>
+            <a:ext cx="9944100" cy="1238250"/>
+          </a:xfrm>
+          <a:prstGeom xmlns:a="http://schemas.openxmlformats.org/drawingml/2006/main" prst="rect">
+            <a:avLst/>
+          </a:prstGeom>
+          <a:noFill xmlns:a="http://schemas.openxmlformats.org/drawingml/2006/main"/>
+          <a:ln xmlns:a="http://schemas.openxmlformats.org/drawingml/2006/main" w="0">
+            <a:noFill/>
+            <a:prstDash val="solid"/>
+          </a:ln>
+        </p:spPr>
+        <p:txBody>
+          <a:bodyPr xmlns:a="http://schemas.openxmlformats.org/drawingml/2006/main"/>
+          <a:lstStyle xmlns:a="http://schemas.openxmlformats.org/drawingml/2006/main"/>
+          <a:p xmlns:a="http://schemas.openxmlformats.org/drawingml/2006/main">
+            <a:pPr>
+              <a:defRPr sz="2175" b="1">
+                <a:solidFill>
+                  <a:srgbClr val="182235"/>
+                </a:solidFill>
+              </a:defRPr>
+            </a:pPr>
+            <a:r>
+              <a:rPr sz="2175" b="1">
+                <a:solidFill>
+                  <a:srgbClr val="182235"/>
+                </a:solidFill>
+              </a:rPr>
+              <a:t>제목을 자신의 교육 브랜드명으로 바꾸고, 설명 문단을 한 개 더 추가해 보세요.</a:t>
+            </a:r>
+          </a:p>
+        </p:txBody>
+      </p:sp>
+      <p:sp>
+        <p:nvSpPr>
+          <p:cNvPr id="6" name="">
+            <a:extLst xmlns:a="http://schemas.openxmlformats.org/drawingml/2006/main">
+              <a:ext uri="{FF2B5EF4-FFF2-40B4-BE49-F238E27FC236}">
+                <a16:creationId xmlns:a16="http://schemas.microsoft.com/office/drawing/2014/main" id="{7068677F-1860-457F-A742-11D15D6D1566}"/>
+              </a:ext>
+            </a:extLst>
+          </p:cNvPr>
+          <p:cNvSpPr>
+            <a:spLocks xmlns:a="http://schemas.openxmlformats.org/drawingml/2006/main" noGrp="1"/>
+          </p:cNvSpPr>
+          <p:nvPr/>
+        </p:nvSpPr>
+        <p:spPr>
+          <a:xfrm xmlns:a="http://schemas.openxmlformats.org/drawingml/2006/main">
+            <a:off x="1143000" y="4524375"/>
+            <a:ext cx="9525000" cy="571500"/>
+          </a:xfrm>
+          <a:prstGeom xmlns:a="http://schemas.openxmlformats.org/drawingml/2006/main" prst="rect">
+            <a:avLst/>
+          </a:prstGeom>
+          <a:noFill xmlns:a="http://schemas.openxmlformats.org/drawingml/2006/main"/>
+          <a:ln xmlns:a="http://schemas.openxmlformats.org/drawingml/2006/main" w="0">
+            <a:noFill/>
+            <a:prstDash val="solid"/>
+          </a:ln>
+        </p:spPr>
+        <p:txBody>
+          <a:bodyPr xmlns:a="http://schemas.openxmlformats.org/drawingml/2006/main"/>
+          <a:lstStyle xmlns:a="http://schemas.openxmlformats.org/drawingml/2006/main"/>
+          <a:p xmlns:a="http://schemas.openxmlformats.org/drawingml/2006/main">
+            <a:pPr>
+              <a:defRPr sz="1650">
+                <a:solidFill>
+                  <a:srgbClr val="657083"/>
+                </a:solidFill>
+              </a:defRPr>
+            </a:pPr>
+            <a:r>
+              <a:rPr sz="1650">
+                <a:solidFill>
+                  <a:srgbClr val="657083"/>
+                </a:solidFill>
+              </a:rPr>
+              <a:t>완성한 뒤 원래 결과와 무엇이 달라졌는지 한 문장으로 설명해 보세요.</a:t>
+            </a:r>
+          </a:p>
+        </p:txBody>
+      </p:sp>
+    </p:spTree>
+    <p:extLst>
+      <p:ext uri="{BB962C8B-B14F-4D97-AF65-F5344CB8AC3E}">
+        <p14:creationId xmlns:p14="http://schemas.microsoft.com/office/powerpoint/2010/main" val="402117154"/>
+      </p:ext>
+    </p:extLst>
+  </p:cSld>
+</p:sld>
+</file>
+
+<file path=ppt/slides/slide15.xml><?xml version="1.0" encoding="utf-8"?>
+<p:sld xmlns:p="http://schemas.openxmlformats.org/presentationml/2006/main">
+  <p:cSld>
+    <p:bg>
+      <p:bgPr>
+        <a:solidFill xmlns:a="http://schemas.openxmlformats.org/drawingml/2006/main">
+          <a:srgbClr val="FFFCF8"/>
+        </a:solidFill>
+      </p:bgPr>
+    </p:bg>
+    <p:spTree>
+      <p:nvGrpSpPr>
+        <p:cNvPr id="1" name=""/>
+        <p:cNvGrpSpPr/>
+        <p:nvPr/>
+      </p:nvGrpSpPr>
+      <p:grpSpPr>
+        <a:xfrm xmlns:a="http://schemas.openxmlformats.org/drawingml/2006/main"/>
+      </p:grpSpPr>
+      <p:sp>
+        <p:nvSpPr>
+          <p:cNvPr id="10" name="">
+            <a:extLst xmlns:a="http://schemas.openxmlformats.org/drawingml/2006/main">
+              <a:ext uri="{FF2B5EF4-FFF2-40B4-BE49-F238E27FC236}">
+                <a16:creationId xmlns:a16="http://schemas.microsoft.com/office/drawing/2014/main" id="{A9B8B18A-D480-4ED6-BA74-7F2ABBA85312}"/>
+              </a:ext>
+            </a:extLst>
+          </p:cNvPr>
+          <p:cNvSpPr>
+            <a:spLocks xmlns:a="http://schemas.openxmlformats.org/drawingml/2006/main" noGrp="1"/>
+          </p:cNvSpPr>
+          <p:nvPr/>
+        </p:nvSpPr>
+        <p:spPr>
+          <a:xfrm xmlns:a="http://schemas.openxmlformats.org/drawingml/2006/main">
+            <a:off x="0" y="0"/>
+            <a:ext cx="171450" cy="6858000"/>
+          </a:xfrm>
+          <a:prstGeom xmlns:a="http://schemas.openxmlformats.org/drawingml/2006/main" prst="rect">
+            <a:avLst/>
+          </a:prstGeom>
+          <a:solidFill xmlns:a="http://schemas.openxmlformats.org/drawingml/2006/main">
+            <a:srgbClr val="6657E8"/>
+          </a:solidFill>
+          <a:ln xmlns:a="http://schemas.openxmlformats.org/drawingml/2006/main" w="0">
+            <a:noFill/>
+            <a:prstDash val="solid"/>
+          </a:ln>
+        </p:spPr>
+      </p:sp>
+      <p:sp>
+        <p:nvSpPr>
+          <p:cNvPr id="2" name="">
+            <a:extLst xmlns:a="http://schemas.openxmlformats.org/drawingml/2006/main">
+              <a:ext uri="{FF2B5EF4-FFF2-40B4-BE49-F238E27FC236}">
+                <a16:creationId xmlns:a16="http://schemas.microsoft.com/office/drawing/2014/main" id="{D14CFD2E-EE7C-4E36-A04A-C9BCB2D5758C}"/>
+              </a:ext>
+            </a:extLst>
+          </p:cNvPr>
+          <p:cNvSpPr>
+            <a:spLocks xmlns:a="http://schemas.openxmlformats.org/drawingml/2006/main" noGrp="1"/>
+          </p:cNvSpPr>
+          <p:nvPr/>
+        </p:nvSpPr>
+        <p:spPr>
+          <a:xfrm xmlns:a="http://schemas.openxmlformats.org/drawingml/2006/main">
+            <a:off x="647700" y="457200"/>
+            <a:ext cx="10096500" cy="552450"/>
+          </a:xfrm>
+          <a:prstGeom xmlns:a="http://schemas.openxmlformats.org/drawingml/2006/main" prst="rect">
+            <a:avLst/>
+          </a:prstGeom>
+          <a:noFill xmlns:a="http://schemas.openxmlformats.org/drawingml/2006/main"/>
+          <a:ln xmlns:a="http://schemas.openxmlformats.org/drawingml/2006/main" w="0">
+            <a:noFill/>
+            <a:prstDash val="solid"/>
+          </a:ln>
+        </p:spPr>
+        <p:txBody>
+          <a:bodyPr xmlns:a="http://schemas.openxmlformats.org/drawingml/2006/main"/>
+          <a:lstStyle xmlns:a="http://schemas.openxmlformats.org/drawingml/2006/main"/>
+          <a:p xmlns:a="http://schemas.openxmlformats.org/drawingml/2006/main">
+            <a:pPr>
+              <a:defRPr sz="2700" b="1">
+                <a:solidFill>
+                  <a:srgbClr val="182235"/>
+                </a:solidFill>
+              </a:defRPr>
+            </a:pPr>
+            <a:r>
+              <a:rPr sz="2700" b="1">
+                <a:solidFill>
+                  <a:srgbClr val="182235"/>
+                </a:solidFill>
+              </a:rPr>
+              <a:t>다섯 문제로 오늘 배운 내용을 확인하세요</a:t>
+            </a:r>
+          </a:p>
+        </p:txBody>
+      </p:sp>
+      <p:sp>
+        <p:nvSpPr>
+          <p:cNvPr id="3" name="">
+            <a:extLst xmlns:a="http://schemas.openxmlformats.org/drawingml/2006/main">
+              <a:ext uri="{FF2B5EF4-FFF2-40B4-BE49-F238E27FC236}">
+                <a16:creationId xmlns:a16="http://schemas.microsoft.com/office/drawing/2014/main" id="{486FDDED-1E81-4B78-B0FA-2B937DD623A6}"/>
+              </a:ext>
+            </a:extLst>
+          </p:cNvPr>
+          <p:cNvSpPr>
+            <a:spLocks xmlns:a="http://schemas.openxmlformats.org/drawingml/2006/main" noGrp="1"/>
+          </p:cNvSpPr>
+          <p:nvPr/>
+        </p:nvSpPr>
+        <p:spPr>
+          <a:xfrm xmlns:a="http://schemas.openxmlformats.org/drawingml/2006/main">
+            <a:off x="666750" y="6419850"/>
+            <a:ext cx="10096500" cy="209550"/>
+          </a:xfrm>
+          <a:prstGeom xmlns:a="http://schemas.openxmlformats.org/drawingml/2006/main" prst="rect">
+            <a:avLst/>
+          </a:prstGeom>
+          <a:noFill xmlns:a="http://schemas.openxmlformats.org/drawingml/2006/main"/>
+          <a:ln xmlns:a="http://schemas.openxmlformats.org/drawingml/2006/main" w="0">
+            <a:noFill/>
+            <a:prstDash val="solid"/>
+          </a:ln>
+        </p:spPr>
+        <p:txBody>
+          <a:bodyPr xmlns:a="http://schemas.openxmlformats.org/drawingml/2006/main"/>
+          <a:lstStyle xmlns:a="http://schemas.openxmlformats.org/drawingml/2006/main"/>
+          <a:p xmlns:a="http://schemas.openxmlformats.org/drawingml/2006/main">
+            <a:pPr>
+              <a:defRPr sz="975">
+                <a:solidFill>
+                  <a:srgbClr val="657083"/>
+                </a:solidFill>
+              </a:defRPr>
+            </a:pPr>
+            <a:r>
+              <a:rPr sz="975">
+                <a:solidFill>
+                  <a:srgbClr val="657083"/>
+                </a:solidFill>
+              </a:rPr>
+              <a:t>EDU 웹개발 교육 플랫폼  ·  15</a:t>
+            </a:r>
+          </a:p>
+        </p:txBody>
+      </p:sp>
+      <p:sp>
+        <p:nvSpPr>
+          <p:cNvPr id="4" name="">
+            <a:extLst xmlns:a="http://schemas.openxmlformats.org/drawingml/2006/main">
+              <a:ext uri="{FF2B5EF4-FFF2-40B4-BE49-F238E27FC236}">
+                <a16:creationId xmlns:a16="http://schemas.microsoft.com/office/drawing/2014/main" id="{7DD14421-977E-4DCD-8767-50CFA10091EB}"/>
+              </a:ext>
+            </a:extLst>
+          </p:cNvPr>
+          <p:cNvSpPr>
+            <a:spLocks xmlns:a="http://schemas.openxmlformats.org/drawingml/2006/main" noGrp="1"/>
+          </p:cNvSpPr>
+          <p:nvPr/>
+        </p:nvSpPr>
+        <p:spPr>
+          <a:xfrm xmlns:a="http://schemas.openxmlformats.org/drawingml/2006/main">
+            <a:off x="857250" y="1285875"/>
+            <a:ext cx="10287000" cy="552450"/>
+          </a:xfrm>
+          <a:prstGeom xmlns:a="http://schemas.openxmlformats.org/drawingml/2006/main" prst="rect">
+            <a:avLst/>
+          </a:prstGeom>
+          <a:noFill xmlns:a="http://schemas.openxmlformats.org/drawingml/2006/main"/>
+          <a:ln xmlns:a="http://schemas.openxmlformats.org/drawingml/2006/main" w="0">
+            <a:noFill/>
+            <a:prstDash val="solid"/>
+          </a:ln>
+        </p:spPr>
+        <p:txBody>
+          <a:bodyPr xmlns:a="http://schemas.openxmlformats.org/drawingml/2006/main"/>
+          <a:lstStyle xmlns:a="http://schemas.openxmlformats.org/drawingml/2006/main"/>
+          <a:p xmlns:a="http://schemas.openxmlformats.org/drawingml/2006/main">
+            <a:pPr>
+              <a:defRPr sz="1650" b="0">
+                <a:solidFill>
+                  <a:srgbClr val="182235"/>
+                </a:solidFill>
+              </a:defRPr>
+            </a:pPr>
+            <a:r>
+              <a:rPr sz="1650" b="0">
+                <a:solidFill>
+                  <a:srgbClr val="182235"/>
+                </a:solidFill>
+              </a:rPr>
+              <a:t>1. HTML의 주된 역할은 무엇인가요?</a:t>
+            </a:r>
+          </a:p>
+        </p:txBody>
+      </p:sp>
+      <p:sp>
+        <p:nvSpPr>
+          <p:cNvPr id="5" name="">
+            <a:extLst xmlns:a="http://schemas.openxmlformats.org/drawingml/2006/main">
+              <a:ext uri="{FF2B5EF4-FFF2-40B4-BE49-F238E27FC236}">
+                <a16:creationId xmlns:a16="http://schemas.microsoft.com/office/drawing/2014/main" id="{4370FC3A-111A-4BF4-A077-B38404A31199}"/>
+              </a:ext>
+            </a:extLst>
+          </p:cNvPr>
+          <p:cNvSpPr>
+            <a:spLocks xmlns:a="http://schemas.openxmlformats.org/drawingml/2006/main" noGrp="1"/>
+          </p:cNvSpPr>
+          <p:nvPr/>
+        </p:nvSpPr>
+        <p:spPr>
+          <a:xfrm xmlns:a="http://schemas.openxmlformats.org/drawingml/2006/main">
+            <a:off x="857250" y="2162175"/>
+            <a:ext cx="10287000" cy="552450"/>
+          </a:xfrm>
+          <a:prstGeom xmlns:a="http://schemas.openxmlformats.org/drawingml/2006/main" prst="rect">
+            <a:avLst/>
+          </a:prstGeom>
+          <a:noFill xmlns:a="http://schemas.openxmlformats.org/drawingml/2006/main"/>
+          <a:ln xmlns:a="http://schemas.openxmlformats.org/drawingml/2006/main" w="0">
+            <a:noFill/>
+            <a:prstDash val="solid"/>
+          </a:ln>
+        </p:spPr>
+        <p:txBody>
+          <a:bodyPr xmlns:a="http://schemas.openxmlformats.org/drawingml/2006/main"/>
+          <a:lstStyle xmlns:a="http://schemas.openxmlformats.org/drawingml/2006/main"/>
+          <a:p xmlns:a="http://schemas.openxmlformats.org/drawingml/2006/main">
+            <a:pPr>
+              <a:defRPr sz="1650" b="0">
+                <a:solidFill>
+                  <a:srgbClr val="182235"/>
+                </a:solidFill>
+              </a:defRPr>
+            </a:pPr>
+            <a:r>
+              <a:rPr sz="1650" b="0">
+                <a:solidFill>
+                  <a:srgbClr val="182235"/>
+                </a:solidFill>
+              </a:rPr>
+              <a:t>2. 가장 중요한 제목 태그는 무엇인가요?</a:t>
+            </a:r>
+          </a:p>
+        </p:txBody>
+      </p:sp>
+      <p:sp>
+        <p:nvSpPr>
+          <p:cNvPr id="6" name="">
+            <a:extLst xmlns:a="http://schemas.openxmlformats.org/drawingml/2006/main">
+              <a:ext uri="{FF2B5EF4-FFF2-40B4-BE49-F238E27FC236}">
+                <a16:creationId xmlns:a16="http://schemas.microsoft.com/office/drawing/2014/main" id="{32AD0552-7999-49BA-9F4F-F51C38B9F503}"/>
+              </a:ext>
+            </a:extLst>
+          </p:cNvPr>
+          <p:cNvSpPr>
+            <a:spLocks xmlns:a="http://schemas.openxmlformats.org/drawingml/2006/main" noGrp="1"/>
+          </p:cNvSpPr>
+          <p:nvPr/>
+        </p:nvSpPr>
+        <p:spPr>
+          <a:xfrm xmlns:a="http://schemas.openxmlformats.org/drawingml/2006/main">
+            <a:off x="857250" y="3038475"/>
+            <a:ext cx="10287000" cy="552450"/>
+          </a:xfrm>
+          <a:prstGeom xmlns:a="http://schemas.openxmlformats.org/drawingml/2006/main" prst="rect">
+            <a:avLst/>
+          </a:prstGeom>
+          <a:noFill xmlns:a="http://schemas.openxmlformats.org/drawingml/2006/main"/>
+          <a:ln xmlns:a="http://schemas.openxmlformats.org/drawingml/2006/main" w="0">
+            <a:noFill/>
+            <a:prstDash val="solid"/>
+          </a:ln>
+        </p:spPr>
+        <p:txBody>
+          <a:bodyPr xmlns:a="http://schemas.openxmlformats.org/drawingml/2006/main"/>
+          <a:lstStyle xmlns:a="http://schemas.openxmlformats.org/drawingml/2006/main"/>
+          <a:p xmlns:a="http://schemas.openxmlformats.org/drawingml/2006/main">
+            <a:pPr>
+              <a:defRPr sz="1650" b="0">
+                <a:solidFill>
+                  <a:srgbClr val="182235"/>
+                </a:solidFill>
+              </a:defRPr>
+            </a:pPr>
+            <a:r>
+              <a:rPr sz="1650" b="0">
+                <a:solidFill>
+                  <a:srgbClr val="182235"/>
+                </a:solidFill>
+              </a:rPr>
+              <a:t>3. 수정 내용이 보이지 않을 때 먼저 할 일은?</a:t>
+            </a:r>
+          </a:p>
+        </p:txBody>
+      </p:sp>
+      <p:sp>
+        <p:nvSpPr>
+          <p:cNvPr id="7" name="">
+            <a:extLst xmlns:a="http://schemas.openxmlformats.org/drawingml/2006/main">
+              <a:ext uri="{FF2B5EF4-FFF2-40B4-BE49-F238E27FC236}">
+                <a16:creationId xmlns:a16="http://schemas.microsoft.com/office/drawing/2014/main" id="{7DF4A0C5-4261-4B91-83AC-D18C31034FDA}"/>
+              </a:ext>
+            </a:extLst>
+          </p:cNvPr>
+          <p:cNvSpPr>
+            <a:spLocks xmlns:a="http://schemas.openxmlformats.org/drawingml/2006/main" noGrp="1"/>
+          </p:cNvSpPr>
+          <p:nvPr/>
+        </p:nvSpPr>
+        <p:spPr>
+          <a:xfrm xmlns:a="http://schemas.openxmlformats.org/drawingml/2006/main">
+            <a:off x="857250" y="3914775"/>
+            <a:ext cx="10287000" cy="552450"/>
+          </a:xfrm>
+          <a:prstGeom xmlns:a="http://schemas.openxmlformats.org/drawingml/2006/main" prst="rect">
+            <a:avLst/>
+          </a:prstGeom>
+          <a:noFill xmlns:a="http://schemas.openxmlformats.org/drawingml/2006/main"/>
+          <a:ln xmlns:a="http://schemas.openxmlformats.org/drawingml/2006/main" w="0">
+            <a:noFill/>
+            <a:prstDash val="solid"/>
+          </a:ln>
+        </p:spPr>
+        <p:txBody>
+          <a:bodyPr xmlns:a="http://schemas.openxmlformats.org/drawingml/2006/main"/>
+          <a:lstStyle xmlns:a="http://schemas.openxmlformats.org/drawingml/2006/main"/>
+          <a:p xmlns:a="http://schemas.openxmlformats.org/drawingml/2006/main">
+            <a:pPr>
+              <a:defRPr sz="1650" b="0">
+                <a:solidFill>
+                  <a:srgbClr val="182235"/>
+                </a:solidFill>
+              </a:defRPr>
+            </a:pPr>
+            <a:r>
+              <a:rPr sz="1650" b="0">
+                <a:solidFill>
+                  <a:srgbClr val="182235"/>
+                </a:solidFill>
+              </a:rPr>
+              <a:t>4. 버튼 문구는 어느 태그 사이에 쓰나요?</a:t>
+            </a:r>
+          </a:p>
+        </p:txBody>
+      </p:sp>
+      <p:sp>
+        <p:nvSpPr>
+          <p:cNvPr id="8" name="">
+            <a:extLst xmlns:a="http://schemas.openxmlformats.org/drawingml/2006/main">
+              <a:ext uri="{FF2B5EF4-FFF2-40B4-BE49-F238E27FC236}">
+                <a16:creationId xmlns:a16="http://schemas.microsoft.com/office/drawing/2014/main" id="{525853E2-9BF8-4EA1-A4FF-5F309CBABCB1}"/>
+              </a:ext>
+            </a:extLst>
+          </p:cNvPr>
+          <p:cNvSpPr>
+            <a:spLocks xmlns:a="http://schemas.openxmlformats.org/drawingml/2006/main" noGrp="1"/>
+          </p:cNvSpPr>
+          <p:nvPr/>
+        </p:nvSpPr>
+        <p:spPr>
+          <a:xfrm xmlns:a="http://schemas.openxmlformats.org/drawingml/2006/main">
+            <a:off x="857250" y="4791075"/>
+            <a:ext cx="10287000" cy="552450"/>
+          </a:xfrm>
+          <a:prstGeom xmlns:a="http://schemas.openxmlformats.org/drawingml/2006/main" prst="rect">
+            <a:avLst/>
+          </a:prstGeom>
+          <a:noFill xmlns:a="http://schemas.openxmlformats.org/drawingml/2006/main"/>
+          <a:ln xmlns:a="http://schemas.openxmlformats.org/drawingml/2006/main" w="0">
+            <a:noFill/>
+            <a:prstDash val="solid"/>
+          </a:ln>
+        </p:spPr>
+        <p:txBody>
+          <a:bodyPr xmlns:a="http://schemas.openxmlformats.org/drawingml/2006/main"/>
+          <a:lstStyle xmlns:a="http://schemas.openxmlformats.org/drawingml/2006/main"/>
+          <a:p xmlns:a="http://schemas.openxmlformats.org/drawingml/2006/main">
+            <a:pPr>
+              <a:defRPr sz="1650" b="1">
+                <a:solidFill>
+                  <a:srgbClr val="182235"/>
+                </a:solidFill>
+              </a:defRPr>
+            </a:pPr>
+            <a:r>
+              <a:rPr sz="1650" b="1">
+                <a:solidFill>
+                  <a:srgbClr val="182235"/>
+                </a:solidFill>
+              </a:rPr>
+              <a:t>5. 완료 기준은 무엇인가요?</a:t>
+            </a:r>
+          </a:p>
+        </p:txBody>
+      </p:sp>
+      <p:sp>
+        <p:nvSpPr>
+          <p:cNvPr id="9" name="">
+            <a:extLst xmlns:a="http://schemas.openxmlformats.org/drawingml/2006/main">
+              <a:ext uri="{FF2B5EF4-FFF2-40B4-BE49-F238E27FC236}">
+                <a16:creationId xmlns:a16="http://schemas.microsoft.com/office/drawing/2014/main" id="{18C532D1-DC2E-4A0E-ABFD-C70690648E49}"/>
+              </a:ext>
+            </a:extLst>
+          </p:cNvPr>
+          <p:cNvSpPr>
+            <a:spLocks xmlns:a="http://schemas.openxmlformats.org/drawingml/2006/main" noGrp="1"/>
+          </p:cNvSpPr>
+          <p:nvPr/>
+        </p:nvSpPr>
+        <p:spPr>
+          <a:xfrm xmlns:a="http://schemas.openxmlformats.org/drawingml/2006/main">
+            <a:off x="857250" y="5857875"/>
+            <a:ext cx="10001250" cy="304800"/>
+          </a:xfrm>
+          <a:prstGeom xmlns:a="http://schemas.openxmlformats.org/drawingml/2006/main" prst="rect">
+            <a:avLst/>
+          </a:prstGeom>
+          <a:noFill xmlns:a="http://schemas.openxmlformats.org/drawingml/2006/main"/>
+          <a:ln xmlns:a="http://schemas.openxmlformats.org/drawingml/2006/main" w="0">
+            <a:noFill/>
+            <a:prstDash val="solid"/>
+          </a:ln>
+        </p:spPr>
+        <p:txBody>
+          <a:bodyPr xmlns:a="http://schemas.openxmlformats.org/drawingml/2006/main"/>
+          <a:lstStyle xmlns:a="http://schemas.openxmlformats.org/drawingml/2006/main"/>
+          <a:p xmlns:a="http://schemas.openxmlformats.org/drawingml/2006/main">
+            <a:pPr>
+              <a:defRPr sz="1350" b="1">
+                <a:solidFill>
+                  <a:srgbClr val="6657E8"/>
+                </a:solidFill>
+              </a:defRPr>
+            </a:pPr>
+            <a:r>
+              <a:rPr sz="1350" b="1">
+                <a:solidFill>
+                  <a:srgbClr val="6657E8"/>
+                </a:solidFill>
+              </a:rPr>
+              <a:t>정답과 해설은 EDU 홈페이지 상세 자료에서 확인할 수 있습니다.</a:t>
+            </a:r>
+          </a:p>
+        </p:txBody>
+      </p:sp>
+    </p:spTree>
+    <p:extLst>
+      <p:ext uri="{BB962C8B-B14F-4D97-AF65-F5344CB8AC3E}">
+        <p14:creationId xmlns:p14="http://schemas.microsoft.com/office/powerpoint/2010/main" val="784968572"/>
       </p:ext>
     </p:extLst>
   </p:cSld>
@@ -1896,7 +5255,7 @@
           <p:cNvPr id="12" name="">
             <a:extLst xmlns:a="http://schemas.openxmlformats.org/drawingml/2006/main">
               <a:ext uri="{FF2B5EF4-FFF2-40B4-BE49-F238E27FC236}">
-                <a16:creationId xmlns:a16="http://schemas.microsoft.com/office/drawing/2014/main" id="{F18B243C-FB11-4B29-AC0E-3B7CA52300DE}"/>
+                <a16:creationId xmlns:a16="http://schemas.microsoft.com/office/drawing/2014/main" id="{C33EB74C-6D4E-4D9C-86B6-D002AA3E6FEE}"/>
               </a:ext>
             </a:extLst>
           </p:cNvPr>
@@ -1927,7 +5286,7 @@
           <p:cNvPr id="2" name="">
             <a:extLst xmlns:a="http://schemas.openxmlformats.org/drawingml/2006/main">
               <a:ext uri="{FF2B5EF4-FFF2-40B4-BE49-F238E27FC236}">
-                <a16:creationId xmlns:a16="http://schemas.microsoft.com/office/drawing/2014/main" id="{8CADD320-B2A8-4D5A-9FA2-5921C9CD3E9D}"/>
+                <a16:creationId xmlns:a16="http://schemas.microsoft.com/office/drawing/2014/main" id="{88B75F77-90FD-45D8-A486-2E0E91D1F07D}"/>
               </a:ext>
             </a:extLst>
           </p:cNvPr>
@@ -1977,7 +5336,7 @@
           <p:cNvPr id="3" name="">
             <a:extLst xmlns:a="http://schemas.openxmlformats.org/drawingml/2006/main">
               <a:ext uri="{FF2B5EF4-FFF2-40B4-BE49-F238E27FC236}">
-                <a16:creationId xmlns:a16="http://schemas.microsoft.com/office/drawing/2014/main" id="{1B88FEA1-F39E-45FE-A63F-4B4DDEC6D305}"/>
+                <a16:creationId xmlns:a16="http://schemas.microsoft.com/office/drawing/2014/main" id="{9F6B34EE-B9A6-454F-B57C-E7CEBE89A7BC}"/>
               </a:ext>
             </a:extLst>
           </p:cNvPr>
@@ -2027,7 +5386,7 @@
           <p:cNvPr id="4" name="">
             <a:extLst xmlns:a="http://schemas.openxmlformats.org/drawingml/2006/main">
               <a:ext uri="{FF2B5EF4-FFF2-40B4-BE49-F238E27FC236}">
-                <a16:creationId xmlns:a16="http://schemas.microsoft.com/office/drawing/2014/main" id="{D1469F1D-08E8-475D-B91A-BD99F97CFCD1}"/>
+                <a16:creationId xmlns:a16="http://schemas.microsoft.com/office/drawing/2014/main" id="{89CD1510-9312-441C-A8CE-75C9DA8D7EEB}"/>
               </a:ext>
             </a:extLst>
           </p:cNvPr>
@@ -2060,7 +5419,7 @@
           <p:cNvPr id="5" name="">
             <a:extLst xmlns:a="http://schemas.openxmlformats.org/drawingml/2006/main">
               <a:ext uri="{FF2B5EF4-FFF2-40B4-BE49-F238E27FC236}">
-                <a16:creationId xmlns:a16="http://schemas.microsoft.com/office/drawing/2014/main" id="{5484E030-562C-412E-A0FA-CD9E26EB6964}"/>
+                <a16:creationId xmlns:a16="http://schemas.microsoft.com/office/drawing/2014/main" id="{51182A71-B3CB-408C-8EC5-9424F769228A}"/>
               </a:ext>
             </a:extLst>
           </p:cNvPr>
@@ -2110,7 +5469,7 @@
           <p:cNvPr id="6" name="">
             <a:extLst xmlns:a="http://schemas.openxmlformats.org/drawingml/2006/main">
               <a:ext uri="{FF2B5EF4-FFF2-40B4-BE49-F238E27FC236}">
-                <a16:creationId xmlns:a16="http://schemas.microsoft.com/office/drawing/2014/main" id="{6DD1BC65-1304-4614-86CB-D0B619677873}"/>
+                <a16:creationId xmlns:a16="http://schemas.microsoft.com/office/drawing/2014/main" id="{C439DC6C-AD71-4FA4-A0A4-36001785AC33}"/>
               </a:ext>
             </a:extLst>
           </p:cNvPr>
@@ -2160,7 +5519,7 @@
           <p:cNvPr id="7" name="">
             <a:extLst xmlns:a="http://schemas.openxmlformats.org/drawingml/2006/main">
               <a:ext uri="{FF2B5EF4-FFF2-40B4-BE49-F238E27FC236}">
-                <a16:creationId xmlns:a16="http://schemas.microsoft.com/office/drawing/2014/main" id="{DD630FA2-26AE-4110-A7EE-AE1D37A7F355}"/>
+                <a16:creationId xmlns:a16="http://schemas.microsoft.com/office/drawing/2014/main" id="{441051F8-A61F-42C2-AB2E-ACF455784492}"/>
               </a:ext>
             </a:extLst>
           </p:cNvPr>
@@ -2193,7 +5552,7 @@
           <p:cNvPr id="8" name="">
             <a:extLst xmlns:a="http://schemas.openxmlformats.org/drawingml/2006/main">
               <a:ext uri="{FF2B5EF4-FFF2-40B4-BE49-F238E27FC236}">
-                <a16:creationId xmlns:a16="http://schemas.microsoft.com/office/drawing/2014/main" id="{00E2A200-B603-445D-A504-58A66B6AEAE1}"/>
+                <a16:creationId xmlns:a16="http://schemas.microsoft.com/office/drawing/2014/main" id="{F4936035-FBBD-431D-9806-79121BF89595}"/>
               </a:ext>
             </a:extLst>
           </p:cNvPr>
@@ -2243,7 +5602,7 @@
           <p:cNvPr id="9" name="">
             <a:extLst xmlns:a="http://schemas.openxmlformats.org/drawingml/2006/main">
               <a:ext uri="{FF2B5EF4-FFF2-40B4-BE49-F238E27FC236}">
-                <a16:creationId xmlns:a16="http://schemas.microsoft.com/office/drawing/2014/main" id="{644E5E23-F392-4E61-9939-5793F9C2D935}"/>
+                <a16:creationId xmlns:a16="http://schemas.microsoft.com/office/drawing/2014/main" id="{A10F83DC-DC37-49BD-8CC9-9AB3D91363B5}"/>
               </a:ext>
             </a:extLst>
           </p:cNvPr>
@@ -2293,7 +5652,7 @@
           <p:cNvPr id="10" name="">
             <a:extLst xmlns:a="http://schemas.openxmlformats.org/drawingml/2006/main">
               <a:ext uri="{FF2B5EF4-FFF2-40B4-BE49-F238E27FC236}">
-                <a16:creationId xmlns:a16="http://schemas.microsoft.com/office/drawing/2014/main" id="{6F6D1124-B590-4FBB-8993-F26E635DD3C1}"/>
+                <a16:creationId xmlns:a16="http://schemas.microsoft.com/office/drawing/2014/main" id="{F101F19E-2BD6-4B06-937E-9F21025FBF15}"/>
               </a:ext>
             </a:extLst>
           </p:cNvPr>
@@ -2326,7 +5685,7 @@
           <p:cNvPr id="11" name="">
             <a:extLst xmlns:a="http://schemas.openxmlformats.org/drawingml/2006/main">
               <a:ext uri="{FF2B5EF4-FFF2-40B4-BE49-F238E27FC236}">
-                <a16:creationId xmlns:a16="http://schemas.microsoft.com/office/drawing/2014/main" id="{2F38EC10-8F98-4858-BABE-72B32C555B01}"/>
+                <a16:creationId xmlns:a16="http://schemas.microsoft.com/office/drawing/2014/main" id="{C70BEF68-8817-4C07-BAC6-4926F9E7F5A6}"/>
               </a:ext>
             </a:extLst>
           </p:cNvPr>
@@ -2391,7 +5750,7 @@
     </p:spTree>
     <p:extLst>
       <p:ext uri="{BB962C8B-B14F-4D97-AF65-F5344CB8AC3E}">
-        <p14:creationId xmlns:p14="http://schemas.microsoft.com/office/powerpoint/2010/main" val="783517513"/>
+        <p14:creationId xmlns:p14="http://schemas.microsoft.com/office/powerpoint/2010/main" val="819903189"/>
       </p:ext>
     </p:extLst>
   </p:cSld>
@@ -2422,7 +5781,7 @@
           <p:cNvPr id="8" name="">
             <a:extLst xmlns:a="http://schemas.openxmlformats.org/drawingml/2006/main">
               <a:ext uri="{FF2B5EF4-FFF2-40B4-BE49-F238E27FC236}">
-                <a16:creationId xmlns:a16="http://schemas.microsoft.com/office/drawing/2014/main" id="{EE5CC5C0-9632-460E-BBE2-7A8ADF2E0050}"/>
+                <a16:creationId xmlns:a16="http://schemas.microsoft.com/office/drawing/2014/main" id="{049714D9-9501-4E6E-81EB-DE9AACC26EB7}"/>
               </a:ext>
             </a:extLst>
           </p:cNvPr>
@@ -2453,7 +5812,7 @@
           <p:cNvPr id="2" name="">
             <a:extLst xmlns:a="http://schemas.openxmlformats.org/drawingml/2006/main">
               <a:ext uri="{FF2B5EF4-FFF2-40B4-BE49-F238E27FC236}">
-                <a16:creationId xmlns:a16="http://schemas.microsoft.com/office/drawing/2014/main" id="{34E08874-98AB-4785-BF77-04AA7F44E64D}"/>
+                <a16:creationId xmlns:a16="http://schemas.microsoft.com/office/drawing/2014/main" id="{36CEE42E-21AD-4625-B998-540D7B91ADF5}"/>
               </a:ext>
             </a:extLst>
           </p:cNvPr>
@@ -2503,7 +5862,7 @@
           <p:cNvPr id="3" name="">
             <a:extLst xmlns:a="http://schemas.openxmlformats.org/drawingml/2006/main">
               <a:ext uri="{FF2B5EF4-FFF2-40B4-BE49-F238E27FC236}">
-                <a16:creationId xmlns:a16="http://schemas.microsoft.com/office/drawing/2014/main" id="{30D22145-64D1-46EC-BC66-C06A07622865}"/>
+                <a16:creationId xmlns:a16="http://schemas.microsoft.com/office/drawing/2014/main" id="{50CABDED-9097-4A9E-AA43-119C92F43B8C}"/>
               </a:ext>
             </a:extLst>
           </p:cNvPr>
@@ -2553,7 +5912,7 @@
           <p:cNvPr id="4" name="">
             <a:extLst xmlns:a="http://schemas.openxmlformats.org/drawingml/2006/main">
               <a:ext uri="{FF2B5EF4-FFF2-40B4-BE49-F238E27FC236}">
-                <a16:creationId xmlns:a16="http://schemas.microsoft.com/office/drawing/2014/main" id="{1DFB69A6-A58C-4008-A357-06872F759CCD}"/>
+                <a16:creationId xmlns:a16="http://schemas.microsoft.com/office/drawing/2014/main" id="{6A181768-92BF-4ABD-B17A-78D949C961C2}"/>
               </a:ext>
             </a:extLst>
           </p:cNvPr>
@@ -2586,7 +5945,7 @@
           <p:cNvPr id="5" name="">
             <a:extLst xmlns:a="http://schemas.openxmlformats.org/drawingml/2006/main">
               <a:ext uri="{FF2B5EF4-FFF2-40B4-BE49-F238E27FC236}">
-                <a16:creationId xmlns:a16="http://schemas.microsoft.com/office/drawing/2014/main" id="{F251853A-1480-49A7-8ECA-7C30C09D6710}"/>
+                <a16:creationId xmlns:a16="http://schemas.microsoft.com/office/drawing/2014/main" id="{989E85B8-7661-4B85-8221-31716C670E23}"/>
               </a:ext>
             </a:extLst>
           </p:cNvPr>
@@ -2636,7 +5995,7 @@
           <p:cNvPr id="6" name="">
             <a:extLst xmlns:a="http://schemas.openxmlformats.org/drawingml/2006/main">
               <a:ext uri="{FF2B5EF4-FFF2-40B4-BE49-F238E27FC236}">
-                <a16:creationId xmlns:a16="http://schemas.microsoft.com/office/drawing/2014/main" id="{6980D32C-84EC-4188-B66E-CEB4AFBCC3B3}"/>
+                <a16:creationId xmlns:a16="http://schemas.microsoft.com/office/drawing/2014/main" id="{1AE7BAFA-431D-456F-BC47-3FA256A696EC}"/>
               </a:ext>
             </a:extLst>
           </p:cNvPr>
@@ -2686,7 +6045,7 @@
           <p:cNvPr id="7" name="">
             <a:extLst xmlns:a="http://schemas.openxmlformats.org/drawingml/2006/main">
               <a:ext uri="{FF2B5EF4-FFF2-40B4-BE49-F238E27FC236}">
-                <a16:creationId xmlns:a16="http://schemas.microsoft.com/office/drawing/2014/main" id="{0C419752-4E3E-4815-8D4A-A39E1985233A}"/>
+                <a16:creationId xmlns:a16="http://schemas.microsoft.com/office/drawing/2014/main" id="{F975F995-5398-44FD-AE18-6A97808B6FF4}"/>
               </a:ext>
             </a:extLst>
           </p:cNvPr>
@@ -2734,7 +6093,7 @@
     </p:spTree>
     <p:extLst>
       <p:ext uri="{BB962C8B-B14F-4D97-AF65-F5344CB8AC3E}">
-        <p14:creationId xmlns:p14="http://schemas.microsoft.com/office/powerpoint/2010/main" val="548032246"/>
+        <p14:creationId xmlns:p14="http://schemas.microsoft.com/office/powerpoint/2010/main" val="1711711978"/>
       </p:ext>
     </p:extLst>
   </p:cSld>
@@ -2765,7 +6124,7 @@
           <p:cNvPr id="16" name="">
             <a:extLst xmlns:a="http://schemas.openxmlformats.org/drawingml/2006/main">
               <a:ext uri="{FF2B5EF4-FFF2-40B4-BE49-F238E27FC236}">
-                <a16:creationId xmlns:a16="http://schemas.microsoft.com/office/drawing/2014/main" id="{7B6B273E-5045-4E8A-87D7-B42B1258D684}"/>
+                <a16:creationId xmlns:a16="http://schemas.microsoft.com/office/drawing/2014/main" id="{30FF184C-AEDD-4C8A-BB0E-5714C10C00A4}"/>
               </a:ext>
             </a:extLst>
           </p:cNvPr>
@@ -2796,7 +6155,7 @@
           <p:cNvPr id="2" name="">
             <a:extLst xmlns:a="http://schemas.openxmlformats.org/drawingml/2006/main">
               <a:ext uri="{FF2B5EF4-FFF2-40B4-BE49-F238E27FC236}">
-                <a16:creationId xmlns:a16="http://schemas.microsoft.com/office/drawing/2014/main" id="{E8284454-D83B-4FDA-8968-13D6676DE3E3}"/>
+                <a16:creationId xmlns:a16="http://schemas.microsoft.com/office/drawing/2014/main" id="{26283FC1-AEA0-47EA-9B88-CB2C9722ED5A}"/>
               </a:ext>
             </a:extLst>
           </p:cNvPr>
@@ -2846,7 +6205,7 @@
           <p:cNvPr id="3" name="">
             <a:extLst xmlns:a="http://schemas.openxmlformats.org/drawingml/2006/main">
               <a:ext uri="{FF2B5EF4-FFF2-40B4-BE49-F238E27FC236}">
-                <a16:creationId xmlns:a16="http://schemas.microsoft.com/office/drawing/2014/main" id="{87302F3A-2087-49DD-9F05-AA8D432CD1D9}"/>
+                <a16:creationId xmlns:a16="http://schemas.microsoft.com/office/drawing/2014/main" id="{10527B35-6D87-475A-B600-B4D3B350E764}"/>
               </a:ext>
             </a:extLst>
           </p:cNvPr>
@@ -2896,7 +6255,7 @@
           <p:cNvPr id="4" name="">
             <a:extLst xmlns:a="http://schemas.openxmlformats.org/drawingml/2006/main">
               <a:ext uri="{FF2B5EF4-FFF2-40B4-BE49-F238E27FC236}">
-                <a16:creationId xmlns:a16="http://schemas.microsoft.com/office/drawing/2014/main" id="{6DDC29F8-D36E-46DD-8516-40B8B52B1BDC}"/>
+                <a16:creationId xmlns:a16="http://schemas.microsoft.com/office/drawing/2014/main" id="{D09FB174-65B6-4A94-A256-D4A4AFE9A70C}"/>
               </a:ext>
             </a:extLst>
           </p:cNvPr>
@@ -2929,7 +6288,7 @@
           <p:cNvPr id="5" name="">
             <a:extLst xmlns:a="http://schemas.openxmlformats.org/drawingml/2006/main">
               <a:ext uri="{FF2B5EF4-FFF2-40B4-BE49-F238E27FC236}">
-                <a16:creationId xmlns:a16="http://schemas.microsoft.com/office/drawing/2014/main" id="{28CC1F37-C5B0-425B-9C4B-910723C6E66F}"/>
+                <a16:creationId xmlns:a16="http://schemas.microsoft.com/office/drawing/2014/main" id="{5BA9CD29-9144-4796-8266-CA837D9FE718}"/>
               </a:ext>
             </a:extLst>
           </p:cNvPr>
@@ -2979,7 +6338,7 @@
           <p:cNvPr id="6" name="">
             <a:extLst xmlns:a="http://schemas.openxmlformats.org/drawingml/2006/main">
               <a:ext uri="{FF2B5EF4-FFF2-40B4-BE49-F238E27FC236}">
-                <a16:creationId xmlns:a16="http://schemas.microsoft.com/office/drawing/2014/main" id="{015AC6DF-D542-4956-9612-2B6BA1F90E86}"/>
+                <a16:creationId xmlns:a16="http://schemas.microsoft.com/office/drawing/2014/main" id="{55E25120-23D0-4757-9250-125BEECA1E21}"/>
               </a:ext>
             </a:extLst>
           </p:cNvPr>
@@ -3029,7 +6388,7 @@
           <p:cNvPr id="7" name="">
             <a:extLst xmlns:a="http://schemas.openxmlformats.org/drawingml/2006/main">
               <a:ext uri="{FF2B5EF4-FFF2-40B4-BE49-F238E27FC236}">
-                <a16:creationId xmlns:a16="http://schemas.microsoft.com/office/drawing/2014/main" id="{C4502F87-50BB-4775-9181-C82D8BFE203B}"/>
+                <a16:creationId xmlns:a16="http://schemas.microsoft.com/office/drawing/2014/main" id="{A37EA326-749F-4722-863E-FD7CF31BEBA6}"/>
               </a:ext>
             </a:extLst>
           </p:cNvPr>
@@ -3062,7 +6421,7 @@
           <p:cNvPr id="8" name="">
             <a:extLst xmlns:a="http://schemas.openxmlformats.org/drawingml/2006/main">
               <a:ext uri="{FF2B5EF4-FFF2-40B4-BE49-F238E27FC236}">
-                <a16:creationId xmlns:a16="http://schemas.microsoft.com/office/drawing/2014/main" id="{C4023381-DC68-4189-AEC0-106083654E41}"/>
+                <a16:creationId xmlns:a16="http://schemas.microsoft.com/office/drawing/2014/main" id="{58B8019A-03D0-4509-A071-61070F7E359E}"/>
               </a:ext>
             </a:extLst>
           </p:cNvPr>
@@ -3112,7 +6471,7 @@
           <p:cNvPr id="9" name="">
             <a:extLst xmlns:a="http://schemas.openxmlformats.org/drawingml/2006/main">
               <a:ext uri="{FF2B5EF4-FFF2-40B4-BE49-F238E27FC236}">
-                <a16:creationId xmlns:a16="http://schemas.microsoft.com/office/drawing/2014/main" id="{BEAF83BB-177C-4DD5-842B-F7C669137220}"/>
+                <a16:creationId xmlns:a16="http://schemas.microsoft.com/office/drawing/2014/main" id="{FA61A5B6-35A8-4C13-A223-DC7BA47642F3}"/>
               </a:ext>
             </a:extLst>
           </p:cNvPr>
@@ -3162,7 +6521,7 @@
           <p:cNvPr id="10" name="">
             <a:extLst xmlns:a="http://schemas.openxmlformats.org/drawingml/2006/main">
               <a:ext uri="{FF2B5EF4-FFF2-40B4-BE49-F238E27FC236}">
-                <a16:creationId xmlns:a16="http://schemas.microsoft.com/office/drawing/2014/main" id="{9922BA8A-FE9B-4B75-AFD0-3E96A8EFEFE1}"/>
+                <a16:creationId xmlns:a16="http://schemas.microsoft.com/office/drawing/2014/main" id="{CD60F587-D9EF-48D8-A166-9BE43C3033B9}"/>
               </a:ext>
             </a:extLst>
           </p:cNvPr>
@@ -3195,7 +6554,7 @@
           <p:cNvPr id="11" name="">
             <a:extLst xmlns:a="http://schemas.openxmlformats.org/drawingml/2006/main">
               <a:ext uri="{FF2B5EF4-FFF2-40B4-BE49-F238E27FC236}">
-                <a16:creationId xmlns:a16="http://schemas.microsoft.com/office/drawing/2014/main" id="{CB04B582-57FC-4067-B3D5-825D21BD7CC0}"/>
+                <a16:creationId xmlns:a16="http://schemas.microsoft.com/office/drawing/2014/main" id="{A61D27F1-606A-472F-A44D-D104AE7450DC}"/>
               </a:ext>
             </a:extLst>
           </p:cNvPr>
@@ -3245,7 +6604,7 @@
           <p:cNvPr id="12" name="">
             <a:extLst xmlns:a="http://schemas.openxmlformats.org/drawingml/2006/main">
               <a:ext uri="{FF2B5EF4-FFF2-40B4-BE49-F238E27FC236}">
-                <a16:creationId xmlns:a16="http://schemas.microsoft.com/office/drawing/2014/main" id="{A41B4020-0877-4CE5-B185-C26B21C942C1}"/>
+                <a16:creationId xmlns:a16="http://schemas.microsoft.com/office/drawing/2014/main" id="{BFFE17CB-6B35-4783-97E1-3D97C14ED659}"/>
               </a:ext>
             </a:extLst>
           </p:cNvPr>
@@ -3295,7 +6654,7 @@
           <p:cNvPr id="13" name="">
             <a:extLst xmlns:a="http://schemas.openxmlformats.org/drawingml/2006/main">
               <a:ext uri="{FF2B5EF4-FFF2-40B4-BE49-F238E27FC236}">
-                <a16:creationId xmlns:a16="http://schemas.microsoft.com/office/drawing/2014/main" id="{966821F1-B0B9-40F4-891C-986087BB8DBA}"/>
+                <a16:creationId xmlns:a16="http://schemas.microsoft.com/office/drawing/2014/main" id="{42095063-1183-4A9F-B821-ED29A0139C26}"/>
               </a:ext>
             </a:extLst>
           </p:cNvPr>
@@ -3328,7 +6687,7 @@
           <p:cNvPr id="14" name="">
             <a:extLst xmlns:a="http://schemas.openxmlformats.org/drawingml/2006/main">
               <a:ext uri="{FF2B5EF4-FFF2-40B4-BE49-F238E27FC236}">
-                <a16:creationId xmlns:a16="http://schemas.microsoft.com/office/drawing/2014/main" id="{4C0EFF69-CF71-49C2-87D2-8D667ED95E03}"/>
+                <a16:creationId xmlns:a16="http://schemas.microsoft.com/office/drawing/2014/main" id="{71AB8A30-4362-4B84-98A5-C0B3397368EB}"/>
               </a:ext>
             </a:extLst>
           </p:cNvPr>
@@ -3378,7 +6737,7 @@
           <p:cNvPr id="15" name="">
             <a:extLst xmlns:a="http://schemas.openxmlformats.org/drawingml/2006/main">
               <a:ext uri="{FF2B5EF4-FFF2-40B4-BE49-F238E27FC236}">
-                <a16:creationId xmlns:a16="http://schemas.microsoft.com/office/drawing/2014/main" id="{B862DB44-3D6C-4ACA-AFF3-7689C984C599}"/>
+                <a16:creationId xmlns:a16="http://schemas.microsoft.com/office/drawing/2014/main" id="{73363EF2-E3C6-418D-B70C-7EEF032F6648}"/>
               </a:ext>
             </a:extLst>
           </p:cNvPr>
@@ -3426,7 +6785,7 @@
     </p:spTree>
     <p:extLst>
       <p:ext uri="{BB962C8B-B14F-4D97-AF65-F5344CB8AC3E}">
-        <p14:creationId xmlns:p14="http://schemas.microsoft.com/office/powerpoint/2010/main" val="572368983"/>
+        <p14:creationId xmlns:p14="http://schemas.microsoft.com/office/powerpoint/2010/main" val="1225651519"/>
       </p:ext>
     </p:extLst>
   </p:cSld>
@@ -3457,7 +6816,7 @@
           <p:cNvPr id="8" name="">
             <a:extLst xmlns:a="http://schemas.openxmlformats.org/drawingml/2006/main">
               <a:ext uri="{FF2B5EF4-FFF2-40B4-BE49-F238E27FC236}">
-                <a16:creationId xmlns:a16="http://schemas.microsoft.com/office/drawing/2014/main" id="{E570DB18-0517-4F3D-AB6E-8CBABEF55077}"/>
+                <a16:creationId xmlns:a16="http://schemas.microsoft.com/office/drawing/2014/main" id="{FF65DFDF-7739-4766-9E11-3EC320FC830F}"/>
               </a:ext>
             </a:extLst>
           </p:cNvPr>
@@ -3488,7 +6847,7 @@
           <p:cNvPr id="2" name="">
             <a:extLst xmlns:a="http://schemas.openxmlformats.org/drawingml/2006/main">
               <a:ext uri="{FF2B5EF4-FFF2-40B4-BE49-F238E27FC236}">
-                <a16:creationId xmlns:a16="http://schemas.microsoft.com/office/drawing/2014/main" id="{EFF563D0-4EB3-439E-B004-B154E5FE00F9}"/>
+                <a16:creationId xmlns:a16="http://schemas.microsoft.com/office/drawing/2014/main" id="{1B1C3F13-CA66-48C6-B118-262278B35338}"/>
               </a:ext>
             </a:extLst>
           </p:cNvPr>
@@ -3538,7 +6897,7 @@
           <p:cNvPr id="3" name="">
             <a:extLst xmlns:a="http://schemas.openxmlformats.org/drawingml/2006/main">
               <a:ext uri="{FF2B5EF4-FFF2-40B4-BE49-F238E27FC236}">
-                <a16:creationId xmlns:a16="http://schemas.microsoft.com/office/drawing/2014/main" id="{C9AE3DB3-2BE8-4D00-8D0E-227A0164D4F4}"/>
+                <a16:creationId xmlns:a16="http://schemas.microsoft.com/office/drawing/2014/main" id="{05742274-F9B7-4CFF-998A-FCDC2ABFCCFD}"/>
               </a:ext>
             </a:extLst>
           </p:cNvPr>
@@ -3588,7 +6947,7 @@
           <p:cNvPr id="4" name="">
             <a:extLst xmlns:a="http://schemas.openxmlformats.org/drawingml/2006/main">
               <a:ext uri="{FF2B5EF4-FFF2-40B4-BE49-F238E27FC236}">
-                <a16:creationId xmlns:a16="http://schemas.microsoft.com/office/drawing/2014/main" id="{8419315C-48A9-4092-8363-B19F858CB909}"/>
+                <a16:creationId xmlns:a16="http://schemas.microsoft.com/office/drawing/2014/main" id="{EC44F2CB-067D-4463-9F23-77D84374E31E}"/>
               </a:ext>
             </a:extLst>
           </p:cNvPr>
@@ -3623,7 +6982,7 @@
           <p:cNvPr id="5" name="">
             <a:extLst xmlns:a="http://schemas.openxmlformats.org/drawingml/2006/main">
               <a:ext uri="{FF2B5EF4-FFF2-40B4-BE49-F238E27FC236}">
-                <a16:creationId xmlns:a16="http://schemas.microsoft.com/office/drawing/2014/main" id="{689E0A4A-16B0-40A2-BB36-E9471FE1FEAB}"/>
+                <a16:creationId xmlns:a16="http://schemas.microsoft.com/office/drawing/2014/main" id="{2F704992-57AE-47CC-84E8-40438692AEC7}"/>
               </a:ext>
             </a:extLst>
           </p:cNvPr>
@@ -3673,7 +7032,7 @@
           <p:cNvPr id="6" name="">
             <a:extLst xmlns:a="http://schemas.openxmlformats.org/drawingml/2006/main">
               <a:ext uri="{FF2B5EF4-FFF2-40B4-BE49-F238E27FC236}">
-                <a16:creationId xmlns:a16="http://schemas.microsoft.com/office/drawing/2014/main" id="{E4486B44-089E-4AF2-A12A-64B089CFF97E}"/>
+                <a16:creationId xmlns:a16="http://schemas.microsoft.com/office/drawing/2014/main" id="{23AB6666-CE3B-48F3-9674-3ADB6CADE4B1}"/>
               </a:ext>
             </a:extLst>
           </p:cNvPr>
@@ -3757,7 +7116,7 @@
           <p:cNvPr id="7" name="">
             <a:extLst xmlns:a="http://schemas.openxmlformats.org/drawingml/2006/main">
               <a:ext uri="{FF2B5EF4-FFF2-40B4-BE49-F238E27FC236}">
-                <a16:creationId xmlns:a16="http://schemas.microsoft.com/office/drawing/2014/main" id="{42BB70DE-A7BF-4A31-B1B1-E383FC044860}"/>
+                <a16:creationId xmlns:a16="http://schemas.microsoft.com/office/drawing/2014/main" id="{DA43AE5A-43A6-4964-9FA7-0B6A771822F3}"/>
               </a:ext>
             </a:extLst>
           </p:cNvPr>
@@ -3805,7 +7164,7 @@
     </p:spTree>
     <p:extLst>
       <p:ext uri="{BB962C8B-B14F-4D97-AF65-F5344CB8AC3E}">
-        <p14:creationId xmlns:p14="http://schemas.microsoft.com/office/powerpoint/2010/main" val="1732563403"/>
+        <p14:creationId xmlns:p14="http://schemas.microsoft.com/office/powerpoint/2010/main" val="314618491"/>
       </p:ext>
     </p:extLst>
   </p:cSld>
@@ -3836,7 +7195,7 @@
           <p:cNvPr id="18" name="">
             <a:extLst xmlns:a="http://schemas.openxmlformats.org/drawingml/2006/main">
               <a:ext uri="{FF2B5EF4-FFF2-40B4-BE49-F238E27FC236}">
-                <a16:creationId xmlns:a16="http://schemas.microsoft.com/office/drawing/2014/main" id="{4DE16565-D12C-4A67-8A59-30466C313ACA}"/>
+                <a16:creationId xmlns:a16="http://schemas.microsoft.com/office/drawing/2014/main" id="{1816E238-0502-4F58-824D-A1607DA3354C}"/>
               </a:ext>
             </a:extLst>
           </p:cNvPr>
@@ -3867,7 +7226,7 @@
           <p:cNvPr id="2" name="">
             <a:extLst xmlns:a="http://schemas.openxmlformats.org/drawingml/2006/main">
               <a:ext uri="{FF2B5EF4-FFF2-40B4-BE49-F238E27FC236}">
-                <a16:creationId xmlns:a16="http://schemas.microsoft.com/office/drawing/2014/main" id="{99A71189-D7B1-4FCB-9700-7BE7FC6F3A9A}"/>
+                <a16:creationId xmlns:a16="http://schemas.microsoft.com/office/drawing/2014/main" id="{B12B188B-7317-4691-AA64-DBEACE21AE34}"/>
               </a:ext>
             </a:extLst>
           </p:cNvPr>
@@ -3917,7 +7276,7 @@
           <p:cNvPr id="3" name="">
             <a:extLst xmlns:a="http://schemas.openxmlformats.org/drawingml/2006/main">
               <a:ext uri="{FF2B5EF4-FFF2-40B4-BE49-F238E27FC236}">
-                <a16:creationId xmlns:a16="http://schemas.microsoft.com/office/drawing/2014/main" id="{290378C8-D93E-4E1A-9CD7-48AD4039AADB}"/>
+                <a16:creationId xmlns:a16="http://schemas.microsoft.com/office/drawing/2014/main" id="{3F5E4771-C633-4D34-B6EF-93571AB2F4EF}"/>
               </a:ext>
             </a:extLst>
           </p:cNvPr>
@@ -3967,7 +7326,7 @@
           <p:cNvPr id="4" name="">
             <a:extLst xmlns:a="http://schemas.openxmlformats.org/drawingml/2006/main">
               <a:ext uri="{FF2B5EF4-FFF2-40B4-BE49-F238E27FC236}">
-                <a16:creationId xmlns:a16="http://schemas.microsoft.com/office/drawing/2014/main" id="{474172CC-2F96-476E-A8EC-231D27758FFD}"/>
+                <a16:creationId xmlns:a16="http://schemas.microsoft.com/office/drawing/2014/main" id="{5160D27C-3FF1-43BD-9DBA-38233E77DEE2}"/>
               </a:ext>
             </a:extLst>
           </p:cNvPr>
@@ -4000,7 +7359,7 @@
           <p:cNvPr id="5" name="">
             <a:extLst xmlns:a="http://schemas.openxmlformats.org/drawingml/2006/main">
               <a:ext uri="{FF2B5EF4-FFF2-40B4-BE49-F238E27FC236}">
-                <a16:creationId xmlns:a16="http://schemas.microsoft.com/office/drawing/2014/main" id="{103B8D8D-4C89-4991-953A-2ACD5E62F8DB}"/>
+                <a16:creationId xmlns:a16="http://schemas.microsoft.com/office/drawing/2014/main" id="{B57AA4CC-ACB8-42E9-AEBA-9E2F0B0A6A8A}"/>
               </a:ext>
             </a:extLst>
           </p:cNvPr>
@@ -4050,7 +7409,7 @@
           <p:cNvPr id="6" name="">
             <a:extLst xmlns:a="http://schemas.openxmlformats.org/drawingml/2006/main">
               <a:ext uri="{FF2B5EF4-FFF2-40B4-BE49-F238E27FC236}">
-                <a16:creationId xmlns:a16="http://schemas.microsoft.com/office/drawing/2014/main" id="{763D7866-909D-4631-8361-38883BA01361}"/>
+                <a16:creationId xmlns:a16="http://schemas.microsoft.com/office/drawing/2014/main" id="{7A068B54-DED6-41B5-AAC4-73AB8EA75B18}"/>
               </a:ext>
             </a:extLst>
           </p:cNvPr>
@@ -4100,7 +7459,7 @@
           <p:cNvPr id="7" name="">
             <a:extLst xmlns:a="http://schemas.openxmlformats.org/drawingml/2006/main">
               <a:ext uri="{FF2B5EF4-FFF2-40B4-BE49-F238E27FC236}">
-                <a16:creationId xmlns:a16="http://schemas.microsoft.com/office/drawing/2014/main" id="{FE09C64C-362E-4DDD-9519-2A1C73640AC5}"/>
+                <a16:creationId xmlns:a16="http://schemas.microsoft.com/office/drawing/2014/main" id="{00B28ACD-32D9-4D3E-BDE8-DE654542CD74}"/>
               </a:ext>
             </a:extLst>
           </p:cNvPr>
@@ -4133,7 +7492,7 @@
           <p:cNvPr id="8" name="">
             <a:extLst xmlns:a="http://schemas.openxmlformats.org/drawingml/2006/main">
               <a:ext uri="{FF2B5EF4-FFF2-40B4-BE49-F238E27FC236}">
-                <a16:creationId xmlns:a16="http://schemas.microsoft.com/office/drawing/2014/main" id="{EEEE440F-9C26-4DE8-88A6-5D188C000F61}"/>
+                <a16:creationId xmlns:a16="http://schemas.microsoft.com/office/drawing/2014/main" id="{7286583F-DF21-4006-99BD-36763362BAD1}"/>
               </a:ext>
             </a:extLst>
           </p:cNvPr>
@@ -4183,7 +7542,7 @@
           <p:cNvPr id="9" name="">
             <a:extLst xmlns:a="http://schemas.openxmlformats.org/drawingml/2006/main">
               <a:ext uri="{FF2B5EF4-FFF2-40B4-BE49-F238E27FC236}">
-                <a16:creationId xmlns:a16="http://schemas.microsoft.com/office/drawing/2014/main" id="{4233E366-6C67-43E1-A3FD-31C7F89BADB9}"/>
+                <a16:creationId xmlns:a16="http://schemas.microsoft.com/office/drawing/2014/main" id="{2D44FA5D-7706-4BF0-B355-6BF2687E6433}"/>
               </a:ext>
             </a:extLst>
           </p:cNvPr>
@@ -4233,7 +7592,7 @@
           <p:cNvPr id="10" name="">
             <a:extLst xmlns:a="http://schemas.openxmlformats.org/drawingml/2006/main">
               <a:ext uri="{FF2B5EF4-FFF2-40B4-BE49-F238E27FC236}">
-                <a16:creationId xmlns:a16="http://schemas.microsoft.com/office/drawing/2014/main" id="{5B56EA12-E9DB-43DB-B3FE-59E975707408}"/>
+                <a16:creationId xmlns:a16="http://schemas.microsoft.com/office/drawing/2014/main" id="{00661EEF-F3E4-4BAA-A24D-B7DF22B8DB78}"/>
               </a:ext>
             </a:extLst>
           </p:cNvPr>
@@ -4266,7 +7625,7 @@
           <p:cNvPr id="11" name="">
             <a:extLst xmlns:a="http://schemas.openxmlformats.org/drawingml/2006/main">
               <a:ext uri="{FF2B5EF4-FFF2-40B4-BE49-F238E27FC236}">
-                <a16:creationId xmlns:a16="http://schemas.microsoft.com/office/drawing/2014/main" id="{E26FCE50-3347-4804-B356-953B1A87382A}"/>
+                <a16:creationId xmlns:a16="http://schemas.microsoft.com/office/drawing/2014/main" id="{F49DA17D-92F9-4033-A8DC-D76F55DC5FE4}"/>
               </a:ext>
             </a:extLst>
           </p:cNvPr>
@@ -4316,7 +7675,7 @@
           <p:cNvPr id="12" name="">
             <a:extLst xmlns:a="http://schemas.openxmlformats.org/drawingml/2006/main">
               <a:ext uri="{FF2B5EF4-FFF2-40B4-BE49-F238E27FC236}">
-                <a16:creationId xmlns:a16="http://schemas.microsoft.com/office/drawing/2014/main" id="{A16A5891-D306-47D7-A427-06BB783FB056}"/>
+                <a16:creationId xmlns:a16="http://schemas.microsoft.com/office/drawing/2014/main" id="{134CBBF3-8BB6-40B0-AE73-9DDEB99F0C42}"/>
               </a:ext>
             </a:extLst>
           </p:cNvPr>
@@ -4366,7 +7725,7 @@
           <p:cNvPr id="13" name="">
             <a:extLst xmlns:a="http://schemas.openxmlformats.org/drawingml/2006/main">
               <a:ext uri="{FF2B5EF4-FFF2-40B4-BE49-F238E27FC236}">
-                <a16:creationId xmlns:a16="http://schemas.microsoft.com/office/drawing/2014/main" id="{3024157A-C142-47B0-B1E2-2B117270CEE2}"/>
+                <a16:creationId xmlns:a16="http://schemas.microsoft.com/office/drawing/2014/main" id="{A18F9F56-60EE-436B-9F9A-DE190F6AAFD4}"/>
               </a:ext>
             </a:extLst>
           </p:cNvPr>
@@ -4399,7 +7758,7 @@
           <p:cNvPr id="14" name="">
             <a:extLst xmlns:a="http://schemas.openxmlformats.org/drawingml/2006/main">
               <a:ext uri="{FF2B5EF4-FFF2-40B4-BE49-F238E27FC236}">
-                <a16:creationId xmlns:a16="http://schemas.microsoft.com/office/drawing/2014/main" id="{B709710C-C305-4390-8D38-78E4851F947F}"/>
+                <a16:creationId xmlns:a16="http://schemas.microsoft.com/office/drawing/2014/main" id="{A674C3C5-391B-4270-9E3F-C1951F4C512D}"/>
               </a:ext>
             </a:extLst>
           </p:cNvPr>
@@ -4449,7 +7808,7 @@
           <p:cNvPr id="15" name="">
             <a:extLst xmlns:a="http://schemas.openxmlformats.org/drawingml/2006/main">
               <a:ext uri="{FF2B5EF4-FFF2-40B4-BE49-F238E27FC236}">
-                <a16:creationId xmlns:a16="http://schemas.microsoft.com/office/drawing/2014/main" id="{44C52BDE-406B-4432-84B3-20B0F92F7436}"/>
+                <a16:creationId xmlns:a16="http://schemas.microsoft.com/office/drawing/2014/main" id="{3C94BB70-BB66-4EC2-8D0F-BF95B0AADA6F}"/>
               </a:ext>
             </a:extLst>
           </p:cNvPr>
@@ -4499,7 +7858,7 @@
           <p:cNvPr id="16" name="">
             <a:extLst xmlns:a="http://schemas.openxmlformats.org/drawingml/2006/main">
               <a:ext uri="{FF2B5EF4-FFF2-40B4-BE49-F238E27FC236}">
-                <a16:creationId xmlns:a16="http://schemas.microsoft.com/office/drawing/2014/main" id="{F49932FA-65D7-4AFA-A7C7-06434EC417C6}"/>
+                <a16:creationId xmlns:a16="http://schemas.microsoft.com/office/drawing/2014/main" id="{7CCF7497-6003-4D00-9C0E-F1A5AEC74F16}"/>
               </a:ext>
             </a:extLst>
           </p:cNvPr>
@@ -4532,7 +7891,7 @@
           <p:cNvPr id="17" name="">
             <a:extLst xmlns:a="http://schemas.openxmlformats.org/drawingml/2006/main">
               <a:ext uri="{FF2B5EF4-FFF2-40B4-BE49-F238E27FC236}">
-                <a16:creationId xmlns:a16="http://schemas.microsoft.com/office/drawing/2014/main" id="{D42C2FBB-2FD8-441E-AD68-5B5D02307A72}"/>
+                <a16:creationId xmlns:a16="http://schemas.microsoft.com/office/drawing/2014/main" id="{DAC32E8E-14F8-47C9-83F3-CEA27B267910}"/>
               </a:ext>
             </a:extLst>
           </p:cNvPr>
@@ -4580,7 +7939,7 @@
     </p:spTree>
     <p:extLst>
       <p:ext uri="{BB962C8B-B14F-4D97-AF65-F5344CB8AC3E}">
-        <p14:creationId xmlns:p14="http://schemas.microsoft.com/office/powerpoint/2010/main" val="1920669805"/>
+        <p14:creationId xmlns:p14="http://schemas.microsoft.com/office/powerpoint/2010/main" val="1337073960"/>
       </p:ext>
     </p:extLst>
   </p:cSld>
@@ -4611,7 +7970,7 @@
           <p:cNvPr id="8" name="">
             <a:extLst xmlns:a="http://schemas.openxmlformats.org/drawingml/2006/main">
               <a:ext uri="{FF2B5EF4-FFF2-40B4-BE49-F238E27FC236}">
-                <a16:creationId xmlns:a16="http://schemas.microsoft.com/office/drawing/2014/main" id="{D5445E7F-2100-415B-A42C-5A131649476E}"/>
+                <a16:creationId xmlns:a16="http://schemas.microsoft.com/office/drawing/2014/main" id="{B551FC07-DE9A-40B6-A612-1BC2896B77B3}"/>
               </a:ext>
             </a:extLst>
           </p:cNvPr>
@@ -4642,7 +8001,7 @@
           <p:cNvPr id="2" name="">
             <a:extLst xmlns:a="http://schemas.openxmlformats.org/drawingml/2006/main">
               <a:ext uri="{FF2B5EF4-FFF2-40B4-BE49-F238E27FC236}">
-                <a16:creationId xmlns:a16="http://schemas.microsoft.com/office/drawing/2014/main" id="{6003370F-5A11-40A3-B384-D5A2EDFCA711}"/>
+                <a16:creationId xmlns:a16="http://schemas.microsoft.com/office/drawing/2014/main" id="{82DCD091-109F-4216-B7FB-918D34044BE6}"/>
               </a:ext>
             </a:extLst>
           </p:cNvPr>
@@ -4692,7 +8051,7 @@
           <p:cNvPr id="3" name="">
             <a:extLst xmlns:a="http://schemas.openxmlformats.org/drawingml/2006/main">
               <a:ext uri="{FF2B5EF4-FFF2-40B4-BE49-F238E27FC236}">
-                <a16:creationId xmlns:a16="http://schemas.microsoft.com/office/drawing/2014/main" id="{FAE3313A-4869-44C6-8849-4E6C44355ACC}"/>
+                <a16:creationId xmlns:a16="http://schemas.microsoft.com/office/drawing/2014/main" id="{F2B2EF29-97F8-4C8D-BBAB-E748771B5E06}"/>
               </a:ext>
             </a:extLst>
           </p:cNvPr>
@@ -4742,7 +8101,7 @@
           <p:cNvPr id="4" name="">
             <a:extLst xmlns:a="http://schemas.openxmlformats.org/drawingml/2006/main">
               <a:ext uri="{FF2B5EF4-FFF2-40B4-BE49-F238E27FC236}">
-                <a16:creationId xmlns:a16="http://schemas.microsoft.com/office/drawing/2014/main" id="{426D1E80-3913-49CE-9E6D-8FF5A3DFE0F0}"/>
+                <a16:creationId xmlns:a16="http://schemas.microsoft.com/office/drawing/2014/main" id="{A9F0D186-5EDD-430F-856A-C400F28C51F6}"/>
               </a:ext>
             </a:extLst>
           </p:cNvPr>
@@ -4775,7 +8134,7 @@
           <p:cNvPr id="5" name="">
             <a:extLst xmlns:a="http://schemas.openxmlformats.org/drawingml/2006/main">
               <a:ext uri="{FF2B5EF4-FFF2-40B4-BE49-F238E27FC236}">
-                <a16:creationId xmlns:a16="http://schemas.microsoft.com/office/drawing/2014/main" id="{478FB903-DE5B-43B6-B2E6-7B9E1D368C31}"/>
+                <a16:creationId xmlns:a16="http://schemas.microsoft.com/office/drawing/2014/main" id="{992077BB-439A-4F07-A8DD-8CA59416AD23}"/>
               </a:ext>
             </a:extLst>
           </p:cNvPr>
@@ -4825,7 +8184,7 @@
           <p:cNvPr id="6" name="">
             <a:extLst xmlns:a="http://schemas.openxmlformats.org/drawingml/2006/main">
               <a:ext uri="{FF2B5EF4-FFF2-40B4-BE49-F238E27FC236}">
-                <a16:creationId xmlns:a16="http://schemas.microsoft.com/office/drawing/2014/main" id="{4C47C74B-BA5C-44BF-B9A4-53384E123D35}"/>
+                <a16:creationId xmlns:a16="http://schemas.microsoft.com/office/drawing/2014/main" id="{4D52CA00-4FE0-4852-B14F-AC86823EB166}"/>
               </a:ext>
             </a:extLst>
           </p:cNvPr>
@@ -4875,7 +8234,7 @@
           <p:cNvPr id="7" name="">
             <a:extLst xmlns:a="http://schemas.openxmlformats.org/drawingml/2006/main">
               <a:ext uri="{FF2B5EF4-FFF2-40B4-BE49-F238E27FC236}">
-                <a16:creationId xmlns:a16="http://schemas.microsoft.com/office/drawing/2014/main" id="{817CA0B3-B5D4-4073-A642-E337CC064104}"/>
+                <a16:creationId xmlns:a16="http://schemas.microsoft.com/office/drawing/2014/main" id="{046EDE41-F2B6-4888-8467-D9C541D21DDA}"/>
               </a:ext>
             </a:extLst>
           </p:cNvPr>
@@ -4923,7 +8282,7 @@
     </p:spTree>
     <p:extLst>
       <p:ext uri="{BB962C8B-B14F-4D97-AF65-F5344CB8AC3E}">
-        <p14:creationId xmlns:p14="http://schemas.microsoft.com/office/powerpoint/2010/main" val="1684503777"/>
+        <p14:creationId xmlns:p14="http://schemas.microsoft.com/office/powerpoint/2010/main" val="1400584731"/>
       </p:ext>
     </p:extLst>
   </p:cSld>
@@ -4954,7 +8313,7 @@
           <p:cNvPr id="14" name="">
             <a:extLst xmlns:a="http://schemas.openxmlformats.org/drawingml/2006/main">
               <a:ext uri="{FF2B5EF4-FFF2-40B4-BE49-F238E27FC236}">
-                <a16:creationId xmlns:a16="http://schemas.microsoft.com/office/drawing/2014/main" id="{FDEC260D-15C0-469B-99F3-25E4CAD69320}"/>
+                <a16:creationId xmlns:a16="http://schemas.microsoft.com/office/drawing/2014/main" id="{A12335F6-0CE3-442E-A04D-73C355F3E0C0}"/>
               </a:ext>
             </a:extLst>
           </p:cNvPr>
@@ -4985,7 +8344,7 @@
           <p:cNvPr id="2" name="">
             <a:extLst xmlns:a="http://schemas.openxmlformats.org/drawingml/2006/main">
               <a:ext uri="{FF2B5EF4-FFF2-40B4-BE49-F238E27FC236}">
-                <a16:creationId xmlns:a16="http://schemas.microsoft.com/office/drawing/2014/main" id="{8D24898A-B5C5-41BA-A85C-2047505DEA3D}"/>
+                <a16:creationId xmlns:a16="http://schemas.microsoft.com/office/drawing/2014/main" id="{DA512253-D809-446B-8149-454041D44FD5}"/>
               </a:ext>
             </a:extLst>
           </p:cNvPr>
@@ -5035,7 +8394,7 @@
           <p:cNvPr id="3" name="">
             <a:extLst xmlns:a="http://schemas.openxmlformats.org/drawingml/2006/main">
               <a:ext uri="{FF2B5EF4-FFF2-40B4-BE49-F238E27FC236}">
-                <a16:creationId xmlns:a16="http://schemas.microsoft.com/office/drawing/2014/main" id="{0E868548-8B3C-4041-8BB4-E749BBAB092A}"/>
+                <a16:creationId xmlns:a16="http://schemas.microsoft.com/office/drawing/2014/main" id="{FE8EB2DC-2655-4428-9AE4-7ABA5E785CF3}"/>
               </a:ext>
             </a:extLst>
           </p:cNvPr>
@@ -5085,7 +8444,7 @@
           <p:cNvPr id="4" name="">
             <a:extLst xmlns:a="http://schemas.openxmlformats.org/drawingml/2006/main">
               <a:ext uri="{FF2B5EF4-FFF2-40B4-BE49-F238E27FC236}">
-                <a16:creationId xmlns:a16="http://schemas.microsoft.com/office/drawing/2014/main" id="{5ED8CCC8-6236-4002-9E28-45BD165AF226}"/>
+                <a16:creationId xmlns:a16="http://schemas.microsoft.com/office/drawing/2014/main" id="{D8ADE3A2-B6DE-43F0-8D3B-09E3DEB17A76}"/>
               </a:ext>
             </a:extLst>
           </p:cNvPr>
@@ -5118,7 +8477,7 @@
           <p:cNvPr id="5" name="">
             <a:extLst xmlns:a="http://schemas.openxmlformats.org/drawingml/2006/main">
               <a:ext uri="{FF2B5EF4-FFF2-40B4-BE49-F238E27FC236}">
-                <a16:creationId xmlns:a16="http://schemas.microsoft.com/office/drawing/2014/main" id="{3F1B18C1-DB60-4125-ABD8-87854F39B6DF}"/>
+                <a16:creationId xmlns:a16="http://schemas.microsoft.com/office/drawing/2014/main" id="{B2E350CC-909D-4DD0-94C4-98FD9D13B6C5}"/>
               </a:ext>
             </a:extLst>
           </p:cNvPr>
@@ -5168,7 +8527,7 @@
           <p:cNvPr id="6" name="">
             <a:extLst xmlns:a="http://schemas.openxmlformats.org/drawingml/2006/main">
               <a:ext uri="{FF2B5EF4-FFF2-40B4-BE49-F238E27FC236}">
-                <a16:creationId xmlns:a16="http://schemas.microsoft.com/office/drawing/2014/main" id="{C631E05F-A06D-475A-BDEB-C548ED59470B}"/>
+                <a16:creationId xmlns:a16="http://schemas.microsoft.com/office/drawing/2014/main" id="{585D0A4B-A74C-4343-9BB0-FE7C48CA6E42}"/>
               </a:ext>
             </a:extLst>
           </p:cNvPr>
@@ -5218,7 +8577,7 @@
           <p:cNvPr id="7" name="">
             <a:extLst xmlns:a="http://schemas.openxmlformats.org/drawingml/2006/main">
               <a:ext uri="{FF2B5EF4-FFF2-40B4-BE49-F238E27FC236}">
-                <a16:creationId xmlns:a16="http://schemas.microsoft.com/office/drawing/2014/main" id="{DB667509-EDD9-42B7-BFC1-B7124B7C37C6}"/>
+                <a16:creationId xmlns:a16="http://schemas.microsoft.com/office/drawing/2014/main" id="{5045237E-D766-4E29-9906-B2F5ABE66E8E}"/>
               </a:ext>
             </a:extLst>
           </p:cNvPr>
@@ -5251,7 +8610,7 @@
           <p:cNvPr id="8" name="">
             <a:extLst xmlns:a="http://schemas.openxmlformats.org/drawingml/2006/main">
               <a:ext uri="{FF2B5EF4-FFF2-40B4-BE49-F238E27FC236}">
-                <a16:creationId xmlns:a16="http://schemas.microsoft.com/office/drawing/2014/main" id="{40F4CDC6-1594-473B-88EA-AB7775D9E542}"/>
+                <a16:creationId xmlns:a16="http://schemas.microsoft.com/office/drawing/2014/main" id="{7F2FCBB0-22A3-48BF-908B-130618BBDFB8}"/>
               </a:ext>
             </a:extLst>
           </p:cNvPr>
@@ -5301,7 +8660,7 @@
           <p:cNvPr id="9" name="">
             <a:extLst xmlns:a="http://schemas.openxmlformats.org/drawingml/2006/main">
               <a:ext uri="{FF2B5EF4-FFF2-40B4-BE49-F238E27FC236}">
-                <a16:creationId xmlns:a16="http://schemas.microsoft.com/office/drawing/2014/main" id="{655B67D9-7B00-463B-A77D-7A65AB132A9B}"/>
+                <a16:creationId xmlns:a16="http://schemas.microsoft.com/office/drawing/2014/main" id="{35AE896D-9305-4A7E-A796-490D422941DC}"/>
               </a:ext>
             </a:extLst>
           </p:cNvPr>
@@ -5351,7 +8710,7 @@
           <p:cNvPr id="10" name="">
             <a:extLst xmlns:a="http://schemas.openxmlformats.org/drawingml/2006/main">
               <a:ext uri="{FF2B5EF4-FFF2-40B4-BE49-F238E27FC236}">
-                <a16:creationId xmlns:a16="http://schemas.microsoft.com/office/drawing/2014/main" id="{66A168B9-08FF-49E0-928A-C12AD0C783C1}"/>
+                <a16:creationId xmlns:a16="http://schemas.microsoft.com/office/drawing/2014/main" id="{17BB0E97-9D33-4081-9E90-E5F9412896DD}"/>
               </a:ext>
             </a:extLst>
           </p:cNvPr>
@@ -5384,7 +8743,7 @@
           <p:cNvPr id="11" name="">
             <a:extLst xmlns:a="http://schemas.openxmlformats.org/drawingml/2006/main">
               <a:ext uri="{FF2B5EF4-FFF2-40B4-BE49-F238E27FC236}">
-                <a16:creationId xmlns:a16="http://schemas.microsoft.com/office/drawing/2014/main" id="{DF6FCF68-22E6-41CA-AB91-A0B15C3FE6F0}"/>
+                <a16:creationId xmlns:a16="http://schemas.microsoft.com/office/drawing/2014/main" id="{7E7DA819-C305-4C8B-BD78-D2DE6677854A}"/>
               </a:ext>
             </a:extLst>
           </p:cNvPr>
@@ -5434,7 +8793,7 @@
           <p:cNvPr id="12" name="">
             <a:extLst xmlns:a="http://schemas.openxmlformats.org/drawingml/2006/main">
               <a:ext uri="{FF2B5EF4-FFF2-40B4-BE49-F238E27FC236}">
-                <a16:creationId xmlns:a16="http://schemas.microsoft.com/office/drawing/2014/main" id="{E3AD2694-B47C-4EFF-9C9D-E365F6C1E7AC}"/>
+                <a16:creationId xmlns:a16="http://schemas.microsoft.com/office/drawing/2014/main" id="{A02F3643-2390-4D87-B88B-7F8D30462B64}"/>
               </a:ext>
             </a:extLst>
           </p:cNvPr>
@@ -5484,7 +8843,7 @@
           <p:cNvPr id="13" name="">
             <a:extLst xmlns:a="http://schemas.openxmlformats.org/drawingml/2006/main">
               <a:ext uri="{FF2B5EF4-FFF2-40B4-BE49-F238E27FC236}">
-                <a16:creationId xmlns:a16="http://schemas.microsoft.com/office/drawing/2014/main" id="{10A5DA87-0F17-4C4D-AB99-26F0228C99B7}"/>
+                <a16:creationId xmlns:a16="http://schemas.microsoft.com/office/drawing/2014/main" id="{81246494-BED9-4F30-8411-C93C44B5DFB4}"/>
               </a:ext>
             </a:extLst>
           </p:cNvPr>
@@ -5532,7 +8891,350 @@
     </p:spTree>
     <p:extLst>
       <p:ext uri="{BB962C8B-B14F-4D97-AF65-F5344CB8AC3E}">
-        <p14:creationId xmlns:p14="http://schemas.microsoft.com/office/powerpoint/2010/main" val="687528573"/>
+        <p14:creationId xmlns:p14="http://schemas.microsoft.com/office/powerpoint/2010/main" val="1038978881"/>
+      </p:ext>
+    </p:extLst>
+  </p:cSld>
+</p:sld>
+</file>
+
+<file path=ppt/slides/slide9.xml><?xml version="1.0" encoding="utf-8"?>
+<p:sld xmlns:p="http://schemas.openxmlformats.org/presentationml/2006/main">
+  <p:cSld>
+    <p:bg>
+      <p:bgPr>
+        <a:solidFill xmlns:a="http://schemas.openxmlformats.org/drawingml/2006/main">
+          <a:srgbClr val="FFFCF8"/>
+        </a:solidFill>
+      </p:bgPr>
+    </p:bg>
+    <p:spTree>
+      <p:nvGrpSpPr>
+        <p:cNvPr id="1" name=""/>
+        <p:cNvGrpSpPr/>
+        <p:nvPr/>
+      </p:nvGrpSpPr>
+      <p:grpSpPr>
+        <a:xfrm xmlns:a="http://schemas.openxmlformats.org/drawingml/2006/main"/>
+      </p:grpSpPr>
+      <p:sp>
+        <p:nvSpPr>
+          <p:cNvPr id="8" name="">
+            <a:extLst xmlns:a="http://schemas.openxmlformats.org/drawingml/2006/main">
+              <a:ext uri="{FF2B5EF4-FFF2-40B4-BE49-F238E27FC236}">
+                <a16:creationId xmlns:a16="http://schemas.microsoft.com/office/drawing/2014/main" id="{0438FB62-970E-4A5F-9349-71D0C2871680}"/>
+              </a:ext>
+            </a:extLst>
+          </p:cNvPr>
+          <p:cNvSpPr>
+            <a:spLocks xmlns:a="http://schemas.openxmlformats.org/drawingml/2006/main" noGrp="1"/>
+          </p:cNvSpPr>
+          <p:nvPr/>
+        </p:nvSpPr>
+        <p:spPr>
+          <a:xfrm xmlns:a="http://schemas.openxmlformats.org/drawingml/2006/main">
+            <a:off x="0" y="0"/>
+            <a:ext cx="171450" cy="6858000"/>
+          </a:xfrm>
+          <a:prstGeom xmlns:a="http://schemas.openxmlformats.org/drawingml/2006/main" prst="rect">
+            <a:avLst/>
+          </a:prstGeom>
+          <a:solidFill xmlns:a="http://schemas.openxmlformats.org/drawingml/2006/main">
+            <a:srgbClr val="6657E8"/>
+          </a:solidFill>
+          <a:ln xmlns:a="http://schemas.openxmlformats.org/drawingml/2006/main" w="0">
+            <a:noFill/>
+            <a:prstDash val="solid"/>
+          </a:ln>
+        </p:spPr>
+      </p:sp>
+      <p:sp>
+        <p:nvSpPr>
+          <p:cNvPr id="2" name="">
+            <a:extLst xmlns:a="http://schemas.openxmlformats.org/drawingml/2006/main">
+              <a:ext uri="{FF2B5EF4-FFF2-40B4-BE49-F238E27FC236}">
+                <a16:creationId xmlns:a16="http://schemas.microsoft.com/office/drawing/2014/main" id="{6775FFA4-E77B-47E3-A571-CA4CA15DB923}"/>
+              </a:ext>
+            </a:extLst>
+          </p:cNvPr>
+          <p:cNvSpPr>
+            <a:spLocks xmlns:a="http://schemas.openxmlformats.org/drawingml/2006/main" noGrp="1"/>
+          </p:cNvSpPr>
+          <p:nvPr/>
+        </p:nvSpPr>
+        <p:spPr>
+          <a:xfrm xmlns:a="http://schemas.openxmlformats.org/drawingml/2006/main">
+            <a:off x="647700" y="457200"/>
+            <a:ext cx="10096500" cy="552450"/>
+          </a:xfrm>
+          <a:prstGeom xmlns:a="http://schemas.openxmlformats.org/drawingml/2006/main" prst="rect">
+            <a:avLst/>
+          </a:prstGeom>
+          <a:noFill xmlns:a="http://schemas.openxmlformats.org/drawingml/2006/main"/>
+          <a:ln xmlns:a="http://schemas.openxmlformats.org/drawingml/2006/main" w="0">
+            <a:noFill/>
+            <a:prstDash val="solid"/>
+          </a:ln>
+        </p:spPr>
+        <p:txBody>
+          <a:bodyPr xmlns:a="http://schemas.openxmlformats.org/drawingml/2006/main"/>
+          <a:lstStyle xmlns:a="http://schemas.openxmlformats.org/drawingml/2006/main"/>
+          <a:p xmlns:a="http://schemas.openxmlformats.org/drawingml/2006/main">
+            <a:pPr>
+              <a:defRPr sz="2700" b="1">
+                <a:solidFill>
+                  <a:srgbClr val="182235"/>
+                </a:solidFill>
+              </a:defRPr>
+            </a:pPr>
+            <a:r>
+              <a:rPr sz="2700" b="1">
+                <a:solidFill>
+                  <a:srgbClr val="182235"/>
+                </a:solidFill>
+              </a:rPr>
+              <a:t>왜 배우는지 알면 실습 방향이 보입니다</a:t>
+            </a:r>
+          </a:p>
+        </p:txBody>
+      </p:sp>
+      <p:sp>
+        <p:nvSpPr>
+          <p:cNvPr id="3" name="">
+            <a:extLst xmlns:a="http://schemas.openxmlformats.org/drawingml/2006/main">
+              <a:ext uri="{FF2B5EF4-FFF2-40B4-BE49-F238E27FC236}">
+                <a16:creationId xmlns:a16="http://schemas.microsoft.com/office/drawing/2014/main" id="{1370C65A-97BF-46F1-A8A1-391B47892D78}"/>
+              </a:ext>
+            </a:extLst>
+          </p:cNvPr>
+          <p:cNvSpPr>
+            <a:spLocks xmlns:a="http://schemas.openxmlformats.org/drawingml/2006/main" noGrp="1"/>
+          </p:cNvSpPr>
+          <p:nvPr/>
+        </p:nvSpPr>
+        <p:spPr>
+          <a:xfrm xmlns:a="http://schemas.openxmlformats.org/drawingml/2006/main">
+            <a:off x="666750" y="6419850"/>
+            <a:ext cx="10096500" cy="209550"/>
+          </a:xfrm>
+          <a:prstGeom xmlns:a="http://schemas.openxmlformats.org/drawingml/2006/main" prst="rect">
+            <a:avLst/>
+          </a:prstGeom>
+          <a:noFill xmlns:a="http://schemas.openxmlformats.org/drawingml/2006/main"/>
+          <a:ln xmlns:a="http://schemas.openxmlformats.org/drawingml/2006/main" w="0">
+            <a:noFill/>
+            <a:prstDash val="solid"/>
+          </a:ln>
+        </p:spPr>
+        <p:txBody>
+          <a:bodyPr xmlns:a="http://schemas.openxmlformats.org/drawingml/2006/main"/>
+          <a:lstStyle xmlns:a="http://schemas.openxmlformats.org/drawingml/2006/main"/>
+          <a:p xmlns:a="http://schemas.openxmlformats.org/drawingml/2006/main">
+            <a:pPr>
+              <a:defRPr sz="975">
+                <a:solidFill>
+                  <a:srgbClr val="657083"/>
+                </a:solidFill>
+              </a:defRPr>
+            </a:pPr>
+            <a:r>
+              <a:rPr sz="975">
+                <a:solidFill>
+                  <a:srgbClr val="657083"/>
+                </a:solidFill>
+              </a:rPr>
+              <a:t>EDU 웹개발 교육 플랫폼  ·  09</a:t>
+            </a:r>
+          </a:p>
+        </p:txBody>
+      </p:sp>
+      <p:sp>
+        <p:nvSpPr>
+          <p:cNvPr id="4" name="">
+            <a:extLst xmlns:a="http://schemas.openxmlformats.org/drawingml/2006/main">
+              <a:ext uri="{FF2B5EF4-FFF2-40B4-BE49-F238E27FC236}">
+                <a16:creationId xmlns:a16="http://schemas.microsoft.com/office/drawing/2014/main" id="{6479C369-7B78-41FA-A4E3-C5ED817CC019}"/>
+              </a:ext>
+            </a:extLst>
+          </p:cNvPr>
+          <p:cNvSpPr>
+            <a:spLocks xmlns:a="http://schemas.openxmlformats.org/drawingml/2006/main" noGrp="1"/>
+          </p:cNvSpPr>
+          <p:nvPr/>
+        </p:nvSpPr>
+        <p:spPr>
+          <a:xfrm xmlns:a="http://schemas.openxmlformats.org/drawingml/2006/main">
+            <a:off x="685800" y="1381125"/>
+            <a:ext cx="10820400" cy="1809750"/>
+          </a:xfrm>
+          <a:prstGeom xmlns:a="http://schemas.openxmlformats.org/drawingml/2006/main" prst="roundRect">
+            <a:avLst>
+              <a:gd name="adj" fmla="val 6316"/>
+            </a:avLst>
+          </a:prstGeom>
+          <a:solidFill xmlns:a="http://schemas.openxmlformats.org/drawingml/2006/main">
+            <a:srgbClr val="EEEAFE"/>
+          </a:solidFill>
+          <a:ln xmlns:a="http://schemas.openxmlformats.org/drawingml/2006/main" w="0">
+            <a:noFill/>
+            <a:prstDash val="solid"/>
+          </a:ln>
+        </p:spPr>
+      </p:sp>
+      <p:sp>
+        <p:nvSpPr>
+          <p:cNvPr id="5" name="">
+            <a:extLst xmlns:a="http://schemas.openxmlformats.org/drawingml/2006/main">
+              <a:ext uri="{FF2B5EF4-FFF2-40B4-BE49-F238E27FC236}">
+                <a16:creationId xmlns:a16="http://schemas.microsoft.com/office/drawing/2014/main" id="{4A23FA3B-70B6-42E0-981B-0E21E0806FF0}"/>
+              </a:ext>
+            </a:extLst>
+          </p:cNvPr>
+          <p:cNvSpPr>
+            <a:spLocks xmlns:a="http://schemas.openxmlformats.org/drawingml/2006/main" noGrp="1"/>
+          </p:cNvSpPr>
+          <p:nvPr/>
+        </p:nvSpPr>
+        <p:spPr>
+          <a:xfrm xmlns:a="http://schemas.openxmlformats.org/drawingml/2006/main">
+            <a:off x="1066800" y="1762125"/>
+            <a:ext cx="10058400" cy="1143000"/>
+          </a:xfrm>
+          <a:prstGeom xmlns:a="http://schemas.openxmlformats.org/drawingml/2006/main" prst="rect">
+            <a:avLst/>
+          </a:prstGeom>
+          <a:noFill xmlns:a="http://schemas.openxmlformats.org/drawingml/2006/main"/>
+          <a:ln xmlns:a="http://schemas.openxmlformats.org/drawingml/2006/main" w="0">
+            <a:noFill/>
+            <a:prstDash val="solid"/>
+          </a:ln>
+        </p:spPr>
+        <p:txBody>
+          <a:bodyPr xmlns:a="http://schemas.openxmlformats.org/drawingml/2006/main"/>
+          <a:lstStyle xmlns:a="http://schemas.openxmlformats.org/drawingml/2006/main"/>
+          <a:p xmlns:a="http://schemas.openxmlformats.org/drawingml/2006/main">
+            <a:pPr>
+              <a:defRPr sz="1875">
+                <a:solidFill>
+                  <a:srgbClr val="182235"/>
+                </a:solidFill>
+              </a:defRPr>
+            </a:pPr>
+            <a:r>
+              <a:rPr sz="1875">
+                <a:solidFill>
+                  <a:srgbClr val="182235"/>
+                </a:solidFill>
+              </a:rPr>
+              <a:t>웹서비스의 모든 화면은 HTML에서 시작합니다. 제목, 설명, 버튼의 역할을 정확히 나누면 CSS와 JavaScript를 붙일 때도 길을 잃지 않습니다.</a:t>
+            </a:r>
+          </a:p>
+        </p:txBody>
+      </p:sp>
+      <p:sp>
+        <p:nvSpPr>
+          <p:cNvPr id="6" name="">
+            <a:extLst xmlns:a="http://schemas.openxmlformats.org/drawingml/2006/main">
+              <a:ext uri="{FF2B5EF4-FFF2-40B4-BE49-F238E27FC236}">
+                <a16:creationId xmlns:a16="http://schemas.microsoft.com/office/drawing/2014/main" id="{10BA61E7-88B1-49FE-B3A0-1BC0E4E6D0CE}"/>
+              </a:ext>
+            </a:extLst>
+          </p:cNvPr>
+          <p:cNvSpPr>
+            <a:spLocks xmlns:a="http://schemas.openxmlformats.org/drawingml/2006/main" noGrp="1"/>
+          </p:cNvSpPr>
+          <p:nvPr/>
+        </p:nvSpPr>
+        <p:spPr>
+          <a:xfrm xmlns:a="http://schemas.openxmlformats.org/drawingml/2006/main">
+            <a:off x="838200" y="3714750"/>
+            <a:ext cx="2476500" cy="323850"/>
+          </a:xfrm>
+          <a:prstGeom xmlns:a="http://schemas.openxmlformats.org/drawingml/2006/main" prst="rect">
+            <a:avLst/>
+          </a:prstGeom>
+          <a:noFill xmlns:a="http://schemas.openxmlformats.org/drawingml/2006/main"/>
+          <a:ln xmlns:a="http://schemas.openxmlformats.org/drawingml/2006/main" w="0">
+            <a:noFill/>
+            <a:prstDash val="solid"/>
+          </a:ln>
+        </p:spPr>
+        <p:txBody>
+          <a:bodyPr xmlns:a="http://schemas.openxmlformats.org/drawingml/2006/main"/>
+          <a:lstStyle xmlns:a="http://schemas.openxmlformats.org/drawingml/2006/main"/>
+          <a:p xmlns:a="http://schemas.openxmlformats.org/drawingml/2006/main">
+            <a:pPr>
+              <a:defRPr sz="1575" b="1">
+                <a:solidFill>
+                  <a:srgbClr val="6657E8"/>
+                </a:solidFill>
+              </a:defRPr>
+            </a:pPr>
+            <a:r>
+              <a:rPr sz="1575" b="1">
+                <a:solidFill>
+                  <a:srgbClr val="6657E8"/>
+                </a:solidFill>
+              </a:rPr>
+              <a:t>오늘 완성할 결과</a:t>
+            </a:r>
+          </a:p>
+        </p:txBody>
+      </p:sp>
+      <p:sp>
+        <p:nvSpPr>
+          <p:cNvPr id="7" name="">
+            <a:extLst xmlns:a="http://schemas.openxmlformats.org/drawingml/2006/main">
+              <a:ext uri="{FF2B5EF4-FFF2-40B4-BE49-F238E27FC236}">
+                <a16:creationId xmlns:a16="http://schemas.microsoft.com/office/drawing/2014/main" id="{2B747D8C-4F86-41B9-9FF0-D2B70604550E}"/>
+              </a:ext>
+            </a:extLst>
+          </p:cNvPr>
+          <p:cNvSpPr>
+            <a:spLocks xmlns:a="http://schemas.openxmlformats.org/drawingml/2006/main" noGrp="1"/>
+          </p:cNvSpPr>
+          <p:nvPr/>
+        </p:nvSpPr>
+        <p:spPr>
+          <a:xfrm xmlns:a="http://schemas.openxmlformats.org/drawingml/2006/main">
+            <a:off x="838200" y="4191000"/>
+            <a:ext cx="10096500" cy="857250"/>
+          </a:xfrm>
+          <a:prstGeom xmlns:a="http://schemas.openxmlformats.org/drawingml/2006/main" prst="rect">
+            <a:avLst/>
+          </a:prstGeom>
+          <a:noFill xmlns:a="http://schemas.openxmlformats.org/drawingml/2006/main"/>
+          <a:ln xmlns:a="http://schemas.openxmlformats.org/drawingml/2006/main" w="0">
+            <a:noFill/>
+            <a:prstDash val="solid"/>
+          </a:ln>
+        </p:spPr>
+        <p:txBody>
+          <a:bodyPr xmlns:a="http://schemas.openxmlformats.org/drawingml/2006/main"/>
+          <a:lstStyle xmlns:a="http://schemas.openxmlformats.org/drawingml/2006/main"/>
+          <a:p xmlns:a="http://schemas.openxmlformats.org/drawingml/2006/main">
+            <a:pPr>
+              <a:defRPr sz="2025" b="1">
+                <a:solidFill>
+                  <a:srgbClr val="182235"/>
+                </a:solidFill>
+              </a:defRPr>
+            </a:pPr>
+            <a:r>
+              <a:rPr sz="2025" b="1">
+                <a:solidFill>
+                  <a:srgbClr val="182235"/>
+                </a:solidFill>
+              </a:rPr>
+              <a:t>브라우저에 소개 문장과 교육 보기 버튼이 표시되는 한 페이지를 완성합니다.</a:t>
+            </a:r>
+          </a:p>
+        </p:txBody>
+      </p:sp>
+    </p:spTree>
+    <p:extLst>
+      <p:ext uri="{BB962C8B-B14F-4D97-AF65-F5344CB8AC3E}">
+        <p14:creationId xmlns:p14="http://schemas.microsoft.com/office/powerpoint/2010/main" val="706013320"/>
       </p:ext>
     </p:extLst>
   </p:cSld>
